--- a/Prezentacija_Diplomski_Boris_Letic_RA_207_2021.pptx
+++ b/Prezentacija_Diplomski_Boris_Letic_RA_207_2021.pptx
@@ -319,7 +319,7 @@
           <a:p>
             <a:fld id="{5BCAD085-E8A6-8845-BD4E-CB4CCA059FC4}" type="datetimeFigureOut">
               <a:rPr lang="en-US" smtClean="0"/>
-              <a:t>11/13/2025</a:t>
+              <a:t>11/14/2025</a:t>
             </a:fld>
             <a:endParaRPr lang="en-US"/>
           </a:p>
@@ -489,7 +489,7 @@
           <a:p>
             <a:fld id="{5BCAD085-E8A6-8845-BD4E-CB4CCA059FC4}" type="datetimeFigureOut">
               <a:rPr lang="en-US" smtClean="0"/>
-              <a:t>11/13/2025</a:t>
+              <a:t>11/14/2025</a:t>
             </a:fld>
             <a:endParaRPr lang="en-US"/>
           </a:p>
@@ -669,7 +669,7 @@
           <a:p>
             <a:fld id="{5BCAD085-E8A6-8845-BD4E-CB4CCA059FC4}" type="datetimeFigureOut">
               <a:rPr lang="en-US" smtClean="0"/>
-              <a:t>11/13/2025</a:t>
+              <a:t>11/14/2025</a:t>
             </a:fld>
             <a:endParaRPr lang="en-US"/>
           </a:p>
@@ -839,7 +839,7 @@
           <a:p>
             <a:fld id="{5BCAD085-E8A6-8845-BD4E-CB4CCA059FC4}" type="datetimeFigureOut">
               <a:rPr lang="en-US" smtClean="0"/>
-              <a:t>11/13/2025</a:t>
+              <a:t>11/14/2025</a:t>
             </a:fld>
             <a:endParaRPr lang="en-US"/>
           </a:p>
@@ -1085,7 +1085,7 @@
           <a:p>
             <a:fld id="{5BCAD085-E8A6-8845-BD4E-CB4CCA059FC4}" type="datetimeFigureOut">
               <a:rPr lang="en-US" smtClean="0"/>
-              <a:t>11/13/2025</a:t>
+              <a:t>11/14/2025</a:t>
             </a:fld>
             <a:endParaRPr lang="en-US"/>
           </a:p>
@@ -1373,7 +1373,7 @@
           <a:p>
             <a:fld id="{5BCAD085-E8A6-8845-BD4E-CB4CCA059FC4}" type="datetimeFigureOut">
               <a:rPr lang="en-US" smtClean="0"/>
-              <a:t>11/13/2025</a:t>
+              <a:t>11/14/2025</a:t>
             </a:fld>
             <a:endParaRPr lang="en-US"/>
           </a:p>
@@ -1795,7 +1795,7 @@
           <a:p>
             <a:fld id="{5BCAD085-E8A6-8845-BD4E-CB4CCA059FC4}" type="datetimeFigureOut">
               <a:rPr lang="en-US" smtClean="0"/>
-              <a:t>11/13/2025</a:t>
+              <a:t>11/14/2025</a:t>
             </a:fld>
             <a:endParaRPr lang="en-US"/>
           </a:p>
@@ -1913,7 +1913,7 @@
           <a:p>
             <a:fld id="{5BCAD085-E8A6-8845-BD4E-CB4CCA059FC4}" type="datetimeFigureOut">
               <a:rPr lang="en-US" smtClean="0"/>
-              <a:t>11/13/2025</a:t>
+              <a:t>11/14/2025</a:t>
             </a:fld>
             <a:endParaRPr lang="en-US"/>
           </a:p>
@@ -2008,7 +2008,7 @@
           <a:p>
             <a:fld id="{5BCAD085-E8A6-8845-BD4E-CB4CCA059FC4}" type="datetimeFigureOut">
               <a:rPr lang="en-US" smtClean="0"/>
-              <a:t>11/13/2025</a:t>
+              <a:t>11/14/2025</a:t>
             </a:fld>
             <a:endParaRPr lang="en-US"/>
           </a:p>
@@ -2285,7 +2285,7 @@
           <a:p>
             <a:fld id="{5BCAD085-E8A6-8845-BD4E-CB4CCA059FC4}" type="datetimeFigureOut">
               <a:rPr lang="en-US" smtClean="0"/>
-              <a:t>11/13/2025</a:t>
+              <a:t>11/14/2025</a:t>
             </a:fld>
             <a:endParaRPr lang="en-US"/>
           </a:p>
@@ -2538,7 +2538,7 @@
           <a:p>
             <a:fld id="{5BCAD085-E8A6-8845-BD4E-CB4CCA059FC4}" type="datetimeFigureOut">
               <a:rPr lang="en-US" smtClean="0"/>
-              <a:t>11/13/2025</a:t>
+              <a:t>11/14/2025</a:t>
             </a:fld>
             <a:endParaRPr lang="en-US"/>
           </a:p>
@@ -2751,7 +2751,7 @@
           <a:p>
             <a:fld id="{5BCAD085-E8A6-8845-BD4E-CB4CCA059FC4}" type="datetimeFigureOut">
               <a:rPr lang="en-US" smtClean="0"/>
-              <a:t>11/13/2025</a:t>
+              <a:t>11/14/2025</a:t>
             </a:fld>
             <a:endParaRPr lang="en-US"/>
           </a:p>
@@ -3223,7 +3223,7 @@
         <p:spPr>
           <a:xfrm>
             <a:off x="4167773" y="1909676"/>
-            <a:ext cx="4572000" cy="2062103"/>
+            <a:ext cx="4572000" cy="2554545"/>
           </a:xfrm>
           <a:prstGeom prst="rect">
             <a:avLst/>
@@ -3244,76 +3244,8 @@
               </a:defRPr>
             </a:pPr>
             <a:r>
-              <a:rPr lang="pl-PL" sz="3200" b="1" dirty="0"/>
-              <a:t>Analiza </a:t>
-            </a:r>
-            <a:r>
-              <a:rPr lang="pl-PL" sz="3200" b="1" dirty="0" smtClean="0"/>
-              <a:t>sentimenta </a:t>
-            </a:r>
-            <a:r>
-              <a:rPr lang="pl-PL" sz="3200" b="1" dirty="0"/>
-              <a:t>k</a:t>
-            </a:r>
-            <a:r>
-              <a:rPr lang="pl-PL" sz="3200" b="1" dirty="0" smtClean="0"/>
-              <a:t>ripto </a:t>
-            </a:r>
-            <a:r>
-              <a:rPr lang="pl-PL" sz="3200" b="1" dirty="0"/>
-              <a:t>z</a:t>
-            </a:r>
-            <a:r>
-              <a:rPr lang="pl-PL" sz="3200" b="1" dirty="0" smtClean="0"/>
-              <a:t>ajednice </a:t>
-            </a:r>
-            <a:r>
-              <a:rPr lang="pl-PL" sz="3200" b="1" dirty="0"/>
-              <a:t>na </a:t>
-            </a:r>
-            <a:r>
-              <a:rPr lang="pl-PL" sz="3200" b="1" dirty="0" smtClean="0"/>
-              <a:t>društvenim </a:t>
-            </a:r>
-            <a:r>
-              <a:rPr lang="pl-PL" sz="3200" b="1" dirty="0"/>
-              <a:t>m</a:t>
-            </a:r>
-            <a:r>
-              <a:rPr lang="pl-PL" sz="3200" b="1" dirty="0" smtClean="0"/>
-              <a:t>režama</a:t>
-            </a:r>
-            <a:r>
-              <a:rPr lang="en-US" sz="3200" b="1" dirty="0" smtClean="0"/>
-              <a:t> </a:t>
-            </a:r>
-            <a:r>
-              <a:rPr lang="sr-Latn-RS" sz="3200" b="1" dirty="0" smtClean="0"/>
-              <a:t>p</a:t>
-            </a:r>
-            <a:r>
-              <a:rPr lang="en-US" sz="3200" b="1" dirty="0" err="1" smtClean="0"/>
-              <a:t>omo</a:t>
-            </a:r>
-            <a:r>
-              <a:rPr lang="sr-Latn-RS" sz="3200" b="1" dirty="0" smtClean="0"/>
-              <a:t>ću</a:t>
-            </a:r>
-            <a:r>
-              <a:rPr lang="sr-Latn-RS" sz="3200" b="1" dirty="0"/>
-              <a:t> m</a:t>
-            </a:r>
-            <a:r>
-              <a:rPr lang="sr-Latn-RS" sz="3200" b="1" dirty="0" smtClean="0"/>
-              <a:t>ašinskog </a:t>
-            </a:r>
-            <a:r>
-              <a:rPr lang="sr-Latn-RS" sz="3200" b="1" dirty="0"/>
-              <a:t>u</a:t>
-            </a:r>
-            <a:r>
-              <a:rPr lang="sr-Latn-RS" sz="3200" b="1" dirty="0" smtClean="0"/>
-              <a:t>čenja</a:t>
+              <a:rPr lang="sr-Cyrl-RS" sz="3200" b="1" dirty="0" smtClean="0"/>
+              <a:t>Анализа сентимента крипто заједнице на друштвеним мрежама помоћу машинског учења</a:t>
             </a:r>
             <a:endParaRPr dirty="0"/>
           </a:p>
@@ -3328,7 +3260,7 @@
         <p:spPr>
           <a:xfrm>
             <a:off x="93215" y="6158884"/>
-            <a:ext cx="2470163" cy="584775"/>
+            <a:ext cx="2908168" cy="584775"/>
           </a:xfrm>
           <a:prstGeom prst="rect">
             <a:avLst/>
@@ -3349,21 +3281,18 @@
               </a:defRPr>
             </a:pPr>
             <a:r>
-              <a:rPr sz="3200" dirty="0" err="1">
+              <a:rPr lang="sr-Cyrl-RS" sz="3200" dirty="0" smtClean="0">
                 <a:solidFill>
                   <a:srgbClr val="9DD5C8"/>
                 </a:solidFill>
               </a:rPr>
-              <a:t>Diplomski</a:t>
-            </a:r>
-            <a:r>
-              <a:rPr sz="3200" dirty="0">
-                <a:solidFill>
-                  <a:srgbClr val="9DD5C8"/>
-                </a:solidFill>
-              </a:rPr>
-              <a:t> rad</a:t>
-            </a:r>
+              <a:t>Дипломски рад</a:t>
+            </a:r>
+            <a:endParaRPr sz="3200" dirty="0">
+              <a:solidFill>
+                <a:srgbClr val="9DD5C8"/>
+              </a:solidFill>
+            </a:endParaRPr>
           </a:p>
         </p:txBody>
       </p:sp>
@@ -3375,8 +3304,8 @@
         </p:nvSpPr>
         <p:spPr>
           <a:xfrm>
-            <a:off x="4167773" y="6112717"/>
-            <a:ext cx="2829429" cy="677108"/>
+            <a:off x="3906175" y="6112717"/>
+            <a:ext cx="2994794" cy="677108"/>
           </a:xfrm>
           <a:prstGeom prst="rect">
             <a:avLst/>
@@ -3390,52 +3319,12 @@
           <a:lstStyle/>
           <a:p>
             <a:r>
-              <a:rPr sz="1900" b="1" dirty="0" err="1" smtClean="0">
+              <a:rPr lang="sr-Cyrl-RS" sz="1900" b="1" dirty="0" smtClean="0">
                 <a:solidFill>
                   <a:srgbClr val="1C453D"/>
                 </a:solidFill>
               </a:rPr>
-              <a:t>Univerzitet</a:t>
-            </a:r>
-            <a:r>
-              <a:rPr sz="1900" b="1" dirty="0" smtClean="0">
-                <a:solidFill>
-                  <a:srgbClr val="1C453D"/>
-                </a:solidFill>
-              </a:rPr>
-              <a:t> </a:t>
-            </a:r>
-            <a:r>
-              <a:rPr sz="1900" b="1" dirty="0">
-                <a:solidFill>
-                  <a:srgbClr val="1C453D"/>
-                </a:solidFill>
-              </a:rPr>
-              <a:t>u </a:t>
-            </a:r>
-            <a:r>
-              <a:rPr sz="1900" b="1" dirty="0" err="1">
-                <a:solidFill>
-                  <a:srgbClr val="1C453D"/>
-                </a:solidFill>
-              </a:rPr>
-              <a:t>Novom</a:t>
-            </a:r>
-            <a:r>
-              <a:rPr sz="1900" b="1" dirty="0">
-                <a:solidFill>
-                  <a:srgbClr val="1C453D"/>
-                </a:solidFill>
-              </a:rPr>
-              <a:t> </a:t>
-            </a:r>
-            <a:r>
-              <a:rPr sz="1900" b="1" dirty="0" err="1" smtClean="0">
-                <a:solidFill>
-                  <a:srgbClr val="1C453D"/>
-                </a:solidFill>
-              </a:rPr>
-              <a:t>Sadu</a:t>
+              <a:t>Универзитет у Новом Саду</a:t>
             </a:r>
             <a:endParaRPr lang="en-US" sz="1900" b="1" dirty="0" smtClean="0">
               <a:solidFill>
@@ -3445,44 +3334,12 @@
           </a:p>
           <a:p>
             <a:r>
-              <a:rPr sz="1900" b="1" dirty="0" err="1" smtClean="0">
+              <a:rPr lang="sr-Cyrl-RS" sz="1900" b="1" dirty="0" smtClean="0">
                 <a:solidFill>
                   <a:srgbClr val="1C453D"/>
                 </a:solidFill>
               </a:rPr>
-              <a:t>Fakultet</a:t>
-            </a:r>
-            <a:r>
-              <a:rPr sz="1900" b="1" dirty="0" smtClean="0">
-                <a:solidFill>
-                  <a:srgbClr val="1C453D"/>
-                </a:solidFill>
-              </a:rPr>
-              <a:t> </a:t>
-            </a:r>
-            <a:r>
-              <a:rPr sz="1900" b="1" dirty="0" err="1">
-                <a:solidFill>
-                  <a:srgbClr val="1C453D"/>
-                </a:solidFill>
-              </a:rPr>
-              <a:t>tehničkih</a:t>
-            </a:r>
-            <a:r>
-              <a:rPr sz="1900" b="1" dirty="0">
-                <a:solidFill>
-                  <a:srgbClr val="1C453D"/>
-                </a:solidFill>
-              </a:rPr>
-              <a:t> </a:t>
-            </a:r>
-            <a:r>
-              <a:rPr sz="1900" b="1" dirty="0" err="1">
-                <a:solidFill>
-                  <a:srgbClr val="1C453D"/>
-                </a:solidFill>
-              </a:rPr>
-              <a:t>nauka</a:t>
+              <a:t>Факултет техничких наука</a:t>
             </a:r>
             <a:endParaRPr sz="1900" b="1" dirty="0">
               <a:solidFill>
@@ -3500,8 +3357,8 @@
         </p:nvSpPr>
         <p:spPr>
           <a:xfrm flipH="1">
-            <a:off x="4167773" y="4937836"/>
-            <a:ext cx="4754286" cy="954107"/>
+            <a:off x="3906175" y="4937836"/>
+            <a:ext cx="5015884" cy="954107"/>
           </a:xfrm>
           <a:prstGeom prst="rect">
             <a:avLst/>
@@ -3522,84 +3379,12 @@
               </a:defRPr>
             </a:pPr>
             <a:r>
-              <a:rPr lang="en-US" sz="1900" b="1" dirty="0" smtClean="0">
+              <a:rPr lang="sr-Cyrl-RS" sz="1900" b="1" dirty="0" smtClean="0">
                 <a:solidFill>
                   <a:srgbClr val="1C453D"/>
                 </a:solidFill>
               </a:rPr>
-              <a:t>Mentor: </a:t>
-            </a:r>
-            <a:r>
-              <a:rPr lang="en-US" sz="1900" b="1" dirty="0" err="1" smtClean="0">
-                <a:solidFill>
-                  <a:srgbClr val="1C453D"/>
-                </a:solidFill>
-              </a:rPr>
-              <a:t>dr</a:t>
-            </a:r>
-            <a:r>
-              <a:rPr lang="en-US" sz="1900" b="1" dirty="0" smtClean="0">
-                <a:solidFill>
-                  <a:srgbClr val="1C453D"/>
-                </a:solidFill>
-              </a:rPr>
-              <a:t> </a:t>
-            </a:r>
-            <a:r>
-              <a:rPr lang="en-US" sz="1900" b="1" dirty="0" err="1" smtClean="0">
-                <a:solidFill>
-                  <a:srgbClr val="1C453D"/>
-                </a:solidFill>
-              </a:rPr>
-              <a:t>Dušan</a:t>
-            </a:r>
-            <a:r>
-              <a:rPr lang="en-US" sz="1900" b="1" dirty="0" smtClean="0">
-                <a:solidFill>
-                  <a:srgbClr val="1C453D"/>
-                </a:solidFill>
-              </a:rPr>
-              <a:t> </a:t>
-            </a:r>
-            <a:r>
-              <a:rPr lang="en-US" sz="1900" b="1" dirty="0" err="1" smtClean="0">
-                <a:solidFill>
-                  <a:srgbClr val="1C453D"/>
-                </a:solidFill>
-              </a:rPr>
-              <a:t>Gajić</a:t>
-            </a:r>
-            <a:r>
-              <a:rPr lang="en-US" sz="1900" b="1" dirty="0" smtClean="0">
-                <a:solidFill>
-                  <a:srgbClr val="1C453D"/>
-                </a:solidFill>
-              </a:rPr>
-              <a:t>, </a:t>
-            </a:r>
-            <a:r>
-              <a:rPr lang="en-US" sz="1900" b="1" dirty="0" err="1" smtClean="0">
-                <a:solidFill>
-                  <a:srgbClr val="1C453D"/>
-                </a:solidFill>
-              </a:rPr>
-              <a:t>vanredni</a:t>
-            </a:r>
-            <a:r>
-              <a:rPr lang="sr-Latn-RS" sz="1900" b="1" dirty="0" smtClean="0">
-                <a:solidFill>
-                  <a:srgbClr val="1C453D"/>
-                </a:solidFill>
-              </a:rPr>
-              <a:t> </a:t>
-            </a:r>
-            <a:r>
-              <a:rPr lang="en-US" sz="1900" b="1" dirty="0" err="1" smtClean="0">
-                <a:solidFill>
-                  <a:srgbClr val="1C453D"/>
-                </a:solidFill>
-              </a:rPr>
-              <a:t>profesor</a:t>
+              <a:t>Ментор: др Душан Гајић, ванредни професор</a:t>
             </a:r>
             <a:endParaRPr lang="en-US" sz="1900" b="1" dirty="0" smtClean="0">
               <a:solidFill>
@@ -3616,12 +3401,12 @@
               </a:defRPr>
             </a:pPr>
             <a:r>
-              <a:rPr lang="en-US" sz="1900" b="1" dirty="0" err="1" smtClean="0">
+              <a:rPr lang="sr-Cyrl-RS" sz="1900" b="1" dirty="0" smtClean="0">
                 <a:solidFill>
                   <a:srgbClr val="1C453D"/>
                 </a:solidFill>
               </a:rPr>
-              <a:t>Kandidat</a:t>
+              <a:t>Кандидат</a:t>
             </a:r>
             <a:r>
               <a:rPr lang="en-US" sz="1900" b="1" dirty="0" smtClean="0">
@@ -3629,15 +3414,15 @@
                   <a:srgbClr val="1C453D"/>
                 </a:solidFill>
               </a:rPr>
-              <a:t>: Boris </a:t>
-            </a:r>
-            <a:r>
-              <a:rPr lang="en-US" sz="1900" b="1" dirty="0" err="1" smtClean="0">
+              <a:t>: </a:t>
+            </a:r>
+            <a:r>
+              <a:rPr lang="sr-Cyrl-RS" sz="1900" b="1" dirty="0" smtClean="0">
                 <a:solidFill>
                   <a:srgbClr val="1C453D"/>
                 </a:solidFill>
               </a:rPr>
-              <a:t>Letić</a:t>
+              <a:t>Борис Летић </a:t>
             </a:r>
             <a:r>
               <a:rPr lang="en-US" sz="1900" b="1" dirty="0" smtClean="0">
@@ -3645,7 +3430,15 @@
                   <a:srgbClr val="1C453D"/>
                 </a:solidFill>
               </a:rPr>
-              <a:t> RA 207/2021</a:t>
+              <a:t>RA </a:t>
+            </a:r>
+            <a:r>
+              <a:rPr lang="en-US" sz="1900" b="1" dirty="0" smtClean="0">
+                <a:solidFill>
+                  <a:srgbClr val="1C453D"/>
+                </a:solidFill>
+              </a:rPr>
+              <a:t>207/2021</a:t>
             </a:r>
           </a:p>
           <a:p>
@@ -3914,7 +3707,7 @@
         <p:spPr>
           <a:xfrm>
             <a:off x="457200" y="457200"/>
-            <a:ext cx="8229600" cy="914400"/>
+            <a:ext cx="6976205" cy="646331"/>
           </a:xfrm>
           <a:prstGeom prst="rect">
             <a:avLst/>
@@ -3935,8 +3728,10 @@
               </a:defRPr>
             </a:pPr>
             <a:r>
-              <a:t>Rezultati - Performanse Modela</a:t>
-            </a:r>
+              <a:rPr lang="sr-Cyrl-RS" dirty="0" smtClean="0"/>
+              <a:t>Резултати – перформансе модела</a:t>
+            </a:r>
+            <a:endParaRPr dirty="0"/>
           </a:p>
         </p:txBody>
       </p:sp>
@@ -3948,8 +3743,8 @@
         </p:nvSpPr>
         <p:spPr>
           <a:xfrm>
-            <a:off x="1825709" y="1828800"/>
-            <a:ext cx="737702" cy="338554"/>
+            <a:off x="1797144" y="1828800"/>
+            <a:ext cx="794833" cy="338554"/>
           </a:xfrm>
           <a:prstGeom prst="rect">
             <a:avLst/>
@@ -3970,13 +3765,18 @@
               </a:defRPr>
             </a:pPr>
             <a:r>
-              <a:rPr dirty="0">
+              <a:rPr lang="sr-Cyrl-RS" dirty="0" smtClean="0">
                 <a:solidFill>
                   <a:srgbClr val="1C453D"/>
                 </a:solidFill>
               </a:rPr>
-              <a:t>Model</a:t>
-            </a:r>
+              <a:t>Модел</a:t>
+            </a:r>
+            <a:endParaRPr dirty="0">
+              <a:solidFill>
+                <a:srgbClr val="1C453D"/>
+              </a:solidFill>
+            </a:endParaRPr>
           </a:p>
         </p:txBody>
       </p:sp>
@@ -3988,8 +3788,8 @@
         </p:nvSpPr>
         <p:spPr>
           <a:xfrm>
-            <a:off x="3549352" y="1828800"/>
-            <a:ext cx="948016" cy="338554"/>
+            <a:off x="3406043" y="1828800"/>
+            <a:ext cx="1234633" cy="338554"/>
           </a:xfrm>
           <a:prstGeom prst="rect">
             <a:avLst/>
@@ -4010,13 +3810,18 @@
               </a:defRPr>
             </a:pPr>
             <a:r>
-              <a:rPr dirty="0">
+              <a:rPr lang="sr-Cyrl-RS" dirty="0" smtClean="0">
                 <a:solidFill>
                   <a:srgbClr val="1C453D"/>
                 </a:solidFill>
               </a:rPr>
-              <a:t>Accuracy</a:t>
-            </a:r>
+              <a:t>Прецизност</a:t>
+            </a:r>
+            <a:endParaRPr dirty="0">
+              <a:solidFill>
+                <a:srgbClr val="1C453D"/>
+              </a:solidFill>
+            </a:endParaRPr>
           </a:p>
         </p:txBody>
       </p:sp>
@@ -4068,8 +3873,8 @@
         </p:nvSpPr>
         <p:spPr>
           <a:xfrm>
-            <a:off x="7015842" y="1828800"/>
-            <a:ext cx="1330236" cy="338554"/>
+            <a:off x="6779852" y="1828800"/>
+            <a:ext cx="1802225" cy="338554"/>
           </a:xfrm>
           <a:prstGeom prst="rect">
             <a:avLst/>
@@ -4090,13 +3895,18 @@
               </a:defRPr>
             </a:pPr>
             <a:r>
-              <a:rPr dirty="0">
+              <a:rPr lang="sr-Cyrl-RS" dirty="0" smtClean="0">
                 <a:solidFill>
                   <a:srgbClr val="1C453D"/>
                 </a:solidFill>
               </a:rPr>
-              <a:t>Training Time</a:t>
-            </a:r>
+              <a:t>Време тренирања</a:t>
+            </a:r>
+            <a:endParaRPr dirty="0">
+              <a:solidFill>
+                <a:srgbClr val="1C453D"/>
+              </a:solidFill>
+            </a:endParaRPr>
           </a:p>
         </p:txBody>
       </p:sp>
@@ -4213,8 +4023,8 @@
         </p:nvSpPr>
         <p:spPr>
           <a:xfrm>
-            <a:off x="6858000" y="2468880"/>
-            <a:ext cx="1645920" cy="457200"/>
+            <a:off x="7086887" y="2468880"/>
+            <a:ext cx="1188147" cy="323165"/>
           </a:xfrm>
           <a:prstGeom prst="rect">
             <a:avLst/>
@@ -4235,8 +4045,14 @@
               </a:defRPr>
             </a:pPr>
             <a:r>
-              <a:t>~10 sekundi</a:t>
-            </a:r>
+              <a:rPr dirty="0"/>
+              <a:t>~10 </a:t>
+            </a:r>
+            <a:r>
+              <a:rPr lang="sr-Cyrl-RS" dirty="0" smtClean="0"/>
+              <a:t>секунди</a:t>
+            </a:r>
+            <a:endParaRPr dirty="0"/>
           </a:p>
         </p:txBody>
       </p:sp>
@@ -4353,8 +4169,8 @@
         </p:nvSpPr>
         <p:spPr>
           <a:xfrm>
-            <a:off x="6858000" y="3108960"/>
-            <a:ext cx="1645920" cy="457200"/>
+            <a:off x="7086887" y="3108960"/>
+            <a:ext cx="1188147" cy="323165"/>
           </a:xfrm>
           <a:prstGeom prst="rect">
             <a:avLst/>
@@ -4375,8 +4191,14 @@
               </a:defRPr>
             </a:pPr>
             <a:r>
-              <a:t>~45 sekundi</a:t>
-            </a:r>
+              <a:rPr dirty="0"/>
+              <a:t>~45 </a:t>
+            </a:r>
+            <a:r>
+              <a:rPr lang="sr-Cyrl-RS" dirty="0" smtClean="0"/>
+              <a:t>секунди</a:t>
+            </a:r>
+            <a:endParaRPr dirty="0"/>
           </a:p>
         </p:txBody>
       </p:sp>
@@ -4493,8 +4315,8 @@
         </p:nvSpPr>
         <p:spPr>
           <a:xfrm>
-            <a:off x="6858000" y="3749040"/>
-            <a:ext cx="1645920" cy="457200"/>
+            <a:off x="6875291" y="3749040"/>
+            <a:ext cx="1611339" cy="323165"/>
           </a:xfrm>
           <a:prstGeom prst="rect">
             <a:avLst/>
@@ -4515,7 +4337,20 @@
               </a:defRPr>
             </a:pPr>
             <a:r>
-              <a:t>~15 minuta (GPU)</a:t>
+              <a:rPr dirty="0"/>
+              <a:t>~15 </a:t>
+            </a:r>
+            <a:r>
+              <a:rPr lang="sr-Cyrl-RS" dirty="0" smtClean="0"/>
+              <a:t>минута</a:t>
+            </a:r>
+            <a:r>
+              <a:rPr dirty="0" smtClean="0"/>
+              <a:t> </a:t>
+            </a:r>
+            <a:r>
+              <a:rPr dirty="0"/>
+              <a:t>(GPU)</a:t>
             </a:r>
           </a:p>
         </p:txBody>
@@ -4575,8 +4410,8 @@
         </p:nvSpPr>
         <p:spPr>
           <a:xfrm>
-            <a:off x="1554480" y="4754880"/>
-            <a:ext cx="6035040" cy="731520"/>
+            <a:off x="1463040" y="4859030"/>
+            <a:ext cx="6217920" cy="523220"/>
           </a:xfrm>
           <a:prstGeom prst="rect">
             <a:avLst/>
@@ -4597,11 +4432,67 @@
               </a:defRPr>
             </a:pPr>
             <a:r>
-              <a:t>🏆 SVM postigao najbolje rezultate (95.24%), dok je BERT bio drugi sa 94.84%.</a:t>
-            </a:r>
-            <a:br/>
-            <a:r>
-              <a:t>Naive Bayes pokazao solidne baseline performanse (90.87%).</a:t>
+              <a:rPr dirty="0"/>
+              <a:t>🏆 SVM </a:t>
+            </a:r>
+            <a:r>
+              <a:rPr lang="sr-Cyrl-RS" dirty="0" smtClean="0"/>
+              <a:t>постигао најбоље резултате </a:t>
+            </a:r>
+            <a:r>
+              <a:rPr dirty="0" smtClean="0"/>
+              <a:t>(95.24</a:t>
+            </a:r>
+            <a:r>
+              <a:rPr dirty="0"/>
+              <a:t>%), </a:t>
+            </a:r>
+            <a:r>
+              <a:rPr lang="sr-Cyrl-RS" dirty="0" smtClean="0"/>
+              <a:t>док је </a:t>
+            </a:r>
+            <a:r>
+              <a:rPr dirty="0" smtClean="0"/>
+              <a:t>BERT </a:t>
+            </a:r>
+            <a:r>
+              <a:rPr lang="sr-Cyrl-RS" dirty="0" smtClean="0"/>
+              <a:t>био други са </a:t>
+            </a:r>
+            <a:r>
+              <a:rPr dirty="0" smtClean="0"/>
+              <a:t>94.84</a:t>
+            </a:r>
+            <a:r>
+              <a:rPr dirty="0"/>
+              <a:t>%.</a:t>
+            </a:r>
+            <a:br>
+              <a:rPr dirty="0"/>
+            </a:br>
+            <a:r>
+              <a:rPr dirty="0"/>
+              <a:t>Naive Bayes </a:t>
+            </a:r>
+            <a:r>
+              <a:rPr lang="sr-Cyrl-RS" dirty="0" smtClean="0"/>
+              <a:t>показао солидне </a:t>
+            </a:r>
+            <a:r>
+              <a:rPr dirty="0" smtClean="0"/>
+              <a:t>baseline </a:t>
+            </a:r>
+            <a:r>
+              <a:rPr lang="sr-Cyrl-RS" dirty="0" smtClean="0"/>
+              <a:t>перформансе</a:t>
+            </a:r>
+            <a:r>
+              <a:rPr dirty="0" smtClean="0"/>
+              <a:t> </a:t>
+            </a:r>
+            <a:r>
+              <a:rPr dirty="0"/>
+              <a:t>(90.87%).</a:t>
             </a:r>
           </a:p>
         </p:txBody>
@@ -4691,7 +4582,7 @@
         <p:spPr>
           <a:xfrm>
             <a:off x="457200" y="457200"/>
-            <a:ext cx="8229600" cy="914400"/>
+            <a:ext cx="7691977" cy="646331"/>
           </a:xfrm>
           <a:prstGeom prst="rect">
             <a:avLst/>
@@ -4712,8 +4603,18 @@
               </a:defRPr>
             </a:pPr>
             <a:r>
-              <a:t>Korelaciona Analiza - Metodologija</a:t>
-            </a:r>
+              <a:rPr lang="sr-Cyrl-RS" dirty="0" smtClean="0"/>
+              <a:t>Корелациона анализа </a:t>
+            </a:r>
+            <a:r>
+              <a:rPr dirty="0" smtClean="0"/>
+              <a:t>- </a:t>
+            </a:r>
+            <a:r>
+              <a:rPr lang="sr-Cyrl-RS" dirty="0" smtClean="0"/>
+              <a:t>методологија</a:t>
+            </a:r>
+            <a:endParaRPr dirty="0"/>
           </a:p>
         </p:txBody>
       </p:sp>
@@ -4726,7 +4627,7 @@
         <p:spPr>
           <a:xfrm>
             <a:off x="731520" y="1645920"/>
-            <a:ext cx="7772400" cy="4572000"/>
+            <a:ext cx="7772400" cy="4647426"/>
           </a:xfrm>
           <a:prstGeom prst="rect">
             <a:avLst/>
@@ -4750,6 +4651,7 @@
               </a:defRPr>
             </a:pPr>
             <a:r>
+              <a:rPr dirty="0"/>
               <a:t>Sentiment Scoring</a:t>
             </a:r>
           </a:p>
@@ -4765,7 +4667,48 @@
               </a:defRPr>
             </a:pPr>
             <a:r>
-              <a:t>Svaki tweet klasifikovan u 3 klase: pozitivan (+1), neutralan (0), negativan (-1)</a:t>
+              <a:rPr lang="sr-Cyrl-RS" dirty="0" smtClean="0"/>
+              <a:t>Сваки твит класификован у 3 класе</a:t>
+            </a:r>
+            <a:r>
+              <a:rPr dirty="0" smtClean="0"/>
+              <a:t>: </a:t>
+            </a:r>
+            <a:r>
+              <a:rPr lang="sr-Cyrl-RS" dirty="0" smtClean="0"/>
+              <a:t>позитиван</a:t>
+            </a:r>
+            <a:r>
+              <a:rPr dirty="0" smtClean="0"/>
+              <a:t> </a:t>
+            </a:r>
+            <a:r>
+              <a:rPr dirty="0"/>
+              <a:t>(+1), </a:t>
+            </a:r>
+            <a:r>
+              <a:rPr lang="sr-Cyrl-RS" dirty="0" smtClean="0"/>
+              <a:t>неутралан</a:t>
+            </a:r>
+            <a:r>
+              <a:rPr dirty="0" smtClean="0"/>
+              <a:t> </a:t>
+            </a:r>
+            <a:r>
+              <a:rPr dirty="0"/>
+              <a:t>(0), </a:t>
+            </a:r>
+            <a:r>
+              <a:rPr lang="sr-Cyrl-RS" dirty="0" smtClean="0"/>
+              <a:t>негативан</a:t>
+            </a:r>
+            <a:r>
+              <a:rPr dirty="0" smtClean="0"/>
+              <a:t> </a:t>
+            </a:r>
+            <a:r>
+              <a:rPr dirty="0"/>
+              <a:t>(-1)</a:t>
             </a:r>
           </a:p>
           <a:p>
@@ -4780,8 +4723,22 @@
               </a:defRPr>
             </a:pPr>
             <a:r>
-              <a:t>Dnevni sentiment score = prosek svih tweetova tog dana</a:t>
-            </a:r>
+              <a:rPr lang="sr-Cyrl-RS" dirty="0" smtClean="0"/>
+              <a:t>Дневни</a:t>
+            </a:r>
+            <a:r>
+              <a:rPr dirty="0" smtClean="0"/>
+              <a:t> </a:t>
+            </a:r>
+            <a:r>
+              <a:rPr dirty="0"/>
+              <a:t>sentiment score = </a:t>
+            </a:r>
+            <a:r>
+              <a:rPr lang="sr-Cyrl-RS" dirty="0" smtClean="0"/>
+              <a:t>просек свих твитова тог дана</a:t>
+            </a:r>
+            <a:endParaRPr dirty="0"/>
           </a:p>
           <a:p>
             <a:pPr>
@@ -4795,8 +4752,54 @@
               </a:defRPr>
             </a:pPr>
             <a:r>
-              <a:t>Opseg vrednosti: -1.0 (vrlo negativan) do +1.0 (vrlo pozitivan)</a:t>
-            </a:r>
+              <a:rPr lang="sr-Cyrl-RS" dirty="0" smtClean="0"/>
+              <a:t>Опсег вредности</a:t>
+            </a:r>
+            <a:r>
+              <a:rPr dirty="0" smtClean="0"/>
+              <a:t>: </a:t>
+            </a:r>
+            <a:r>
+              <a:rPr dirty="0"/>
+              <a:t>-1.0 </a:t>
+            </a:r>
+            <a:r>
+              <a:rPr dirty="0" smtClean="0"/>
+              <a:t>(</a:t>
+            </a:r>
+            <a:r>
+              <a:rPr lang="sr-Cyrl-RS" dirty="0" smtClean="0"/>
+              <a:t>врло негативан</a:t>
+            </a:r>
+            <a:r>
+              <a:rPr dirty="0" smtClean="0"/>
+              <a:t>) </a:t>
+            </a:r>
+            <a:r>
+              <a:rPr lang="sr-Cyrl-RS" dirty="0" smtClean="0"/>
+              <a:t>до</a:t>
+            </a:r>
+            <a:r>
+              <a:rPr dirty="0" smtClean="0"/>
+              <a:t> </a:t>
+            </a:r>
+            <a:r>
+              <a:rPr dirty="0"/>
+              <a:t>+1.0 </a:t>
+            </a:r>
+            <a:r>
+              <a:rPr dirty="0" smtClean="0"/>
+              <a:t>(</a:t>
+            </a:r>
+            <a:r>
+              <a:rPr lang="sr-Cyrl-RS" dirty="0" smtClean="0"/>
+              <a:t>врло позитиван</a:t>
+            </a:r>
+            <a:r>
+              <a:rPr dirty="0" smtClean="0"/>
+              <a:t>)</a:t>
+            </a:r>
+            <a:endParaRPr dirty="0"/>
           </a:p>
           <a:p>
             <a:pPr>
@@ -4810,6 +4813,7 @@
               </a:defRPr>
             </a:pPr>
             <a:r>
+              <a:rPr dirty="0"/>
               <a:t>Bitcoin Price Data</a:t>
             </a:r>
           </a:p>
@@ -4825,7 +4829,20 @@
               </a:defRPr>
             </a:pPr>
             <a:r>
-              <a:t>Preuzeto preko yfinance API</a:t>
+              <a:rPr lang="sr-Cyrl-RS" dirty="0" smtClean="0"/>
+              <a:t>Преузето преко </a:t>
+            </a:r>
+            <a:r>
+              <a:rPr dirty="0" err="1" smtClean="0"/>
+              <a:t>yfinance</a:t>
+            </a:r>
+            <a:r>
+              <a:rPr dirty="0" smtClean="0"/>
+              <a:t> </a:t>
+            </a:r>
+            <a:r>
+              <a:rPr dirty="0"/>
+              <a:t>API</a:t>
             </a:r>
           </a:p>
           <a:p>
@@ -4840,8 +4857,46 @@
               </a:defRPr>
             </a:pPr>
             <a:r>
-              <a:t>Vremenski period: Januar - Maj 2024 (106 dana)</a:t>
-            </a:r>
+              <a:rPr lang="sr-Cyrl-RS" dirty="0" smtClean="0"/>
+              <a:t>Временски период</a:t>
+            </a:r>
+            <a:r>
+              <a:rPr dirty="0" smtClean="0"/>
+              <a:t>: </a:t>
+            </a:r>
+            <a:r>
+              <a:rPr lang="sr-Cyrl-RS" dirty="0" smtClean="0"/>
+              <a:t>Јануар</a:t>
+            </a:r>
+            <a:r>
+              <a:rPr dirty="0" smtClean="0"/>
+              <a:t> </a:t>
+            </a:r>
+            <a:r>
+              <a:rPr dirty="0"/>
+              <a:t>- </a:t>
+            </a:r>
+            <a:r>
+              <a:rPr lang="sr-Cyrl-RS" dirty="0" smtClean="0"/>
+              <a:t>Мај</a:t>
+            </a:r>
+            <a:r>
+              <a:rPr dirty="0" smtClean="0"/>
+              <a:t> </a:t>
+            </a:r>
+            <a:r>
+              <a:rPr dirty="0"/>
+              <a:t>2024 (106 </a:t>
+            </a:r>
+            <a:r>
+              <a:rPr lang="sr-Cyrl-RS" dirty="0" smtClean="0"/>
+              <a:t>дана</a:t>
+            </a:r>
+            <a:r>
+              <a:rPr dirty="0" smtClean="0"/>
+              <a:t>)</a:t>
+            </a:r>
+            <a:endParaRPr dirty="0"/>
           </a:p>
           <a:p>
             <a:pPr>
@@ -4855,7 +4910,16 @@
               </a:defRPr>
             </a:pPr>
             <a:r>
-              <a:t>Metrike: closing price, volume, daily change (%)</a:t>
+              <a:rPr lang="sr-Cyrl-RS" dirty="0" smtClean="0"/>
+              <a:t>Метрике</a:t>
+            </a:r>
+            <a:r>
+              <a:rPr dirty="0" smtClean="0"/>
+              <a:t>: </a:t>
+            </a:r>
+            <a:r>
+              <a:rPr dirty="0"/>
+              <a:t>closing price, volume, daily change (%)</a:t>
             </a:r>
           </a:p>
           <a:p>
@@ -4870,8 +4934,10 @@
               </a:defRPr>
             </a:pPr>
             <a:r>
-              <a:t>Statistička Analiza</a:t>
-            </a:r>
+              <a:rPr lang="sr-Cyrl-RS" dirty="0" smtClean="0"/>
+              <a:t>Статистичка анализа</a:t>
+            </a:r>
+            <a:endParaRPr dirty="0"/>
           </a:p>
           <a:p>
             <a:pPr>
@@ -4885,8 +4951,22 @@
               </a:defRPr>
             </a:pPr>
             <a:r>
-              <a:t>Pearson correlation - linearna veza</a:t>
-            </a:r>
+              <a:rPr dirty="0"/>
+              <a:t>Pearson correlation </a:t>
+            </a:r>
+            <a:r>
+              <a:rPr lang="en-US" dirty="0" smtClean="0"/>
+              <a:t>–</a:t>
+            </a:r>
+            <a:r>
+              <a:rPr dirty="0" smtClean="0"/>
+              <a:t> </a:t>
+            </a:r>
+            <a:r>
+              <a:rPr lang="sr-Cyrl-RS" dirty="0" smtClean="0"/>
+              <a:t>линеарна веза</a:t>
+            </a:r>
+            <a:endParaRPr dirty="0"/>
           </a:p>
           <a:p>
             <a:pPr>
@@ -4900,8 +4980,22 @@
               </a:defRPr>
             </a:pPr>
             <a:r>
-              <a:t>Spearman correlation - monotona veza</a:t>
-            </a:r>
+              <a:rPr dirty="0"/>
+              <a:t>Spearman correlation </a:t>
+            </a:r>
+            <a:r>
+              <a:rPr lang="en-US" dirty="0" smtClean="0"/>
+              <a:t>–</a:t>
+            </a:r>
+            <a:r>
+              <a:rPr dirty="0" smtClean="0"/>
+              <a:t> </a:t>
+            </a:r>
+            <a:r>
+              <a:rPr lang="sr-Cyrl-RS" dirty="0" smtClean="0"/>
+              <a:t>монотона веза</a:t>
+            </a:r>
+            <a:endParaRPr dirty="0"/>
           </a:p>
           <a:p>
             <a:pPr>
@@ -4915,8 +5009,50 @@
               </a:defRPr>
             </a:pPr>
             <a:r>
-              <a:t>Lag analysis - provera vremenskog kašnjenja (-7 do +7 dana)</a:t>
-            </a:r>
+              <a:rPr dirty="0"/>
+              <a:t>Lag analysis </a:t>
+            </a:r>
+            <a:r>
+              <a:rPr lang="en-US" dirty="0" smtClean="0"/>
+              <a:t>–</a:t>
+            </a:r>
+            <a:r>
+              <a:rPr dirty="0" smtClean="0"/>
+              <a:t> </a:t>
+            </a:r>
+            <a:r>
+              <a:rPr lang="sr-Cyrl-RS" dirty="0" smtClean="0"/>
+              <a:t>провера временског кашњења </a:t>
+            </a:r>
+            <a:r>
+              <a:rPr dirty="0" smtClean="0"/>
+              <a:t>(-</a:t>
+            </a:r>
+            <a:r>
+              <a:rPr dirty="0"/>
+              <a:t>7 </a:t>
+            </a:r>
+            <a:r>
+              <a:rPr lang="sr-Cyrl-RS" dirty="0" smtClean="0"/>
+              <a:t>до</a:t>
+            </a:r>
+            <a:r>
+              <a:rPr dirty="0" smtClean="0"/>
+              <a:t> </a:t>
+            </a:r>
+            <a:r>
+              <a:rPr dirty="0"/>
+              <a:t>+7 </a:t>
+            </a:r>
+            <a:r>
+              <a:rPr lang="sr-Cyrl-RS" dirty="0" smtClean="0"/>
+              <a:t>дана</a:t>
+            </a:r>
+            <a:r>
+              <a:rPr dirty="0" smtClean="0"/>
+              <a:t>)</a:t>
+            </a:r>
+            <a:endParaRPr dirty="0"/>
           </a:p>
           <a:p>
             <a:pPr>
@@ -4930,8 +5066,14 @@
               </a:defRPr>
             </a:pPr>
             <a:r>
-              <a:t>P-value &lt; 0.05 za statističku značajnost</a:t>
-            </a:r>
+              <a:rPr dirty="0"/>
+              <a:t>P-value &lt; 0.05 </a:t>
+            </a:r>
+            <a:r>
+              <a:rPr lang="sr-Cyrl-RS" dirty="0" smtClean="0"/>
+              <a:t>за статистичку значајност</a:t>
+            </a:r>
+            <a:endParaRPr dirty="0"/>
           </a:p>
         </p:txBody>
       </p:sp>
@@ -5020,7 +5162,7 @@
         <p:spPr>
           <a:xfrm>
             <a:off x="457200" y="457200"/>
-            <a:ext cx="8229600" cy="914400"/>
+            <a:ext cx="6918497" cy="646331"/>
           </a:xfrm>
           <a:prstGeom prst="rect">
             <a:avLst/>
@@ -5041,8 +5183,10 @@
               </a:defRPr>
             </a:pPr>
             <a:r>
-              <a:t>Korelaciona Analiza - Rezultati</a:t>
-            </a:r>
+              <a:rPr lang="sr-Cyrl-RS" dirty="0" smtClean="0"/>
+              <a:t>Корелациона анализа - резултати</a:t>
+            </a:r>
+            <a:endParaRPr dirty="0"/>
           </a:p>
         </p:txBody>
       </p:sp>
@@ -5101,7 +5245,7 @@
         <p:spPr>
           <a:xfrm>
             <a:off x="1188720" y="1920240"/>
-            <a:ext cx="6766560" cy="274320"/>
+            <a:ext cx="2737031" cy="338554"/>
           </a:xfrm>
           <a:prstGeom prst="rect">
             <a:avLst/>
@@ -5122,8 +5266,22 @@
               </a:defRPr>
             </a:pPr>
             <a:r>
-              <a:t>Sentiment vs Price (trenutno)</a:t>
-            </a:r>
+              <a:rPr dirty="0"/>
+              <a:t>Sentiment vs Price </a:t>
+            </a:r>
+            <a:r>
+              <a:rPr dirty="0" smtClean="0"/>
+              <a:t>(</a:t>
+            </a:r>
+            <a:r>
+              <a:rPr lang="sr-Cyrl-RS" dirty="0" smtClean="0"/>
+              <a:t>тренутно</a:t>
+            </a:r>
+            <a:r>
+              <a:rPr dirty="0" smtClean="0"/>
+              <a:t>)</a:t>
+            </a:r>
+            <a:endParaRPr dirty="0"/>
           </a:p>
         </p:txBody>
       </p:sp>
@@ -5157,6 +5315,7 @@
               </a:defRPr>
             </a:pPr>
             <a:r>
+              <a:rPr dirty="0"/>
               <a:t>Pearson: r = 0.094, p = 0.337</a:t>
             </a:r>
           </a:p>
@@ -5171,7 +5330,7 @@
         <p:spPr>
           <a:xfrm>
             <a:off x="1188720" y="2423160"/>
-            <a:ext cx="6766560" cy="228600"/>
+            <a:ext cx="2239203" cy="292388"/>
           </a:xfrm>
           <a:prstGeom prst="rect">
             <a:avLst/>
@@ -5192,8 +5351,14 @@
               </a:defRPr>
             </a:pPr>
             <a:r>
-              <a:t>❌ Nije statistički značajno</a:t>
-            </a:r>
+              <a:rPr dirty="0"/>
+              <a:t>❌ </a:t>
+            </a:r>
+            <a:r>
+              <a:rPr lang="sr-Cyrl-RS" dirty="0" smtClean="0"/>
+              <a:t>Није статистички значајно</a:t>
+            </a:r>
+            <a:endParaRPr dirty="0"/>
           </a:p>
         </p:txBody>
       </p:sp>
@@ -5252,7 +5417,7 @@
         <p:spPr>
           <a:xfrm>
             <a:off x="1188720" y="3108960"/>
-            <a:ext cx="6766560" cy="274320"/>
+            <a:ext cx="1972335" cy="338554"/>
           </a:xfrm>
           <a:prstGeom prst="rect">
             <a:avLst/>
@@ -5273,8 +5438,18 @@
               </a:defRPr>
             </a:pPr>
             <a:r>
-              <a:t>Lag Analysis (6 dana)</a:t>
-            </a:r>
+              <a:rPr dirty="0"/>
+              <a:t>Lag Analysis (6 </a:t>
+            </a:r>
+            <a:r>
+              <a:rPr lang="sr-Cyrl-RS" dirty="0" smtClean="0"/>
+              <a:t>дана</a:t>
+            </a:r>
+            <a:r>
+              <a:rPr dirty="0" smtClean="0"/>
+              <a:t>)</a:t>
+            </a:r>
+            <a:endParaRPr dirty="0"/>
           </a:p>
         </p:txBody>
       </p:sp>
@@ -5322,7 +5497,7 @@
         <p:spPr>
           <a:xfrm>
             <a:off x="1188720" y="3611879"/>
-            <a:ext cx="6766560" cy="228600"/>
+            <a:ext cx="1993879" cy="292388"/>
           </a:xfrm>
           <a:prstGeom prst="rect">
             <a:avLst/>
@@ -5343,8 +5518,14 @@
               </a:defRPr>
             </a:pPr>
             <a:r>
-              <a:t>✅ Statistički značajno!</a:t>
-            </a:r>
+              <a:rPr dirty="0"/>
+              <a:t>✅ </a:t>
+            </a:r>
+            <a:r>
+              <a:rPr lang="sr-Cyrl-RS" dirty="0" smtClean="0"/>
+              <a:t>Статистички значајно!</a:t>
+            </a:r>
+            <a:endParaRPr dirty="0"/>
           </a:p>
         </p:txBody>
       </p:sp>
@@ -5403,7 +5584,7 @@
         <p:spPr>
           <a:xfrm>
             <a:off x="1188720" y="4297679"/>
-            <a:ext cx="6766560" cy="274320"/>
+            <a:ext cx="1607941" cy="338554"/>
           </a:xfrm>
           <a:prstGeom prst="rect">
             <a:avLst/>
@@ -5424,8 +5605,10 @@
               </a:defRPr>
             </a:pPr>
             <a:r>
-              <a:t>Interpretacija</a:t>
-            </a:r>
+              <a:rPr lang="sr-Cyrl-RS" dirty="0" smtClean="0"/>
+              <a:t>Интерпретација</a:t>
+            </a:r>
+            <a:endParaRPr dirty="0"/>
           </a:p>
         </p:txBody>
       </p:sp>
@@ -5438,7 +5621,7 @@
         <p:spPr>
           <a:xfrm>
             <a:off x="1188720" y="4572000"/>
-            <a:ext cx="6766560" cy="228600"/>
+            <a:ext cx="1830950" cy="307777"/>
           </a:xfrm>
           <a:prstGeom prst="rect">
             <a:avLst/>
@@ -5459,8 +5642,10 @@
               </a:defRPr>
             </a:pPr>
             <a:r>
-              <a:t>Cena vodi sentiment</a:t>
-            </a:r>
+              <a:rPr lang="sr-Cyrl-RS" dirty="0" smtClean="0"/>
+              <a:t>Цена води сентимент</a:t>
+            </a:r>
+            <a:endParaRPr dirty="0"/>
           </a:p>
         </p:txBody>
       </p:sp>
@@ -5473,7 +5658,7 @@
         <p:spPr>
           <a:xfrm>
             <a:off x="1188720" y="4800600"/>
-            <a:ext cx="6766560" cy="228600"/>
+            <a:ext cx="2079480" cy="292388"/>
           </a:xfrm>
           <a:prstGeom prst="rect">
             <a:avLst/>
@@ -5494,8 +5679,10 @@
               </a:defRPr>
             </a:pPr>
             <a:r>
-              <a:t>Sentiment reaguje na cenu</a:t>
-            </a:r>
+              <a:rPr lang="sr-Cyrl-RS" dirty="0" smtClean="0"/>
+              <a:t>Сентимент реагује на цену</a:t>
+            </a:r>
+            <a:endParaRPr dirty="0"/>
           </a:p>
         </p:txBody>
       </p:sp>
@@ -5555,7 +5742,7 @@
         <p:spPr>
           <a:xfrm>
             <a:off x="1188720" y="5486400"/>
-            <a:ext cx="6766560" cy="731520"/>
+            <a:ext cx="6766560" cy="784830"/>
           </a:xfrm>
           <a:prstGeom prst="rect">
             <a:avLst/>
@@ -5580,157 +5767,34 @@
               <a:t>💡 </a:t>
             </a:r>
             <a:r>
-              <a:rPr dirty="0" err="1"/>
-              <a:t>Ključni</a:t>
-            </a:r>
-            <a:r>
-              <a:rPr dirty="0"/>
+              <a:rPr lang="ru-RU" dirty="0"/>
+              <a:t>Кључни налаз: </a:t>
+            </a:r>
+            <a:r>
+              <a:rPr lang="en-US" dirty="0" smtClean="0"/>
+              <a:t>Twitter</a:t>
+            </a:r>
+            <a:r>
+              <a:rPr lang="ru-RU" dirty="0" smtClean="0"/>
               <a:t> </a:t>
             </a:r>
             <a:r>
-              <a:rPr dirty="0" err="1"/>
-              <a:t>nalaz</a:t>
-            </a:r>
-            <a:r>
-              <a:rPr dirty="0"/>
-              <a:t>: Twitter sentiment NE </a:t>
-            </a:r>
-            <a:r>
-              <a:rPr dirty="0" err="1"/>
-              <a:t>predviđa</a:t>
-            </a:r>
-            <a:r>
-              <a:rPr dirty="0"/>
-              <a:t> Bitcoin </a:t>
-            </a:r>
-            <a:r>
-              <a:rPr dirty="0" err="1"/>
-              <a:t>cenu</a:t>
-            </a:r>
-            <a:r>
-              <a:rPr dirty="0"/>
-              <a:t>, </a:t>
-            </a:r>
-            <a:r>
-              <a:rPr dirty="0" err="1"/>
-              <a:t>već</a:t>
-            </a:r>
-            <a:r>
-              <a:rPr dirty="0"/>
+              <a:rPr lang="ru-RU" dirty="0"/>
+              <a:t>сентимент НЕ предвиђа </a:t>
+            </a:r>
+            <a:r>
+              <a:rPr lang="en-US" dirty="0" smtClean="0"/>
+              <a:t>Bitcoin</a:t>
+            </a:r>
+            <a:r>
+              <a:rPr lang="ru-RU" dirty="0" smtClean="0"/>
               <a:t> </a:t>
             </a:r>
             <a:r>
-              <a:rPr dirty="0" err="1"/>
-              <a:t>reaguje</a:t>
-            </a:r>
-            <a:r>
-              <a:rPr dirty="0"/>
-              <a:t> </a:t>
-            </a:r>
-            <a:r>
-              <a:rPr dirty="0" err="1"/>
-              <a:t>na</a:t>
-            </a:r>
-            <a:r>
-              <a:rPr dirty="0"/>
-              <a:t> </a:t>
-            </a:r>
-            <a:r>
-              <a:rPr dirty="0" err="1"/>
-              <a:t>nju</a:t>
-            </a:r>
-            <a:r>
-              <a:rPr dirty="0"/>
-              <a:t> </a:t>
-            </a:r>
-            <a:r>
-              <a:rPr dirty="0" err="1"/>
-              <a:t>sa</a:t>
-            </a:r>
-            <a:r>
-              <a:rPr dirty="0"/>
-              <a:t> </a:t>
-            </a:r>
-            <a:r>
-              <a:rPr dirty="0" err="1"/>
-              <a:t>kašnjenjem</a:t>
-            </a:r>
-            <a:r>
-              <a:rPr dirty="0"/>
-              <a:t> od ~6 dana. </a:t>
-            </a:r>
-            <a:r>
-              <a:rPr dirty="0" err="1"/>
-              <a:t>Korisnici</a:t>
-            </a:r>
-            <a:r>
-              <a:rPr dirty="0"/>
-              <a:t> </a:t>
-            </a:r>
-            <a:r>
-              <a:rPr dirty="0" err="1"/>
-              <a:t>komentarišu</a:t>
-            </a:r>
-            <a:r>
-              <a:rPr dirty="0"/>
-              <a:t> </a:t>
-            </a:r>
-            <a:r>
-              <a:rPr dirty="0" err="1"/>
-              <a:t>postojeće</a:t>
-            </a:r>
-            <a:r>
-              <a:rPr dirty="0"/>
-              <a:t> </a:t>
-            </a:r>
-            <a:r>
-              <a:rPr dirty="0" err="1"/>
-              <a:t>kretanje</a:t>
-            </a:r>
-            <a:r>
-              <a:rPr dirty="0"/>
-              <a:t> </a:t>
-            </a:r>
-            <a:r>
-              <a:rPr dirty="0" err="1"/>
-              <a:t>cene</a:t>
-            </a:r>
-            <a:r>
-              <a:rPr dirty="0"/>
-              <a:t> </a:t>
-            </a:r>
-            <a:r>
-              <a:rPr dirty="0" err="1"/>
-              <a:t>umesto</a:t>
-            </a:r>
-            <a:r>
-              <a:rPr dirty="0"/>
-              <a:t> da </a:t>
-            </a:r>
-            <a:r>
-              <a:rPr dirty="0" err="1"/>
-              <a:t>anticipiraju</a:t>
-            </a:r>
-            <a:r>
-              <a:rPr dirty="0"/>
-              <a:t> </a:t>
-            </a:r>
-            <a:r>
-              <a:rPr dirty="0" err="1"/>
-              <a:t>buduće</a:t>
-            </a:r>
-            <a:r>
-              <a:rPr dirty="0"/>
-              <a:t> </a:t>
-            </a:r>
-            <a:r>
-              <a:rPr dirty="0" err="1"/>
-              <a:t>promene</a:t>
-            </a:r>
-            <a:r>
-              <a:rPr dirty="0"/>
-              <a:t>.</a:t>
-            </a:r>
+              <a:rPr lang="ru-RU" dirty="0"/>
+              <a:t>цену, већ реагује на њу са кашњењем од ~6 дана. Корисници коментаришу постојеће кретање цене уместо да антиципирају будуће промене.</a:t>
+            </a:r>
+            <a:endParaRPr dirty="0"/>
           </a:p>
         </p:txBody>
       </p:sp>
@@ -5819,7 +5883,7 @@
         <p:spPr>
           <a:xfrm>
             <a:off x="457200" y="457200"/>
-            <a:ext cx="8229600" cy="914400"/>
+            <a:ext cx="4576509" cy="646331"/>
           </a:xfrm>
           <a:prstGeom prst="rect">
             <a:avLst/>
@@ -5840,8 +5904,10 @@
               </a:defRPr>
             </a:pPr>
             <a:r>
-              <a:t>Evaluacija i Metrike</a:t>
-            </a:r>
+              <a:rPr lang="sr-Cyrl-RS" dirty="0" smtClean="0"/>
+              <a:t>Евалуација и метрике</a:t>
+            </a:r>
+            <a:endParaRPr dirty="0"/>
           </a:p>
         </p:txBody>
       </p:sp>
@@ -5854,7 +5920,7 @@
         <p:spPr>
           <a:xfrm>
             <a:off x="731520" y="1645920"/>
-            <a:ext cx="7772400" cy="4572000"/>
+            <a:ext cx="7772400" cy="4647426"/>
           </a:xfrm>
           <a:prstGeom prst="rect">
             <a:avLst/>
@@ -5878,6 +5944,7 @@
               </a:defRPr>
             </a:pPr>
             <a:r>
+              <a:rPr dirty="0"/>
               <a:t>Classification Metrics</a:t>
             </a:r>
           </a:p>
@@ -5893,8 +5960,14 @@
               </a:defRPr>
             </a:pPr>
             <a:r>
-              <a:t>Accuracy: Ukupna tačnost klasifikacije</a:t>
-            </a:r>
+              <a:rPr dirty="0"/>
+              <a:t>Accuracy: </a:t>
+            </a:r>
+            <a:r>
+              <a:rPr lang="sr-Cyrl-RS" dirty="0" smtClean="0"/>
+              <a:t>Укупна тачност класификације</a:t>
+            </a:r>
+            <a:endParaRPr dirty="0"/>
           </a:p>
           <a:p>
             <a:pPr>
@@ -5908,8 +5981,14 @@
               </a:defRPr>
             </a:pPr>
             <a:r>
-              <a:t>Precision: Tačnost pozitivnih predikcija</a:t>
-            </a:r>
+              <a:rPr dirty="0"/>
+              <a:t>Precision: </a:t>
+            </a:r>
+            <a:r>
+              <a:rPr lang="sr-Cyrl-RS" dirty="0" smtClean="0"/>
+              <a:t>Тачност позитивних предикција</a:t>
+            </a:r>
+            <a:endParaRPr dirty="0"/>
           </a:p>
           <a:p>
             <a:pPr>
@@ -5923,7 +6002,16 @@
               </a:defRPr>
             </a:pPr>
             <a:r>
-              <a:t>Recall: Pokrivenost stvarnih pozitivnih slučajeva</a:t>
+              <a:rPr dirty="0"/>
+              <a:t>Recall: </a:t>
+            </a:r>
+            <a:r>
+              <a:rPr lang="sr-Cyrl-RS" dirty="0"/>
+              <a:t>Покривеност стварних позитивних </a:t>
+            </a:r>
+            <a:r>
+              <a:rPr lang="sr-Cyrl-RS" dirty="0" smtClean="0"/>
+              <a:t>случајева</a:t>
             </a:r>
           </a:p>
           <a:p>
@@ -5938,7 +6026,24 @@
               </a:defRPr>
             </a:pPr>
             <a:r>
-              <a:t>F1-Score: Harmonijska sredina precision i recall</a:t>
+              <a:rPr dirty="0" smtClean="0"/>
+              <a:t>F1-Score: </a:t>
+            </a:r>
+            <a:r>
+              <a:rPr lang="sr-Cyrl-RS" dirty="0" smtClean="0"/>
+              <a:t>Хармонијска средина </a:t>
+            </a:r>
+            <a:r>
+              <a:rPr dirty="0" smtClean="0"/>
+              <a:t>precision </a:t>
+            </a:r>
+            <a:r>
+              <a:rPr lang="sr-Cyrl-RS" dirty="0" err="1"/>
+              <a:t>и</a:t>
+            </a:r>
+            <a:r>
+              <a:rPr dirty="0" smtClean="0"/>
+              <a:t> recall</a:t>
             </a:r>
           </a:p>
           <a:p>
@@ -5953,8 +6058,10 @@
               </a:defRPr>
             </a:pPr>
             <a:r>
+              <a:rPr dirty="0" smtClean="0"/>
               <a:t>Cross-Validation</a:t>
             </a:r>
+            <a:endParaRPr dirty="0"/>
           </a:p>
           <a:p>
             <a:pPr>
@@ -5968,6 +6075,7 @@
               </a:defRPr>
             </a:pPr>
             <a:r>
+              <a:rPr dirty="0"/>
               <a:t>5-Fold stratified cross-validation</a:t>
             </a:r>
           </a:p>
@@ -5983,7 +6091,8 @@
               </a:defRPr>
             </a:pPr>
             <a:r>
-              <a:t>Omogućava robusnu procenu generalizacije modela</a:t>
+              <a:rPr lang="ru-RU" dirty="0"/>
+              <a:t>Омогућава робусну процену генерализације модела</a:t>
             </a:r>
           </a:p>
           <a:p>
@@ -5998,7 +6107,8 @@
               </a:defRPr>
             </a:pPr>
             <a:r>
-              <a:t>Smanjuje uticaj slučajne podele podataka</a:t>
+              <a:rPr lang="ru-RU" dirty="0"/>
+              <a:t>Смањује утицај случајне поделе података</a:t>
             </a:r>
           </a:p>
           <a:p>
@@ -6013,7 +6123,12 @@
               </a:defRPr>
             </a:pPr>
             <a:r>
-              <a:t>Confusion Matrix</a:t>
+              <a:rPr dirty="0" smtClean="0"/>
+              <a:t>Confusion </a:t>
+            </a:r>
+            <a:r>
+              <a:rPr dirty="0"/>
+              <a:t>Matrix</a:t>
             </a:r>
           </a:p>
           <a:p>
@@ -6028,7 +6143,8 @@
               </a:defRPr>
             </a:pPr>
             <a:r>
-              <a:t>Detaljni uvid u greške klasifikacije</a:t>
+              <a:rPr lang="ru-RU" dirty="0"/>
+              <a:t>Детаљни увид у грешке класификације</a:t>
             </a:r>
           </a:p>
           <a:p>
@@ -6043,7 +6159,8 @@
               </a:defRPr>
             </a:pPr>
             <a:r>
-              <a:t>Identifikacija problematičnih klasa</a:t>
+              <a:rPr lang="sr-Cyrl-RS" dirty="0"/>
+              <a:t>Идентификација проблематичних класа</a:t>
             </a:r>
           </a:p>
           <a:p>
@@ -6058,7 +6175,16 @@
               </a:defRPr>
             </a:pPr>
             <a:r>
-              <a:t>BERT: najbolje razlikovanje između klasa</a:t>
+              <a:rPr dirty="0" smtClean="0"/>
+              <a:t>BERT</a:t>
+            </a:r>
+            <a:r>
+              <a:rPr dirty="0"/>
+              <a:t>: </a:t>
+            </a:r>
+            <a:r>
+              <a:rPr lang="sr-Cyrl-RS" dirty="0"/>
+              <a:t>најбоље разликовање између класа</a:t>
             </a:r>
           </a:p>
         </p:txBody>
@@ -6148,7 +6274,7 @@
         <p:spPr>
           <a:xfrm>
             <a:off x="457200" y="457200"/>
-            <a:ext cx="8229600" cy="914400"/>
+            <a:ext cx="5875968" cy="646331"/>
           </a:xfrm>
           <a:prstGeom prst="rect">
             <a:avLst/>
@@ -6169,8 +6295,10 @@
               </a:defRPr>
             </a:pPr>
             <a:r>
-              <a:t>Tehnički Izazovi i Rešenja</a:t>
-            </a:r>
+              <a:rPr lang="sr-Cyrl-RS" dirty="0" smtClean="0"/>
+              <a:t>Технички изазови и решења</a:t>
+            </a:r>
+            <a:endParaRPr dirty="0"/>
           </a:p>
         </p:txBody>
       </p:sp>
@@ -6183,7 +6311,7 @@
         <p:spPr>
           <a:xfrm>
             <a:off x="731520" y="1645920"/>
-            <a:ext cx="7772400" cy="4572000"/>
+            <a:ext cx="7772400" cy="3534301"/>
           </a:xfrm>
           <a:prstGeom prst="rect">
             <a:avLst/>
@@ -6207,8 +6335,10 @@
               </a:defRPr>
             </a:pPr>
             <a:r>
-              <a:t>Izazovi</a:t>
-            </a:r>
+              <a:rPr lang="sr-Cyrl-RS" dirty="0" smtClean="0"/>
+              <a:t>Изазови</a:t>
+            </a:r>
+            <a:endParaRPr dirty="0"/>
           </a:p>
           <a:p>
             <a:pPr>
@@ -6222,7 +6352,28 @@
               </a:defRPr>
             </a:pPr>
             <a:r>
-              <a:t>Nebalansiran dataset → Data augmentation i weighted loss</a:t>
+              <a:rPr lang="sr-Cyrl-RS" dirty="0" smtClean="0"/>
+              <a:t>Небалансиран</a:t>
+            </a:r>
+            <a:r>
+              <a:rPr dirty="0" smtClean="0"/>
+              <a:t> </a:t>
+            </a:r>
+            <a:r>
+              <a:rPr dirty="0"/>
+              <a:t>dataset → Data augmentation </a:t>
+            </a:r>
+            <a:r>
+              <a:rPr lang="sr-Cyrl-RS" dirty="0" err="1" smtClean="0"/>
+              <a:t>и</a:t>
+            </a:r>
+            <a:r>
+              <a:rPr dirty="0" smtClean="0"/>
+              <a:t> </a:t>
+            </a:r>
+            <a:r>
+              <a:rPr dirty="0"/>
+              <a:t>weighted loss</a:t>
             </a:r>
           </a:p>
           <a:p>
@@ -6237,7 +6388,24 @@
               </a:defRPr>
             </a:pPr>
             <a:r>
-              <a:t>Sleng i nestandardan jezik → Ekstenzivni preprocessing</a:t>
+              <a:rPr lang="sr-Cyrl-RS" dirty="0" smtClean="0"/>
+              <a:t>Сленг и нестандардан језик </a:t>
+            </a:r>
+            <a:r>
+              <a:rPr dirty="0" smtClean="0"/>
+              <a:t>→ </a:t>
+            </a:r>
+            <a:r>
+              <a:rPr lang="sr-Cyrl-RS" dirty="0" smtClean="0"/>
+              <a:t>Екстензивни</a:t>
+            </a:r>
+            <a:r>
+              <a:rPr dirty="0" smtClean="0"/>
+              <a:t> </a:t>
+            </a:r>
+            <a:r>
+              <a:rPr dirty="0"/>
+              <a:t>preprocessing</a:t>
             </a:r>
           </a:p>
           <a:p>
@@ -6252,7 +6420,20 @@
               </a:defRPr>
             </a:pPr>
             <a:r>
-              <a:t>BERT GPU memory → Batch size optimizacija (16)</a:t>
+              <a:rPr dirty="0"/>
+              <a:t>BERT GPU memory → Batch size </a:t>
+            </a:r>
+            <a:r>
+              <a:rPr lang="sr-Cyrl-RS" dirty="0" smtClean="0"/>
+              <a:t>оптимизација</a:t>
+            </a:r>
+            <a:r>
+              <a:rPr dirty="0" smtClean="0"/>
+              <a:t> </a:t>
+            </a:r>
+            <a:r>
+              <a:rPr dirty="0"/>
+              <a:t>(16)</a:t>
             </a:r>
           </a:p>
           <a:p>
@@ -6267,7 +6448,20 @@
               </a:defRPr>
             </a:pPr>
             <a:r>
-              <a:t>Overfitting → Dropout (0.3) i early stopping</a:t>
+              <a:rPr dirty="0"/>
+              <a:t>Overfitting → Dropout (0.3) </a:t>
+            </a:r>
+            <a:r>
+              <a:rPr lang="sr-Cyrl-RS" dirty="0" err="1" smtClean="0"/>
+              <a:t>и</a:t>
+            </a:r>
+            <a:r>
+              <a:rPr dirty="0" smtClean="0"/>
+              <a:t> </a:t>
+            </a:r>
+            <a:r>
+              <a:rPr dirty="0"/>
+              <a:t>early stopping</a:t>
             </a:r>
           </a:p>
           <a:p>
@@ -6282,8 +6476,10 @@
               </a:defRPr>
             </a:pPr>
             <a:r>
-              <a:t>Optimizacije</a:t>
-            </a:r>
+              <a:rPr lang="sr-Cyrl-RS" dirty="0" smtClean="0"/>
+              <a:t>Оптимизације</a:t>
+            </a:r>
+            <a:endParaRPr dirty="0"/>
           </a:p>
           <a:p>
             <a:pPr>
@@ -6297,8 +6493,26 @@
               </a:defRPr>
             </a:pPr>
             <a:r>
-              <a:t>GPU acceleration (RTX 4060) → 10x brže BERT treniranje</a:t>
-            </a:r>
+              <a:rPr dirty="0"/>
+              <a:t>GPU acceleration (RTX 4060) → 10x </a:t>
+            </a:r>
+            <a:r>
+              <a:rPr lang="sr-Cyrl-RS" dirty="0" smtClean="0"/>
+              <a:t>брже</a:t>
+            </a:r>
+            <a:r>
+              <a:rPr dirty="0" smtClean="0"/>
+              <a:t> </a:t>
+            </a:r>
+            <a:r>
+              <a:rPr dirty="0"/>
+              <a:t>BERT </a:t>
+            </a:r>
+            <a:r>
+              <a:rPr lang="sr-Cyrl-RS" dirty="0" smtClean="0"/>
+              <a:t>тренирање</a:t>
+            </a:r>
+            <a:endParaRPr dirty="0"/>
           </a:p>
           <a:p>
             <a:pPr>
@@ -6312,7 +6526,32 @@
               </a:defRPr>
             </a:pPr>
             <a:r>
-              <a:t>Hyperparameter tuning → GridSearchCV za SVM</a:t>
+              <a:rPr dirty="0" err="1"/>
+              <a:t>Hyperparameter</a:t>
+            </a:r>
+            <a:r>
+              <a:rPr dirty="0"/>
+              <a:t> tuning → </a:t>
+            </a:r>
+            <a:r>
+              <a:rPr dirty="0" err="1"/>
+              <a:t>GridSearchCV</a:t>
+            </a:r>
+            <a:r>
+              <a:rPr dirty="0"/>
+              <a:t> </a:t>
+            </a:r>
+            <a:r>
+              <a:rPr lang="sr-Cyrl-RS" dirty="0" smtClean="0"/>
+              <a:t>за</a:t>
+            </a:r>
+            <a:r>
+              <a:rPr dirty="0" smtClean="0"/>
+              <a:t> </a:t>
+            </a:r>
+            <a:r>
+              <a:rPr dirty="0"/>
+              <a:t>SVM</a:t>
             </a:r>
           </a:p>
           <a:p>
@@ -6327,7 +6566,28 @@
               </a:defRPr>
             </a:pPr>
             <a:r>
-              <a:t>Learning rate scheduling → StepLR za BERT</a:t>
+              <a:rPr dirty="0"/>
+              <a:t>Learning rate scheduling → </a:t>
+            </a:r>
+            <a:r>
+              <a:rPr dirty="0" err="1"/>
+              <a:t>StepLR</a:t>
+            </a:r>
+            <a:r>
+              <a:rPr dirty="0"/>
+              <a:t> </a:t>
+            </a:r>
+            <a:r>
+              <a:rPr lang="sr-Cyrl-RS" dirty="0" smtClean="0"/>
+              <a:t>за</a:t>
+            </a:r>
+            <a:r>
+              <a:rPr dirty="0" smtClean="0"/>
+              <a:t> </a:t>
+            </a:r>
+            <a:r>
+              <a:rPr dirty="0"/>
+              <a:t>BERT</a:t>
             </a:r>
           </a:p>
           <a:p>
@@ -6342,8 +6602,22 @@
               </a:defRPr>
             </a:pPr>
             <a:r>
-              <a:t>Data caching → Ubrzanje preprocessing-a</a:t>
-            </a:r>
+              <a:rPr dirty="0"/>
+              <a:t>Data caching → </a:t>
+            </a:r>
+            <a:r>
+              <a:rPr lang="sr-Cyrl-RS" dirty="0" smtClean="0"/>
+              <a:t>Убрзање</a:t>
+            </a:r>
+            <a:r>
+              <a:rPr dirty="0" smtClean="0"/>
+              <a:t> preprocessing-</a:t>
+            </a:r>
+            <a:r>
+              <a:rPr lang="sr-Cyrl-RS" dirty="0" smtClean="0"/>
+              <a:t>а</a:t>
+            </a:r>
+            <a:endParaRPr dirty="0"/>
           </a:p>
         </p:txBody>
       </p:sp>
@@ -6432,7 +6706,7 @@
         <p:spPr>
           <a:xfrm>
             <a:off x="457200" y="457200"/>
-            <a:ext cx="8229600" cy="914400"/>
+            <a:ext cx="5577168" cy="646331"/>
           </a:xfrm>
           <a:prstGeom prst="rect">
             <a:avLst/>
@@ -6453,8 +6727,10 @@
               </a:defRPr>
             </a:pPr>
             <a:r>
-              <a:t>Zaključak i Budući Pravci</a:t>
-            </a:r>
+              <a:rPr lang="sr-Cyrl-RS" dirty="0" smtClean="0"/>
+              <a:t>Закључак и будући правци</a:t>
+            </a:r>
+            <a:endParaRPr dirty="0"/>
           </a:p>
         </p:txBody>
       </p:sp>
@@ -6513,7 +6789,7 @@
         <p:spPr>
           <a:xfrm>
             <a:off x="914400" y="1737360"/>
-            <a:ext cx="7315200" cy="365760"/>
+            <a:ext cx="2576346" cy="400110"/>
           </a:xfrm>
           <a:prstGeom prst="rect">
             <a:avLst/>
@@ -6534,8 +6810,10 @@
               </a:defRPr>
             </a:pPr>
             <a:r>
-              <a:t>Postignuti Rezultati</a:t>
-            </a:r>
+              <a:rPr lang="sr-Cyrl-RS" dirty="0" smtClean="0"/>
+              <a:t>Постигнути резултати</a:t>
+            </a:r>
+            <a:endParaRPr dirty="0"/>
           </a:p>
         </p:txBody>
       </p:sp>
@@ -6548,7 +6826,7 @@
         <p:spPr>
           <a:xfrm>
             <a:off x="1097280" y="2103120"/>
-            <a:ext cx="7315200" cy="1097280"/>
+            <a:ext cx="7315200" cy="1297791"/>
           </a:xfrm>
           <a:prstGeom prst="rect">
             <a:avLst/>
@@ -6576,28 +6854,28 @@
               <a:t>✅ </a:t>
             </a:r>
             <a:r>
-              <a:rPr dirty="0" err="1"/>
-              <a:t>Uspešno</a:t>
-            </a:r>
-            <a:r>
-              <a:rPr dirty="0"/>
+              <a:rPr lang="sr-Cyrl-RS" dirty="0" smtClean="0"/>
+              <a:t>Успешно имплементирана </a:t>
+            </a:r>
+            <a:r>
+              <a:rPr dirty="0" smtClean="0"/>
+              <a:t>3 </a:t>
+            </a:r>
+            <a:r>
+              <a:rPr dirty="0"/>
+              <a:t>ML </a:t>
+            </a:r>
+            <a:r>
+              <a:rPr lang="sr-Cyrl-RS" dirty="0" smtClean="0"/>
+              <a:t>модела</a:t>
+            </a:r>
+            <a:r>
+              <a:rPr dirty="0" smtClean="0"/>
               <a:t> </a:t>
             </a:r>
             <a:r>
-              <a:rPr dirty="0" err="1"/>
-              <a:t>implementirana</a:t>
-            </a:r>
-            <a:r>
-              <a:rPr dirty="0"/>
-              <a:t> 3 ML </a:t>
-            </a:r>
-            <a:r>
-              <a:rPr dirty="0" err="1"/>
-              <a:t>modela</a:t>
-            </a:r>
-            <a:r>
-              <a:rPr dirty="0"/>
-              <a:t> (Naive Bayes, SVM, BERT)</a:t>
+              <a:rPr dirty="0"/>
+              <a:t>(Naive Bayes, SVM, BERT)</a:t>
             </a:r>
           </a:p>
           <a:p>
@@ -6616,20 +6894,24 @@
               <a:t>✅ SVM </a:t>
             </a:r>
             <a:r>
-              <a:rPr dirty="0" err="1"/>
-              <a:t>postigao</a:t>
-            </a:r>
-            <a:r>
-              <a:rPr dirty="0"/>
+              <a:rPr lang="sr-Cyrl-RS" dirty="0" smtClean="0"/>
+              <a:t>постигао</a:t>
+            </a:r>
+            <a:r>
+              <a:rPr dirty="0" smtClean="0"/>
               <a:t> </a:t>
             </a:r>
             <a:r>
-              <a:rPr dirty="0" err="1"/>
-              <a:t>izvanrednih</a:t>
-            </a:r>
-            <a:r>
-              <a:rPr dirty="0"/>
-              <a:t> 95.24% accuracy</a:t>
+              <a:rPr lang="sr-Cyrl-RS" dirty="0" smtClean="0"/>
+              <a:t>изванредних</a:t>
+            </a:r>
+            <a:r>
+              <a:rPr dirty="0" smtClean="0"/>
+              <a:t> </a:t>
+            </a:r>
+            <a:r>
+              <a:rPr dirty="0"/>
+              <a:t>95.24% accuracy</a:t>
             </a:r>
           </a:p>
           <a:p>
@@ -6648,20 +6930,28 @@
               <a:t>✅ BERT </a:t>
             </a:r>
             <a:r>
-              <a:rPr dirty="0" err="1"/>
-              <a:t>demonstrirao</a:t>
-            </a:r>
-            <a:r>
-              <a:rPr dirty="0"/>
-              <a:t> state-of-the-art </a:t>
-            </a:r>
-            <a:r>
-              <a:rPr dirty="0" err="1"/>
-              <a:t>performanse</a:t>
-            </a:r>
-            <a:r>
-              <a:rPr dirty="0"/>
-              <a:t> (94.84%)</a:t>
+              <a:rPr lang="sr-Cyrl-RS" dirty="0" smtClean="0"/>
+              <a:t>демонстрирао</a:t>
+            </a:r>
+            <a:r>
+              <a:rPr dirty="0" smtClean="0"/>
+              <a:t> </a:t>
+            </a:r>
+            <a:r>
+              <a:rPr dirty="0"/>
+              <a:t>state-of-the-art </a:t>
+            </a:r>
+            <a:r>
+              <a:rPr lang="sr-Cyrl-RS" dirty="0" smtClean="0"/>
+              <a:t>перформансе</a:t>
+            </a:r>
+            <a:r>
+              <a:rPr dirty="0" smtClean="0"/>
+              <a:t> </a:t>
+            </a:r>
+            <a:r>
+              <a:rPr dirty="0"/>
+              <a:t>(94.84%)</a:t>
             </a:r>
           </a:p>
           <a:p>
@@ -6680,53 +6970,26 @@
               <a:t>✅ </a:t>
             </a:r>
             <a:r>
-              <a:rPr dirty="0" err="1"/>
-              <a:t>Korelaciona</a:t>
-            </a:r>
-            <a:r>
-              <a:rPr dirty="0"/>
-              <a:t> </a:t>
-            </a:r>
-            <a:r>
-              <a:rPr dirty="0" err="1"/>
-              <a:t>analiza</a:t>
-            </a:r>
-            <a:r>
-              <a:rPr dirty="0"/>
-              <a:t> </a:t>
-            </a:r>
-            <a:r>
-              <a:rPr dirty="0" err="1"/>
-              <a:t>otkrila</a:t>
-            </a:r>
-            <a:r>
-              <a:rPr dirty="0"/>
-              <a:t> </a:t>
-            </a:r>
-            <a:r>
-              <a:rPr dirty="0" err="1"/>
-              <a:t>statistički</a:t>
-            </a:r>
-            <a:r>
-              <a:rPr dirty="0"/>
-              <a:t> </a:t>
-            </a:r>
-            <a:r>
-              <a:rPr dirty="0" err="1"/>
-              <a:t>značajnu</a:t>
-            </a:r>
-            <a:r>
-              <a:rPr dirty="0"/>
-              <a:t> </a:t>
-            </a:r>
-            <a:r>
-              <a:rPr dirty="0" err="1"/>
-              <a:t>vezu</a:t>
-            </a:r>
-            <a:r>
-              <a:rPr dirty="0"/>
-              <a:t> (lag 6 dana)</a:t>
-            </a:r>
+              <a:rPr lang="ru-RU" dirty="0"/>
+              <a:t>Корелациона анализа открила статистички значајну везу </a:t>
+            </a:r>
+            <a:r>
+              <a:rPr dirty="0" smtClean="0"/>
+              <a:t>(</a:t>
+            </a:r>
+            <a:r>
+              <a:rPr dirty="0"/>
+              <a:t>lag 6 </a:t>
+            </a:r>
+            <a:r>
+              <a:rPr lang="sr-Cyrl-RS" dirty="0" smtClean="0"/>
+              <a:t>дана</a:t>
+            </a:r>
+            <a:r>
+              <a:rPr dirty="0" smtClean="0"/>
+              <a:t>)</a:t>
+            </a:r>
+            <a:endParaRPr dirty="0"/>
           </a:p>
           <a:p>
             <a:pPr>
@@ -6744,45 +7007,10 @@
               <a:t>✅ </a:t>
             </a:r>
             <a:r>
-              <a:rPr dirty="0" err="1"/>
-              <a:t>Pokazano</a:t>
-            </a:r>
-            <a:r>
-              <a:rPr dirty="0"/>
-              <a:t> da sentiment </a:t>
-            </a:r>
-            <a:r>
-              <a:rPr dirty="0" err="1"/>
-              <a:t>reaguje</a:t>
-            </a:r>
-            <a:r>
-              <a:rPr dirty="0"/>
-              <a:t> </a:t>
-            </a:r>
-            <a:r>
-              <a:rPr dirty="0" err="1"/>
-              <a:t>na</a:t>
-            </a:r>
-            <a:r>
-              <a:rPr dirty="0"/>
-              <a:t> </a:t>
-            </a:r>
-            <a:r>
-              <a:rPr dirty="0" err="1"/>
-              <a:t>cenu</a:t>
-            </a:r>
-            <a:r>
-              <a:rPr dirty="0"/>
-              <a:t>, ne </a:t>
-            </a:r>
-            <a:r>
-              <a:rPr dirty="0" err="1"/>
-              <a:t>predviđa</a:t>
-            </a:r>
-            <a:r>
-              <a:rPr dirty="0"/>
-              <a:t> je</a:t>
-            </a:r>
+              <a:rPr lang="ru-RU" dirty="0"/>
+              <a:t>Показано да сентимент реагује на цену, не предвиђа је</a:t>
+            </a:r>
+            <a:endParaRPr lang="ru-RU" dirty="0"/>
           </a:p>
         </p:txBody>
       </p:sp>
@@ -6839,7 +7067,7 @@
         <p:spPr>
           <a:xfrm>
             <a:off x="914400" y="3749039"/>
-            <a:ext cx="7315200" cy="365760"/>
+            <a:ext cx="2747740" cy="400110"/>
           </a:xfrm>
           <a:prstGeom prst="rect">
             <a:avLst/>
@@ -6860,8 +7088,10 @@
               </a:defRPr>
             </a:pPr>
             <a:r>
-              <a:t>Budući Pravci Razvoja</a:t>
-            </a:r>
+              <a:rPr lang="sr-Cyrl-RS" dirty="0" smtClean="0"/>
+              <a:t>Будући правци развоја</a:t>
+            </a:r>
+            <a:endParaRPr dirty="0"/>
           </a:p>
         </p:txBody>
       </p:sp>
@@ -6874,7 +7104,7 @@
         <p:spPr>
           <a:xfrm>
             <a:off x="1097280" y="4206240"/>
-            <a:ext cx="7315200" cy="1645920"/>
+            <a:ext cx="7315200" cy="1723549"/>
           </a:xfrm>
           <a:prstGeom prst="rect">
             <a:avLst/>
@@ -6898,6 +7128,7 @@
               </a:defRPr>
             </a:pPr>
             <a:r>
+              <a:rPr dirty="0"/>
               <a:t>🚀 Real-time sentiment tracking dashboard</a:t>
             </a:r>
           </a:p>
@@ -6913,8 +7144,34 @@
               </a:defRPr>
             </a:pPr>
             <a:r>
-              <a:t>🔍 Proširenje analize na više kriptovaluta (Ethereum, Solana, itd.)</a:t>
-            </a:r>
+              <a:rPr dirty="0"/>
+              <a:t>🔍 </a:t>
+            </a:r>
+            <a:r>
+              <a:rPr lang="ru-RU" dirty="0"/>
+              <a:t>Проширење анализе на више криптовалута </a:t>
+            </a:r>
+            <a:r>
+              <a:rPr dirty="0" smtClean="0"/>
+              <a:t>(</a:t>
+            </a:r>
+            <a:r>
+              <a:rPr dirty="0" err="1"/>
+              <a:t>Ethereum</a:t>
+            </a:r>
+            <a:r>
+              <a:rPr dirty="0"/>
+              <a:t>, Solana, </a:t>
+            </a:r>
+            <a:r>
+              <a:rPr lang="sr-Cyrl-RS" dirty="0" smtClean="0"/>
+              <a:t>итд</a:t>
+            </a:r>
+            <a:r>
+              <a:rPr dirty="0" smtClean="0"/>
+              <a:t>.)</a:t>
+            </a:r>
+            <a:endParaRPr dirty="0"/>
           </a:p>
           <a:p>
             <a:pPr>
@@ -6928,8 +7185,46 @@
               </a:defRPr>
             </a:pPr>
             <a:r>
-              <a:t>🎯 Multimodal analiza (tekst + slike sa Twitter-a)</a:t>
-            </a:r>
+              <a:rPr dirty="0"/>
+              <a:t>🎯 Multimodal </a:t>
+            </a:r>
+            <a:r>
+              <a:rPr lang="sr-Cyrl-RS" dirty="0" smtClean="0"/>
+              <a:t>анализа</a:t>
+            </a:r>
+            <a:r>
+              <a:rPr dirty="0" smtClean="0"/>
+              <a:t> (</a:t>
+            </a:r>
+            <a:r>
+              <a:rPr lang="sr-Cyrl-RS" dirty="0" smtClean="0"/>
+              <a:t>текст</a:t>
+            </a:r>
+            <a:r>
+              <a:rPr dirty="0" smtClean="0"/>
+              <a:t> </a:t>
+            </a:r>
+            <a:r>
+              <a:rPr dirty="0"/>
+              <a:t>+ </a:t>
+            </a:r>
+            <a:r>
+              <a:rPr lang="sr-Cyrl-RS" dirty="0" smtClean="0"/>
+              <a:t>слике са </a:t>
+            </a:r>
+            <a:r>
+              <a:rPr dirty="0" smtClean="0"/>
+              <a:t>Twitter-</a:t>
+            </a:r>
+            <a:r>
+              <a:rPr lang="sr-Cyrl-RS" dirty="0" smtClean="0"/>
+              <a:t>а</a:t>
+            </a:r>
+            <a:r>
+              <a:rPr dirty="0" smtClean="0"/>
+              <a:t>)</a:t>
+            </a:r>
+            <a:endParaRPr dirty="0"/>
           </a:p>
           <a:p>
             <a:pPr>
@@ -6943,8 +7238,50 @@
               </a:defRPr>
             </a:pPr>
             <a:r>
-              <a:t>⚡ Optimizacija BERT modela (DistilBERT, lightweight verzije)</a:t>
-            </a:r>
+              <a:rPr dirty="0"/>
+              <a:t>⚡ </a:t>
+            </a:r>
+            <a:r>
+              <a:rPr lang="sr-Cyrl-RS" dirty="0" smtClean="0"/>
+              <a:t>Оптимизација</a:t>
+            </a:r>
+            <a:r>
+              <a:rPr dirty="0" smtClean="0"/>
+              <a:t> </a:t>
+            </a:r>
+            <a:r>
+              <a:rPr dirty="0"/>
+              <a:t>BERT </a:t>
+            </a:r>
+            <a:r>
+              <a:rPr lang="sr-Cyrl-RS" dirty="0" smtClean="0"/>
+              <a:t>модела</a:t>
+            </a:r>
+            <a:r>
+              <a:rPr dirty="0" smtClean="0"/>
+              <a:t> </a:t>
+            </a:r>
+            <a:r>
+              <a:rPr dirty="0"/>
+              <a:t>(</a:t>
+            </a:r>
+            <a:r>
+              <a:rPr dirty="0" err="1"/>
+              <a:t>DistilBERT</a:t>
+            </a:r>
+            <a:r>
+              <a:rPr dirty="0"/>
+              <a:t>, lightweight </a:t>
+            </a:r>
+            <a:r>
+              <a:rPr lang="sr-Cyrl-RS" dirty="0" smtClean="0"/>
+              <a:t>верзије</a:t>
+            </a:r>
+            <a:r>
+              <a:rPr dirty="0" smtClean="0"/>
+              <a:t>)</a:t>
+            </a:r>
+            <a:endParaRPr dirty="0"/>
           </a:p>
           <a:p>
             <a:pPr>
@@ -6958,8 +7295,26 @@
               </a:defRPr>
             </a:pPr>
             <a:r>
-              <a:t>🌐 Deploy kao REST API za eksterni pristup</a:t>
-            </a:r>
+              <a:rPr dirty="0"/>
+              <a:t>🌐 Deploy </a:t>
+            </a:r>
+            <a:r>
+              <a:rPr lang="sr-Cyrl-RS" dirty="0" smtClean="0"/>
+              <a:t>као</a:t>
+            </a:r>
+            <a:r>
+              <a:rPr dirty="0" smtClean="0"/>
+              <a:t> </a:t>
+            </a:r>
+            <a:r>
+              <a:rPr dirty="0"/>
+              <a:t>REST API </a:t>
+            </a:r>
+            <a:r>
+              <a:rPr lang="sr-Cyrl-RS" dirty="0" smtClean="0"/>
+              <a:t>за екстерни приступ</a:t>
+            </a:r>
+            <a:endParaRPr dirty="0"/>
           </a:p>
           <a:p>
             <a:pPr>
@@ -6973,7 +7328,24 @@
               </a:defRPr>
             </a:pPr>
             <a:r>
-              <a:t>📊 Integracija sa trading platformama za automatske signale</a:t>
+              <a:rPr dirty="0"/>
+              <a:t>📊 </a:t>
+            </a:r>
+            <a:r>
+              <a:rPr lang="sr-Cyrl-RS" dirty="0" smtClean="0"/>
+              <a:t>Интеграција са </a:t>
+            </a:r>
+            <a:r>
+              <a:rPr dirty="0" smtClean="0"/>
+              <a:t>trading </a:t>
+            </a:r>
+            <a:r>
+              <a:rPr lang="sr-Cyrl-RS" dirty="0"/>
+              <a:t>платформама за аутоматске </a:t>
+            </a:r>
+            <a:r>
+              <a:rPr lang="sr-Cyrl-RS" dirty="0" smtClean="0"/>
+              <a:t>сигнале</a:t>
             </a:r>
           </a:p>
           <a:p>
@@ -6988,7 +7360,40 @@
               </a:defRPr>
             </a:pPr>
             <a:r>
-              <a:t>🔬 Eksperimenti sa novim transformer arhitekturama (GPT-4, LLaMA)</a:t>
+              <a:rPr dirty="0" smtClean="0"/>
+              <a:t>🔬 </a:t>
+            </a:r>
+            <a:r>
+              <a:rPr lang="ru-RU" dirty="0"/>
+              <a:t>Експерименти са новим </a:t>
+            </a:r>
+            <a:r>
+              <a:rPr lang="en-US" smtClean="0"/>
+              <a:t>transformer</a:t>
+            </a:r>
+            <a:r>
+              <a:rPr lang="ru-RU" smtClean="0"/>
+              <a:t> </a:t>
+            </a:r>
+            <a:r>
+              <a:rPr lang="ru-RU" dirty="0"/>
+              <a:t>архитектурама </a:t>
+            </a:r>
+            <a:r>
+              <a:rPr dirty="0" smtClean="0"/>
+              <a:t>(</a:t>
+            </a:r>
+            <a:r>
+              <a:rPr dirty="0"/>
+              <a:t>GPT-4, </a:t>
+            </a:r>
+            <a:r>
+              <a:rPr dirty="0" err="1"/>
+              <a:t>LLaMA</a:t>
+            </a:r>
+            <a:r>
+              <a:rPr dirty="0"/>
+              <a:t>)</a:t>
             </a:r>
           </a:p>
         </p:txBody>
@@ -7099,7 +7504,7 @@
               </a:defRPr>
             </a:pPr>
             <a:r>
-              <a:rPr dirty="0" err="1">
+              <a:rPr lang="sr-Cyrl-RS" dirty="0" smtClean="0">
                 <a:solidFill>
                   <a:schemeClr val="accent3">
                     <a:lumMod val="60000"/>
@@ -7107,62 +7512,7 @@
                   </a:schemeClr>
                 </a:solidFill>
               </a:rPr>
-              <a:t>Hvala</a:t>
-            </a:r>
-            <a:r>
-              <a:rPr dirty="0">
-                <a:solidFill>
-                  <a:schemeClr val="accent3">
-                    <a:lumMod val="60000"/>
-                    <a:lumOff val="40000"/>
-                  </a:schemeClr>
-                </a:solidFill>
-              </a:rPr>
-              <a:t> </a:t>
-            </a:r>
-            <a:r>
-              <a:rPr dirty="0" err="1">
-                <a:solidFill>
-                  <a:schemeClr val="accent3">
-                    <a:lumMod val="60000"/>
-                    <a:lumOff val="40000"/>
-                  </a:schemeClr>
-                </a:solidFill>
-              </a:rPr>
-              <a:t>na</a:t>
-            </a:r>
-            <a:r>
-              <a:rPr dirty="0">
-                <a:solidFill>
-                  <a:schemeClr val="accent3">
-                    <a:lumMod val="60000"/>
-                    <a:lumOff val="40000"/>
-                  </a:schemeClr>
-                </a:solidFill>
-              </a:rPr>
-              <a:t> </a:t>
-            </a:r>
-            <a:r>
-              <a:rPr dirty="0" err="1">
-                <a:solidFill>
-                  <a:schemeClr val="accent3">
-                    <a:lumMod val="60000"/>
-                    <a:lumOff val="40000"/>
-                  </a:schemeClr>
-                </a:solidFill>
-              </a:rPr>
-              <a:t>pažnji</a:t>
-            </a:r>
-            <a:r>
-              <a:rPr dirty="0" smtClean="0">
-                <a:solidFill>
-                  <a:schemeClr val="accent3">
-                    <a:lumMod val="60000"/>
-                    <a:lumOff val="40000"/>
-                  </a:schemeClr>
-                </a:solidFill>
-              </a:rPr>
-              <a:t>!</a:t>
+              <a:t>Хвала на пажњи!</a:t>
             </a:r>
             <a:endParaRPr dirty="0">
               <a:solidFill>
@@ -7183,8 +7533,8 @@
         </p:nvSpPr>
         <p:spPr>
           <a:xfrm>
-            <a:off x="2647243" y="5029200"/>
-            <a:ext cx="3849515" cy="707886"/>
+            <a:off x="2447158" y="5029200"/>
+            <a:ext cx="4249690" cy="707886"/>
           </a:xfrm>
           <a:prstGeom prst="rect">
             <a:avLst/>
@@ -7205,44 +7555,25 @@
               </a:defRPr>
             </a:pPr>
             <a:r>
+              <a:rPr lang="sr-Cyrl-RS" sz="2000" b="1" dirty="0" smtClean="0"/>
+              <a:t>Борис Летић</a:t>
+            </a:r>
+            <a:r>
+              <a:rPr sz="2000" b="1" dirty="0" smtClean="0"/>
+              <a:t> </a:t>
+            </a:r>
+            <a:r>
               <a:rPr sz="2000" b="1" dirty="0"/>
-              <a:t>Boris </a:t>
-            </a:r>
-            <a:r>
-              <a:rPr sz="2000" b="1" dirty="0" err="1"/>
-              <a:t>Letić</a:t>
-            </a:r>
-            <a:r>
-              <a:rPr sz="2000" b="1" dirty="0"/>
-              <a:t> | RA 207/2021</a:t>
+              <a:t>| RA 207/2021</a:t>
             </a:r>
             <a:br>
               <a:rPr sz="2000" b="1" dirty="0"/>
             </a:br>
             <a:r>
-              <a:rPr sz="2000" b="1" dirty="0" err="1"/>
-              <a:t>Fakultet</a:t>
-            </a:r>
-            <a:r>
-              <a:rPr sz="2000" b="1" dirty="0"/>
-              <a:t> </a:t>
-            </a:r>
-            <a:r>
-              <a:rPr sz="2000" b="1" dirty="0" err="1"/>
-              <a:t>tehničkih</a:t>
-            </a:r>
-            <a:r>
-              <a:rPr sz="2000" b="1" dirty="0"/>
-              <a:t> </a:t>
-            </a:r>
-            <a:r>
-              <a:rPr sz="2000" b="1" dirty="0" err="1"/>
-              <a:t>nauka</a:t>
-            </a:r>
-            <a:r>
-              <a:rPr sz="2000" b="1" dirty="0"/>
-              <a:t>, Novi Sad</a:t>
-            </a:r>
+              <a:rPr lang="sr-Cyrl-RS" sz="2000" b="1" dirty="0" smtClean="0"/>
+              <a:t>Факултет техничких наука, Нови Сад</a:t>
+            </a:r>
+            <a:endParaRPr sz="2000" b="1" dirty="0"/>
           </a:p>
         </p:txBody>
       </p:sp>
@@ -7269,7 +7600,7 @@
           <a:lstStyle/>
           <a:p>
             <a:r>
-              <a:rPr lang="en-US" sz="4000" b="1" dirty="0" err="1">
+              <a:rPr lang="sr-Cyrl-RS" sz="4000" b="1" dirty="0" smtClean="0">
                 <a:solidFill>
                   <a:schemeClr val="accent3">
                     <a:lumMod val="60000"/>
@@ -7277,18 +7608,7 @@
                   </a:schemeClr>
                 </a:solidFill>
               </a:rPr>
-              <a:t>Pitanja</a:t>
-            </a:r>
-            <a:r>
-              <a:rPr lang="en-US" sz="4000" b="1" dirty="0" smtClean="0">
-                <a:solidFill>
-                  <a:schemeClr val="accent3">
-                    <a:lumMod val="60000"/>
-                    <a:lumOff val="40000"/>
-                  </a:schemeClr>
-                </a:solidFill>
-              </a:rPr>
-              <a:t>?</a:t>
+              <a:t>Питања?</a:t>
             </a:r>
             <a:endParaRPr lang="en-US" sz="4000" b="1" dirty="0">
               <a:solidFill>
@@ -7390,7 +7710,7 @@
         <p:spPr>
           <a:xfrm>
             <a:off x="457200" y="457200"/>
-            <a:ext cx="8229600" cy="914400"/>
+            <a:ext cx="4802405" cy="646331"/>
           </a:xfrm>
           <a:prstGeom prst="rect">
             <a:avLst/>
@@ -7411,20 +7731,8 @@
               </a:defRPr>
             </a:pPr>
             <a:r>
-              <a:rPr dirty="0"/>
-              <a:t>Problem </a:t>
-            </a:r>
-            <a:r>
-              <a:rPr dirty="0" err="1"/>
-              <a:t>i</a:t>
-            </a:r>
-            <a:r>
-              <a:rPr dirty="0"/>
-              <a:t> </a:t>
-            </a:r>
-            <a:r>
-              <a:rPr dirty="0" err="1"/>
-              <a:t>Motivacija</a:t>
+              <a:rPr lang="sr-Cyrl-RS" dirty="0" smtClean="0"/>
+              <a:t>Проблем и мотивација</a:t>
             </a:r>
             <a:endParaRPr dirty="0"/>
           </a:p>
@@ -7439,7 +7747,7 @@
         <p:spPr>
           <a:xfrm>
             <a:off x="731520" y="1645920"/>
-            <a:ext cx="7772400" cy="4572000"/>
+            <a:ext cx="7772400" cy="2887970"/>
           </a:xfrm>
           <a:prstGeom prst="rect">
             <a:avLst/>
@@ -7463,40 +7771,8 @@
               </a:defRPr>
             </a:pPr>
             <a:r>
-              <a:rPr dirty="0" err="1"/>
-              <a:t>Tradicionalni</a:t>
-            </a:r>
-            <a:r>
-              <a:rPr dirty="0"/>
-              <a:t> </a:t>
-            </a:r>
-            <a:r>
-              <a:rPr dirty="0" err="1"/>
-              <a:t>pristup</a:t>
-            </a:r>
-            <a:r>
-              <a:rPr dirty="0"/>
-              <a:t> </a:t>
-            </a:r>
-            <a:r>
-              <a:rPr dirty="0" err="1"/>
-              <a:t>analizi</a:t>
-            </a:r>
-            <a:r>
-              <a:rPr dirty="0"/>
-              <a:t> </a:t>
-            </a:r>
-            <a:r>
-              <a:rPr dirty="0" err="1"/>
-              <a:t>javnog</a:t>
-            </a:r>
-            <a:r>
-              <a:rPr dirty="0"/>
-              <a:t> </a:t>
-            </a:r>
-            <a:r>
-              <a:rPr dirty="0" err="1"/>
-              <a:t>mišljenja</a:t>
+              <a:rPr lang="sr-Cyrl-RS" dirty="0" smtClean="0"/>
+              <a:t>Традиционални приступ анализи јавног мишљења</a:t>
             </a:r>
             <a:endParaRPr dirty="0"/>
           </a:p>
@@ -7512,56 +7788,20 @@
               </a:defRPr>
             </a:pPr>
             <a:r>
-              <a:rPr dirty="0" err="1"/>
-              <a:t>Ručna</a:t>
-            </a:r>
-            <a:r>
-              <a:rPr dirty="0"/>
+              <a:rPr lang="sr-Cyrl-RS" dirty="0" smtClean="0"/>
+              <a:t>Ручна анализа хиљада твитова </a:t>
+            </a:r>
+            <a:r>
+              <a:rPr lang="en-US" dirty="0" smtClean="0"/>
+              <a:t>–</a:t>
+            </a:r>
+            <a:r>
+              <a:rPr dirty="0" smtClean="0"/>
               <a:t> </a:t>
             </a:r>
             <a:r>
-              <a:rPr dirty="0" err="1"/>
-              <a:t>analiza</a:t>
-            </a:r>
-            <a:r>
-              <a:rPr dirty="0"/>
-              <a:t> </a:t>
-            </a:r>
-            <a:r>
-              <a:rPr dirty="0" err="1"/>
-              <a:t>hiljada</a:t>
-            </a:r>
-            <a:r>
-              <a:rPr dirty="0"/>
-              <a:t> </a:t>
-            </a:r>
-            <a:r>
-              <a:rPr dirty="0" err="1"/>
-              <a:t>tweetova</a:t>
-            </a:r>
-            <a:r>
-              <a:rPr dirty="0"/>
-              <a:t> - </a:t>
-            </a:r>
-            <a:r>
-              <a:rPr dirty="0" err="1"/>
-              <a:t>nemoguća</a:t>
-            </a:r>
-            <a:r>
-              <a:rPr dirty="0"/>
-              <a:t> u </a:t>
-            </a:r>
-            <a:r>
-              <a:rPr dirty="0" err="1"/>
-              <a:t>realnom</a:t>
-            </a:r>
-            <a:r>
-              <a:rPr dirty="0"/>
-              <a:t> </a:t>
-            </a:r>
-            <a:r>
-              <a:rPr dirty="0" err="1"/>
-              <a:t>vremenu</a:t>
+              <a:rPr lang="sr-Cyrl-RS" dirty="0" smtClean="0"/>
+              <a:t>немогућа у реалном времену</a:t>
             </a:r>
             <a:endParaRPr dirty="0"/>
           </a:p>
@@ -7577,24 +7817,8 @@
               </a:defRPr>
             </a:pPr>
             <a:r>
-              <a:rPr dirty="0" err="1"/>
-              <a:t>Subjektivnost</a:t>
-            </a:r>
-            <a:r>
-              <a:rPr dirty="0"/>
-              <a:t> </a:t>
-            </a:r>
-            <a:r>
-              <a:rPr dirty="0" err="1"/>
-              <a:t>ljudske</a:t>
-            </a:r>
-            <a:r>
-              <a:rPr dirty="0"/>
-              <a:t> </a:t>
-            </a:r>
-            <a:r>
-              <a:rPr dirty="0" err="1"/>
-              <a:t>interpretacije</a:t>
+              <a:rPr lang="sr-Cyrl-RS" dirty="0" smtClean="0"/>
+              <a:t>Субјективност људске интерпретације</a:t>
             </a:r>
             <a:endParaRPr dirty="0"/>
           </a:p>
@@ -7610,56 +7834,8 @@
               </a:defRPr>
             </a:pPr>
             <a:r>
-              <a:rPr dirty="0" err="1"/>
-              <a:t>Visoki</a:t>
-            </a:r>
-            <a:r>
-              <a:rPr dirty="0"/>
-              <a:t> </a:t>
-            </a:r>
-            <a:r>
-              <a:rPr dirty="0" err="1"/>
-              <a:t>troškovi</a:t>
-            </a:r>
-            <a:r>
-              <a:rPr dirty="0"/>
-              <a:t> </a:t>
-            </a:r>
-            <a:r>
-              <a:rPr dirty="0" err="1"/>
-              <a:t>i</a:t>
-            </a:r>
-            <a:r>
-              <a:rPr dirty="0"/>
-              <a:t> </a:t>
-            </a:r>
-            <a:r>
-              <a:rPr dirty="0" err="1"/>
-              <a:t>vreme</a:t>
-            </a:r>
-            <a:r>
-              <a:rPr dirty="0"/>
-              <a:t> </a:t>
-            </a:r>
-            <a:r>
-              <a:rPr dirty="0" err="1"/>
-              <a:t>potrebno</a:t>
-            </a:r>
-            <a:r>
-              <a:rPr dirty="0"/>
-              <a:t> </a:t>
-            </a:r>
-            <a:r>
-              <a:rPr dirty="0" err="1"/>
-              <a:t>za</a:t>
-            </a:r>
-            <a:r>
-              <a:rPr dirty="0"/>
-              <a:t> </a:t>
-            </a:r>
-            <a:r>
-              <a:rPr dirty="0" err="1"/>
-              <a:t>analizu</a:t>
+              <a:rPr lang="sr-Cyrl-RS" dirty="0" smtClean="0"/>
+              <a:t>Високи трошкови и време потребно за анализу</a:t>
             </a:r>
             <a:endParaRPr dirty="0"/>
           </a:p>
@@ -7675,16 +7851,8 @@
               </a:defRPr>
             </a:pPr>
             <a:r>
-              <a:rPr dirty="0" err="1"/>
-              <a:t>Nedostatak</a:t>
-            </a:r>
-            <a:r>
-              <a:rPr dirty="0"/>
-              <a:t> </a:t>
-            </a:r>
-            <a:r>
-              <a:rPr dirty="0" err="1"/>
-              <a:t>skalabilnosti</a:t>
+              <a:rPr lang="sr-Cyrl-RS" dirty="0" smtClean="0"/>
+              <a:t>Недостатак скалабилности</a:t>
             </a:r>
             <a:endParaRPr dirty="0"/>
           </a:p>
@@ -7700,8 +7868,8 @@
               </a:defRPr>
             </a:pPr>
             <a:r>
-              <a:rPr dirty="0" err="1"/>
-              <a:t>Posledice</a:t>
+              <a:rPr lang="sr-Cyrl-RS" dirty="0" smtClean="0"/>
+              <a:t>Последице</a:t>
             </a:r>
             <a:endParaRPr dirty="0"/>
           </a:p>
@@ -7717,69 +7885,14 @@
               </a:defRPr>
             </a:pPr>
             <a:r>
-              <a:rPr dirty="0" err="1"/>
-              <a:t>Investitori</a:t>
-            </a:r>
-            <a:r>
-              <a:rPr dirty="0"/>
-              <a:t> </a:t>
-            </a:r>
-            <a:r>
-              <a:rPr dirty="0" err="1"/>
-              <a:t>i</a:t>
-            </a:r>
-            <a:r>
-              <a:rPr dirty="0"/>
-              <a:t> </a:t>
-            </a:r>
-            <a:r>
-              <a:rPr dirty="0" err="1"/>
-              <a:t>analitičari</a:t>
-            </a:r>
-            <a:r>
-              <a:rPr dirty="0"/>
-              <a:t> ne </a:t>
-            </a:r>
-            <a:r>
-              <a:rPr dirty="0" err="1"/>
-              <a:t>mogu</a:t>
-            </a:r>
-            <a:r>
-              <a:rPr dirty="0"/>
-              <a:t> </a:t>
-            </a:r>
-            <a:r>
-              <a:rPr dirty="0" err="1"/>
-              <a:t>efikasno</a:t>
-            </a:r>
-            <a:r>
-              <a:rPr dirty="0"/>
-              <a:t> </a:t>
-            </a:r>
-            <a:r>
-              <a:rPr dirty="0" err="1"/>
-              <a:t>pratiti</a:t>
-            </a:r>
-            <a:r>
-              <a:rPr dirty="0"/>
-              <a:t> sentiment </a:t>
-            </a:r>
-            <a:r>
-              <a:rPr dirty="0" err="1"/>
-              <a:t>kripto</a:t>
-            </a:r>
-            <a:r>
-              <a:rPr dirty="0"/>
-              <a:t> </a:t>
-            </a:r>
-            <a:r>
-              <a:rPr dirty="0" err="1"/>
-              <a:t>zajednice</a:t>
-            </a:r>
-            <a:r>
-              <a:rPr dirty="0"/>
+              <a:rPr lang="sr-Cyrl-RS" dirty="0" smtClean="0"/>
+              <a:t>Инвеститори и аналитичари не могу ефикасно пратити сентимент крипто заједнице</a:t>
+            </a:r>
+            <a:r>
+              <a:rPr dirty="0" smtClean="0"/>
               <a:t>.</a:t>
             </a:r>
+            <a:endParaRPr dirty="0"/>
           </a:p>
           <a:p>
             <a:pPr>
@@ -7793,61 +7906,14 @@
               </a:defRPr>
             </a:pPr>
             <a:r>
-              <a:rPr dirty="0" err="1"/>
-              <a:t>Propuštene</a:t>
-            </a:r>
-            <a:r>
-              <a:rPr dirty="0"/>
-              <a:t> </a:t>
-            </a:r>
-            <a:r>
-              <a:rPr dirty="0" err="1"/>
-              <a:t>investicione</a:t>
-            </a:r>
-            <a:r>
-              <a:rPr dirty="0"/>
-              <a:t> </a:t>
-            </a:r>
-            <a:r>
-              <a:rPr dirty="0" err="1"/>
-              <a:t>prilike</a:t>
-            </a:r>
-            <a:r>
-              <a:rPr dirty="0"/>
-              <a:t> </a:t>
-            </a:r>
-            <a:r>
-              <a:rPr dirty="0" err="1"/>
-              <a:t>zbog</a:t>
-            </a:r>
-            <a:r>
-              <a:rPr dirty="0"/>
-              <a:t> </a:t>
-            </a:r>
-            <a:r>
-              <a:rPr dirty="0" err="1"/>
-              <a:t>nedostatka</a:t>
-            </a:r>
-            <a:r>
-              <a:rPr dirty="0"/>
-              <a:t> </a:t>
-            </a:r>
-            <a:r>
-              <a:rPr dirty="0" err="1"/>
-              <a:t>brzih</a:t>
-            </a:r>
-            <a:r>
-              <a:rPr dirty="0"/>
-              <a:t> </a:t>
-            </a:r>
-            <a:r>
-              <a:rPr dirty="0" err="1"/>
-              <a:t>uvida</a:t>
-            </a:r>
-            <a:r>
-              <a:rPr dirty="0"/>
+              <a:rPr lang="sr-Cyrl-RS" dirty="0" smtClean="0"/>
+              <a:t>Пропуштене инвестиционе прилике због недостатка брзих увида</a:t>
+            </a:r>
+            <a:r>
+              <a:rPr dirty="0" smtClean="0"/>
               <a:t>.</a:t>
             </a:r>
+            <a:endParaRPr dirty="0"/>
           </a:p>
         </p:txBody>
       </p:sp>
@@ -7936,7 +8002,7 @@
         <p:spPr>
           <a:xfrm>
             <a:off x="457200" y="457200"/>
-            <a:ext cx="8229600" cy="914400"/>
+            <a:ext cx="2180405" cy="646331"/>
           </a:xfrm>
           <a:prstGeom prst="rect">
             <a:avLst/>
@@ -7957,8 +8023,10 @@
               </a:defRPr>
             </a:pPr>
             <a:r>
-              <a:t>Cilj Rada</a:t>
-            </a:r>
+              <a:rPr lang="sr-Cyrl-RS" dirty="0" smtClean="0"/>
+              <a:t>Циљ рада</a:t>
+            </a:r>
+            <a:endParaRPr dirty="0"/>
           </a:p>
         </p:txBody>
       </p:sp>
@@ -8016,43 +8084,8 @@
         </p:nvSpPr>
         <p:spPr>
           <a:xfrm>
-            <a:off x="640080" y="2103120"/>
-            <a:ext cx="2194560" cy="457200"/>
-          </a:xfrm>
-          <a:prstGeom prst="rect">
-            <a:avLst/>
-          </a:prstGeom>
-          <a:noFill/>
-        </p:spPr>
-        <p:txBody>
-          <a:bodyPr wrap="none">
-            <a:spAutoFit/>
-          </a:bodyPr>
-          <a:lstStyle/>
-          <a:p>
-            <a:pPr algn="ctr">
-              <a:defRPr sz="1800" b="1">
-                <a:solidFill>
-                  <a:srgbClr val="1C453D"/>
-                </a:solidFill>
-              </a:defRPr>
-            </a:pPr>
-            <a:r>
-              <a:t>Automatska Klasifikacija</a:t>
-            </a:r>
-          </a:p>
-        </p:txBody>
-      </p:sp>
-      <p:sp>
-        <p:nvSpPr>
-          <p:cNvPr id="6" name="TextBox 5"/>
-          <p:cNvSpPr txBox="1"/>
-          <p:nvPr/>
-        </p:nvSpPr>
-        <p:spPr>
-          <a:xfrm>
-            <a:off x="640080" y="2651760"/>
-            <a:ext cx="2194560" cy="1188720"/>
+            <a:off x="284084" y="1917115"/>
+            <a:ext cx="2824875" cy="646331"/>
           </a:xfrm>
           <a:prstGeom prst="rect">
             <a:avLst/>
@@ -8065,7 +8098,44 @@
           </a:bodyPr>
           <a:lstStyle/>
           <a:p>
-            <a:pPr algn="l">
+            <a:pPr algn="ctr">
+              <a:defRPr sz="1800" b="1">
+                <a:solidFill>
+                  <a:srgbClr val="1C453D"/>
+                </a:solidFill>
+              </a:defRPr>
+            </a:pPr>
+            <a:r>
+              <a:rPr lang="sr-Cyrl-RS" dirty="0" smtClean="0"/>
+              <a:t>Аутоматска класификација</a:t>
+            </a:r>
+            <a:endParaRPr dirty="0"/>
+          </a:p>
+        </p:txBody>
+      </p:sp>
+      <p:sp>
+        <p:nvSpPr>
+          <p:cNvPr id="6" name="TextBox 5"/>
+          <p:cNvSpPr txBox="1"/>
+          <p:nvPr/>
+        </p:nvSpPr>
+        <p:spPr>
+          <a:xfrm>
+            <a:off x="640080" y="2651760"/>
+            <a:ext cx="2194560" cy="1092607"/>
+          </a:xfrm>
+          <a:prstGeom prst="rect">
+            <a:avLst/>
+          </a:prstGeom>
+          <a:noFill/>
+        </p:spPr>
+        <p:txBody>
+          <a:bodyPr wrap="square">
+            <a:spAutoFit/>
+          </a:bodyPr>
+          <a:lstStyle/>
+          <a:p>
+            <a:pPr>
               <a:defRPr sz="1300">
                 <a:solidFill>
                   <a:srgbClr val="34495E"/>
@@ -8073,8 +8143,22 @@
               </a:defRPr>
             </a:pPr>
             <a:r>
-              <a:t>Razvoj sistema za automatsku klasifikaciju Twitter sentimenta u tri kategorije: pozitivan, negativan i neutralan.</a:t>
-            </a:r>
+              <a:rPr lang="ru-RU" dirty="0"/>
+              <a:t>Развој система за аутоматску класификацију </a:t>
+            </a:r>
+            <a:r>
+              <a:rPr lang="en-US" dirty="0" smtClean="0"/>
+              <a:t>Twitter</a:t>
+            </a:r>
+            <a:r>
+              <a:rPr lang="ru-RU" dirty="0" smtClean="0"/>
+              <a:t> </a:t>
+            </a:r>
+            <a:r>
+              <a:rPr lang="ru-RU" dirty="0"/>
+              <a:t>сентимента у три категорије: позитиван, негативан и неутралан.</a:t>
+            </a:r>
+            <a:endParaRPr dirty="0"/>
           </a:p>
         </p:txBody>
       </p:sp>
@@ -8132,8 +8216,8 @@
         </p:nvSpPr>
         <p:spPr>
           <a:xfrm>
-            <a:off x="3566160" y="2103120"/>
-            <a:ext cx="2194560" cy="457200"/>
+            <a:off x="3443491" y="2103120"/>
+            <a:ext cx="2439899" cy="369332"/>
           </a:xfrm>
           <a:prstGeom prst="rect">
             <a:avLst/>
@@ -8154,7 +8238,20 @@
               </a:defRPr>
             </a:pPr>
             <a:r>
-              <a:t>Poređenje ML Modela</a:t>
+              <a:rPr lang="sr-Cyrl-RS" dirty="0"/>
+              <a:t>Поређење </a:t>
+            </a:r>
+            <a:r>
+              <a:rPr lang="en-US" dirty="0" smtClean="0"/>
+              <a:t>ML</a:t>
+            </a:r>
+            <a:r>
+              <a:rPr lang="sr-Cyrl-RS" dirty="0" smtClean="0"/>
+              <a:t> </a:t>
+            </a:r>
+            <a:r>
+              <a:rPr lang="sr-Cyrl-RS" dirty="0"/>
+              <a:t>Модела</a:t>
             </a:r>
           </a:p>
         </p:txBody>
@@ -8168,7 +8265,7 @@
         <p:spPr>
           <a:xfrm>
             <a:off x="3566160" y="2651760"/>
-            <a:ext cx="2194560" cy="1188720"/>
+            <a:ext cx="2194560" cy="892552"/>
           </a:xfrm>
           <a:prstGeom prst="rect">
             <a:avLst/>
@@ -8181,7 +8278,7 @@
           </a:bodyPr>
           <a:lstStyle/>
           <a:p>
-            <a:pPr algn="l">
+            <a:pPr>
               <a:defRPr sz="1300">
                 <a:solidFill>
                   <a:srgbClr val="34495E"/>
@@ -8189,8 +8286,42 @@
               </a:defRPr>
             </a:pPr>
             <a:r>
-              <a:t>Implementacija i evaluacija tri različita pristupa: Naive Bayes, SVM i BERT transformer model.</a:t>
-            </a:r>
+              <a:rPr lang="ru-RU" dirty="0"/>
+              <a:t>Имплементација и евалуација три различита приступа: </a:t>
+            </a:r>
+            <a:r>
+              <a:rPr lang="en-US" dirty="0" smtClean="0"/>
+              <a:t>Naive Bayes</a:t>
+            </a:r>
+            <a:r>
+              <a:rPr lang="ru-RU" dirty="0" smtClean="0"/>
+              <a:t>, </a:t>
+            </a:r>
+            <a:r>
+              <a:rPr lang="en-US" dirty="0" smtClean="0"/>
+              <a:t>SVM</a:t>
+            </a:r>
+            <a:r>
+              <a:rPr lang="ru-RU" dirty="0" smtClean="0"/>
+              <a:t> </a:t>
+            </a:r>
+            <a:r>
+              <a:rPr lang="ru-RU" dirty="0"/>
+              <a:t>и </a:t>
+            </a:r>
+            <a:r>
+              <a:rPr lang="en-US" dirty="0" smtClean="0"/>
+              <a:t>BERT</a:t>
+            </a:r>
+            <a:r>
+              <a:rPr lang="ru-RU" dirty="0" smtClean="0"/>
+              <a:t> </a:t>
+            </a:r>
+            <a:r>
+              <a:rPr lang="ru-RU" dirty="0"/>
+              <a:t>трансформер модел.</a:t>
+            </a:r>
+            <a:endParaRPr dirty="0"/>
           </a:p>
         </p:txBody>
       </p:sp>
@@ -8248,8 +8379,8 @@
         </p:nvSpPr>
         <p:spPr>
           <a:xfrm>
-            <a:off x="6492240" y="2103120"/>
-            <a:ext cx="2194560" cy="457200"/>
+            <a:off x="6391404" y="2103120"/>
+            <a:ext cx="2396233" cy="369332"/>
           </a:xfrm>
           <a:prstGeom prst="rect">
             <a:avLst/>
@@ -8270,8 +8401,10 @@
               </a:defRPr>
             </a:pPr>
             <a:r>
-              <a:t>Korelaciona Analiza</a:t>
-            </a:r>
+              <a:rPr lang="sr-Cyrl-RS" dirty="0" smtClean="0"/>
+              <a:t>Корелациона анализа</a:t>
+            </a:r>
+            <a:endParaRPr dirty="0"/>
           </a:p>
         </p:txBody>
       </p:sp>
@@ -8284,7 +8417,7 @@
         <p:spPr>
           <a:xfrm>
             <a:off x="6492240" y="2651760"/>
-            <a:ext cx="2194560" cy="1188720"/>
+            <a:ext cx="2194560" cy="692497"/>
           </a:xfrm>
           <a:prstGeom prst="rect">
             <a:avLst/>
@@ -8297,7 +8430,7 @@
           </a:bodyPr>
           <a:lstStyle/>
           <a:p>
-            <a:pPr algn="l">
+            <a:pPr>
               <a:defRPr sz="1300">
                 <a:solidFill>
                   <a:srgbClr val="34495E"/>
@@ -8305,8 +8438,34 @@
               </a:defRPr>
             </a:pPr>
             <a:r>
-              <a:t>Analiza statističke povezanosti između Twitter sentimenta i cene Bitcoin-a.</a:t>
-            </a:r>
+              <a:rPr lang="ru-RU" dirty="0"/>
+              <a:t>Анализа статистичке повезаности између </a:t>
+            </a:r>
+            <a:r>
+              <a:rPr lang="en-US" dirty="0" smtClean="0"/>
+              <a:t>Twitter</a:t>
+            </a:r>
+            <a:r>
+              <a:rPr lang="ru-RU" dirty="0" smtClean="0"/>
+              <a:t> </a:t>
+            </a:r>
+            <a:r>
+              <a:rPr lang="ru-RU" dirty="0"/>
+              <a:t>сентимента и цене </a:t>
+            </a:r>
+            <a:r>
+              <a:rPr lang="en-US" dirty="0" smtClean="0"/>
+              <a:t>Bitcoin</a:t>
+            </a:r>
+            <a:r>
+              <a:rPr lang="ru-RU" dirty="0" smtClean="0"/>
+              <a:t>-а</a:t>
+            </a:r>
+            <a:r>
+              <a:rPr lang="ru-RU" dirty="0"/>
+              <a:t>.</a:t>
+            </a:r>
+            <a:endParaRPr dirty="0"/>
           </a:p>
         </p:txBody>
       </p:sp>
@@ -8395,7 +8554,7 @@
         <p:spPr>
           <a:xfrm>
             <a:off x="457200" y="457200"/>
-            <a:ext cx="8229600" cy="914400"/>
+            <a:ext cx="6058069" cy="646331"/>
           </a:xfrm>
           <a:prstGeom prst="rect">
             <a:avLst/>
@@ -8416,8 +8575,10 @@
               </a:defRPr>
             </a:pPr>
             <a:r>
-              <a:t>Sentiment Analiza - Osnove</a:t>
-            </a:r>
+              <a:rPr lang="sr-Cyrl-RS" dirty="0" smtClean="0"/>
+              <a:t>Анализа сентимента - основе</a:t>
+            </a:r>
+            <a:endParaRPr dirty="0"/>
           </a:p>
         </p:txBody>
       </p:sp>
@@ -8430,7 +8591,7 @@
         <p:spPr>
           <a:xfrm>
             <a:off x="731520" y="1645920"/>
-            <a:ext cx="7772400" cy="4572000"/>
+            <a:ext cx="7772400" cy="2887970"/>
           </a:xfrm>
           <a:prstGeom prst="rect">
             <a:avLst/>
@@ -8454,8 +8615,10 @@
               </a:defRPr>
             </a:pPr>
             <a:r>
-              <a:t>Definicija</a:t>
-            </a:r>
+              <a:rPr lang="sr-Cyrl-RS" dirty="0" smtClean="0"/>
+              <a:t>Дефиниција</a:t>
+            </a:r>
+            <a:endParaRPr dirty="0"/>
           </a:p>
           <a:p>
             <a:pPr>
@@ -8469,7 +8632,8 @@
               </a:defRPr>
             </a:pPr>
             <a:r>
-              <a:t>Automatska detekcija subjektivnosti i emocija u tekstualnim podacima</a:t>
+              <a:rPr lang="ru-RU" dirty="0"/>
+              <a:t>Аутоматска детекција субјективности и емоција у текстуалним подацима</a:t>
             </a:r>
           </a:p>
           <a:p>
@@ -8484,7 +8648,28 @@
               </a:defRPr>
             </a:pPr>
             <a:r>
-              <a:t>Grana Natural Language Processing (NLP) tehnologije</a:t>
+              <a:rPr lang="ru-RU" dirty="0"/>
+              <a:t>Грана </a:t>
+            </a:r>
+            <a:r>
+              <a:rPr lang="en-US" dirty="0" smtClean="0"/>
+              <a:t>Natural Language Processing </a:t>
+            </a:r>
+            <a:r>
+              <a:rPr lang="ru-RU" dirty="0" smtClean="0"/>
+              <a:t>(</a:t>
+            </a:r>
+            <a:r>
+              <a:rPr lang="en-US" dirty="0" smtClean="0"/>
+              <a:t>NLP</a:t>
+            </a:r>
+            <a:r>
+              <a:rPr lang="ru-RU" dirty="0" smtClean="0"/>
+              <a:t>) </a:t>
+            </a:r>
+            <a:r>
+              <a:rPr lang="ru-RU" dirty="0"/>
+              <a:t>технологије</a:t>
             </a:r>
           </a:p>
           <a:p>
@@ -8499,7 +8684,8 @@
               </a:defRPr>
             </a:pPr>
             <a:r>
-              <a:t>Klasifikacija teksta u sentiment kategorije</a:t>
+              <a:rPr lang="ru-RU" dirty="0"/>
+              <a:t>Класификација текста у сентимент категорије</a:t>
             </a:r>
           </a:p>
           <a:p>
@@ -8514,8 +8700,10 @@
               </a:defRPr>
             </a:pPr>
             <a:r>
-              <a:t>Primena u finansijama</a:t>
-            </a:r>
+              <a:rPr lang="sr-Cyrl-RS" dirty="0" smtClean="0"/>
+              <a:t>Примена у финансијама</a:t>
+            </a:r>
+            <a:endParaRPr dirty="0"/>
           </a:p>
           <a:p>
             <a:pPr>
@@ -8529,7 +8717,8 @@
               </a:defRPr>
             </a:pPr>
             <a:r>
-              <a:t>Predviđanje tržišnih trendova na osnovu javnog mišljenja</a:t>
+              <a:rPr lang="ru-RU" dirty="0"/>
+              <a:t>Предвиђање тржишних трендова на основу јавног мишљења</a:t>
             </a:r>
           </a:p>
           <a:p>
@@ -8544,7 +8733,8 @@
               </a:defRPr>
             </a:pPr>
             <a:r>
-              <a:t>Analiza sentimenta investitora pre donošenja odluka</a:t>
+              <a:rPr lang="ru-RU" dirty="0"/>
+              <a:t>Анализа сентимента инвеститора пре доношења одлука</a:t>
             </a:r>
           </a:p>
           <a:p>
@@ -8559,7 +8749,16 @@
               </a:defRPr>
             </a:pPr>
             <a:r>
-              <a:t>Real-time praćenje percepcije brenda i proizvoda</a:t>
+              <a:rPr lang="en-US" dirty="0" smtClean="0"/>
+              <a:t>Real-Time</a:t>
+            </a:r>
+            <a:r>
+              <a:rPr lang="ru-RU" dirty="0" smtClean="0"/>
+              <a:t> </a:t>
+            </a:r>
+            <a:r>
+              <a:rPr lang="ru-RU" dirty="0"/>
+              <a:t>праћење перцепције бренда и производа</a:t>
             </a:r>
           </a:p>
         </p:txBody>
@@ -8649,7 +8848,7 @@
         <p:spPr>
           <a:xfrm>
             <a:off x="457200" y="457200"/>
-            <a:ext cx="8229600" cy="914400"/>
+            <a:ext cx="5536900" cy="646331"/>
           </a:xfrm>
           <a:prstGeom prst="rect">
             <a:avLst/>
@@ -8670,8 +8869,10 @@
               </a:defRPr>
             </a:pPr>
             <a:r>
-              <a:t>Machine Learning Modeli</a:t>
-            </a:r>
+              <a:rPr lang="sr-Cyrl-RS" dirty="0" smtClean="0"/>
+              <a:t>Модели машинског учења</a:t>
+            </a:r>
+            <a:endParaRPr dirty="0"/>
           </a:p>
         </p:txBody>
       </p:sp>
@@ -8765,7 +8966,7 @@
         <p:spPr>
           <a:xfrm>
             <a:off x="640080" y="2743200"/>
-            <a:ext cx="2194560" cy="2286000"/>
+            <a:ext cx="2194560" cy="1123384"/>
           </a:xfrm>
           <a:prstGeom prst="rect">
             <a:avLst/>
@@ -8789,8 +8990,14 @@
               </a:defRPr>
             </a:pPr>
             <a:r>
-              <a:t>• Probabilistički pristup</a:t>
-            </a:r>
+              <a:rPr dirty="0"/>
+              <a:t>• </a:t>
+            </a:r>
+            <a:r>
+              <a:rPr lang="sr-Cyrl-RS" dirty="0" smtClean="0"/>
+              <a:t>Пробабилистички приступ</a:t>
+            </a:r>
+            <a:endParaRPr dirty="0"/>
           </a:p>
           <a:p>
             <a:pPr>
@@ -8804,8 +9011,14 @@
               </a:defRPr>
             </a:pPr>
             <a:r>
-              <a:t>• TF-IDF vektorizacija</a:t>
-            </a:r>
+              <a:rPr dirty="0"/>
+              <a:t>• TF-IDF </a:t>
+            </a:r>
+            <a:r>
+              <a:rPr lang="sr-Cyrl-RS" dirty="0" smtClean="0"/>
+              <a:t>векторизација</a:t>
+            </a:r>
+            <a:endParaRPr dirty="0"/>
           </a:p>
           <a:p>
             <a:pPr>
@@ -8819,8 +9032,26 @@
               </a:defRPr>
             </a:pPr>
             <a:r>
-              <a:t>• Brzo treniranje (~10s)</a:t>
-            </a:r>
+              <a:rPr dirty="0"/>
+              <a:t>• </a:t>
+            </a:r>
+            <a:r>
+              <a:rPr lang="sr-Cyrl-RS" dirty="0" smtClean="0"/>
+              <a:t>Брзо тренирање </a:t>
+            </a:r>
+            <a:r>
+              <a:rPr dirty="0" smtClean="0"/>
+              <a:t>(~10</a:t>
+            </a:r>
+            <a:r>
+              <a:rPr lang="sr-Cyrl-RS" dirty="0" smtClean="0"/>
+              <a:t>с</a:t>
+            </a:r>
+            <a:r>
+              <a:rPr dirty="0" smtClean="0"/>
+              <a:t>)</a:t>
+            </a:r>
+            <a:endParaRPr dirty="0"/>
           </a:p>
           <a:p>
             <a:pPr>
@@ -8834,8 +9065,18 @@
               </a:defRPr>
             </a:pPr>
             <a:r>
-              <a:t>• Dobro za baseline</a:t>
-            </a:r>
+              <a:rPr dirty="0"/>
+              <a:t>• </a:t>
+            </a:r>
+            <a:r>
+              <a:rPr lang="sr-Cyrl-RS" dirty="0" smtClean="0"/>
+              <a:t>Добро за </a:t>
+            </a:r>
+            <a:r>
+              <a:rPr dirty="0" smtClean="0"/>
+              <a:t>baseline</a:t>
+            </a:r>
+            <a:endParaRPr dirty="0"/>
           </a:p>
         </p:txBody>
       </p:sp>
@@ -8973,8 +9214,8 @@
               <a:t>• RBF kernel </a:t>
             </a:r>
             <a:r>
-              <a:rPr dirty="0" err="1"/>
-              <a:t>funkcija</a:t>
+              <a:rPr lang="sr-Cyrl-RS" dirty="0" smtClean="0"/>
+              <a:t>функција</a:t>
             </a:r>
             <a:endParaRPr dirty="0"/>
           </a:p>
@@ -9018,16 +9259,8 @@
               <a:t>• </a:t>
             </a:r>
             <a:r>
-              <a:rPr dirty="0" err="1"/>
-              <a:t>Visoka</a:t>
-            </a:r>
-            <a:r>
-              <a:rPr dirty="0"/>
-              <a:t> </a:t>
-            </a:r>
-            <a:r>
-              <a:rPr lang="sr-Latn-RS" dirty="0" smtClean="0"/>
-              <a:t>preciznost</a:t>
+              <a:rPr lang="sr-Cyrl-RS" dirty="0" smtClean="0"/>
+              <a:t>Висока прецизност</a:t>
             </a:r>
             <a:endParaRPr dirty="0"/>
           </a:p>
@@ -9123,7 +9356,7 @@
         <p:spPr>
           <a:xfrm>
             <a:off x="6492240" y="2743200"/>
-            <a:ext cx="2194560" cy="2286000"/>
+            <a:ext cx="2194560" cy="1123384"/>
           </a:xfrm>
           <a:prstGeom prst="rect">
             <a:avLst/>
@@ -9147,8 +9380,14 @@
               </a:defRPr>
             </a:pPr>
             <a:r>
-              <a:t>• Transformer arhitektura</a:t>
-            </a:r>
+              <a:rPr dirty="0"/>
+              <a:t>• Transformer </a:t>
+            </a:r>
+            <a:r>
+              <a:rPr lang="sr-Cyrl-RS" dirty="0" smtClean="0"/>
+              <a:t>архитектура</a:t>
+            </a:r>
+            <a:endParaRPr dirty="0"/>
           </a:p>
           <a:p>
             <a:pPr>
@@ -9162,8 +9401,14 @@
               </a:defRPr>
             </a:pPr>
             <a:r>
-              <a:t>• Pre-trained model</a:t>
-            </a:r>
+              <a:rPr dirty="0"/>
+              <a:t>• Pre-trained </a:t>
+            </a:r>
+            <a:r>
+              <a:rPr lang="sr-Cyrl-RS" dirty="0" smtClean="0"/>
+              <a:t>модел</a:t>
+            </a:r>
+            <a:endParaRPr dirty="0"/>
           </a:p>
           <a:p>
             <a:pPr>
@@ -9177,8 +9422,14 @@
               </a:defRPr>
             </a:pPr>
             <a:r>
-              <a:t>• Fine-tuning pristup</a:t>
-            </a:r>
+              <a:rPr dirty="0"/>
+              <a:t>• Fine-tuning </a:t>
+            </a:r>
+            <a:r>
+              <a:rPr lang="sr-Cyrl-RS" dirty="0" smtClean="0"/>
+              <a:t>приступ</a:t>
+            </a:r>
+            <a:endParaRPr dirty="0"/>
           </a:p>
           <a:p>
             <a:pPr>
@@ -9192,8 +9443,14 @@
               </a:defRPr>
             </a:pPr>
             <a:r>
-              <a:t>• State-of-the-art rezultati</a:t>
-            </a:r>
+              <a:rPr dirty="0"/>
+              <a:t>• State-of-the-art </a:t>
+            </a:r>
+            <a:r>
+              <a:rPr lang="sr-Cyrl-RS" dirty="0" smtClean="0"/>
+              <a:t>резултати</a:t>
+            </a:r>
+            <a:endParaRPr dirty="0"/>
           </a:p>
         </p:txBody>
       </p:sp>
@@ -9282,7 +9539,7 @@
         <p:spPr>
           <a:xfrm>
             <a:off x="457200" y="457200"/>
-            <a:ext cx="8229600" cy="914400"/>
+            <a:ext cx="4789773" cy="646331"/>
           </a:xfrm>
           <a:prstGeom prst="rect">
             <a:avLst/>
@@ -9305,7 +9562,20 @@
               </a:defRPr>
             </a:pPr>
             <a:r>
-              <a:t>Dataset i Preprocessing</a:t>
+              <a:rPr dirty="0"/>
+              <a:t>Dataset </a:t>
+            </a:r>
+            <a:r>
+              <a:rPr lang="sr-Cyrl-RS" dirty="0" smtClean="0"/>
+              <a:t>и</a:t>
+            </a:r>
+            <a:r>
+              <a:rPr dirty="0" smtClean="0"/>
+              <a:t> </a:t>
+            </a:r>
+            <a:r>
+              <a:rPr dirty="0"/>
+              <a:t>Preprocessing</a:t>
             </a:r>
           </a:p>
         </p:txBody>
@@ -9319,7 +9589,7 @@
         <p:spPr>
           <a:xfrm>
             <a:off x="731520" y="1645920"/>
-            <a:ext cx="7772400" cy="4572000"/>
+            <a:ext cx="7772400" cy="3857466"/>
           </a:xfrm>
           <a:prstGeom prst="rect">
             <a:avLst/>
@@ -9343,6 +9613,7 @@
               </a:defRPr>
             </a:pPr>
             <a:r>
+              <a:rPr dirty="0"/>
               <a:t>Bitcoin Twitter Dataset</a:t>
             </a:r>
           </a:p>
@@ -9358,8 +9629,22 @@
               </a:defRPr>
             </a:pPr>
             <a:r>
-              <a:t>5,000 tweetova o Bitcoin-u</a:t>
-            </a:r>
+              <a:rPr dirty="0"/>
+              <a:t>5,000 </a:t>
+            </a:r>
+            <a:r>
+              <a:rPr lang="sr-Cyrl-RS" dirty="0" smtClean="0"/>
+              <a:t>твитова о </a:t>
+            </a:r>
+            <a:r>
+              <a:rPr dirty="0" smtClean="0"/>
+              <a:t>Bitcoin-</a:t>
+            </a:r>
+            <a:r>
+              <a:rPr lang="sr-Cyrl-RS" dirty="0" smtClean="0"/>
+              <a:t>у</a:t>
+            </a:r>
+            <a:endParaRPr dirty="0"/>
           </a:p>
           <a:p>
             <a:pPr>
@@ -9373,7 +9658,16 @@
               </a:defRPr>
             </a:pPr>
             <a:r>
-              <a:t>Ručno anotiran dataset (positive/negative/neutral)</a:t>
+              <a:rPr lang="sr-Cyrl-RS" dirty="0" smtClean="0"/>
+              <a:t>Ручно анотиран </a:t>
+            </a:r>
+            <a:r>
+              <a:rPr dirty="0" smtClean="0"/>
+              <a:t>dataset </a:t>
+            </a:r>
+            <a:r>
+              <a:rPr dirty="0"/>
+              <a:t>(positive/negative/neutral)</a:t>
             </a:r>
           </a:p>
           <a:p>
@@ -9388,7 +9682,36 @@
               </a:defRPr>
             </a:pPr>
             <a:r>
-              <a:t>Vremenski period: Januar - Maj 2024</a:t>
+              <a:rPr lang="sr-Cyrl-RS" dirty="0" smtClean="0"/>
+              <a:t>Временски период</a:t>
+            </a:r>
+            <a:r>
+              <a:rPr dirty="0" smtClean="0"/>
+              <a:t>: </a:t>
+            </a:r>
+            <a:r>
+              <a:rPr lang="sr-Cyrl-RS" dirty="0" smtClean="0"/>
+              <a:t>Јануар</a:t>
+            </a:r>
+            <a:r>
+              <a:rPr dirty="0" smtClean="0"/>
+              <a:t> </a:t>
+            </a:r>
+            <a:r>
+              <a:rPr dirty="0"/>
+              <a:t>- </a:t>
+            </a:r>
+            <a:r>
+              <a:rPr lang="sr-Cyrl-RS" dirty="0" smtClean="0"/>
+              <a:t>Мај</a:t>
+            </a:r>
+            <a:r>
+              <a:rPr dirty="0" smtClean="0"/>
+              <a:t> </a:t>
+            </a:r>
+            <a:r>
+              <a:rPr dirty="0"/>
+              <a:t>2024</a:t>
             </a:r>
           </a:p>
           <a:p>
@@ -9403,8 +9726,22 @@
               </a:defRPr>
             </a:pPr>
             <a:r>
-              <a:t>Balansiran dataset po klasama</a:t>
-            </a:r>
+              <a:rPr lang="sr-Cyrl-RS" dirty="0" smtClean="0"/>
+              <a:t>Балансиран</a:t>
+            </a:r>
+            <a:r>
+              <a:rPr dirty="0" smtClean="0"/>
+              <a:t> </a:t>
+            </a:r>
+            <a:r>
+              <a:rPr dirty="0"/>
+              <a:t>dataset </a:t>
+            </a:r>
+            <a:r>
+              <a:rPr lang="sr-Cyrl-RS" dirty="0" smtClean="0"/>
+              <a:t>по класама</a:t>
+            </a:r>
+            <a:endParaRPr dirty="0"/>
           </a:p>
           <a:p>
             <a:pPr>
@@ -9418,6 +9755,7 @@
               </a:defRPr>
             </a:pPr>
             <a:r>
+              <a:rPr dirty="0"/>
               <a:t>Text Preprocessing Pipeline</a:t>
             </a:r>
           </a:p>
@@ -9433,8 +9771,38 @@
               </a:defRPr>
             </a:pPr>
             <a:r>
-              <a:t>Uklanjanje URL-ova, mentions (@user) i hashtag-ova</a:t>
-            </a:r>
+              <a:rPr lang="sr-Cyrl-RS" dirty="0" smtClean="0"/>
+              <a:t>Уклањање</a:t>
+            </a:r>
+            <a:r>
+              <a:rPr dirty="0" smtClean="0"/>
+              <a:t> URL-</a:t>
+            </a:r>
+            <a:r>
+              <a:rPr lang="sr-Cyrl-RS" dirty="0" smtClean="0"/>
+              <a:t>ова</a:t>
+            </a:r>
+            <a:r>
+              <a:rPr dirty="0" smtClean="0"/>
+              <a:t>, </a:t>
+            </a:r>
+            <a:r>
+              <a:rPr dirty="0"/>
+              <a:t>mentions (@user) </a:t>
+            </a:r>
+            <a:r>
+              <a:rPr lang="sr-Cyrl-RS" dirty="0" smtClean="0"/>
+              <a:t>и</a:t>
+            </a:r>
+            <a:r>
+              <a:rPr dirty="0" smtClean="0"/>
+              <a:t> hashtag-</a:t>
+            </a:r>
+            <a:r>
+              <a:rPr lang="sr-Cyrl-RS" dirty="0" smtClean="0"/>
+              <a:t>ова</a:t>
+            </a:r>
+            <a:endParaRPr dirty="0"/>
           </a:p>
           <a:p>
             <a:pPr>
@@ -9448,8 +9816,14 @@
               </a:defRPr>
             </a:pPr>
             <a:r>
-              <a:t>Lowercase transformacija</a:t>
-            </a:r>
+              <a:rPr dirty="0"/>
+              <a:t>Lowercase </a:t>
+            </a:r>
+            <a:r>
+              <a:rPr lang="sr-Cyrl-RS" dirty="0" smtClean="0"/>
+              <a:t>трансформација</a:t>
+            </a:r>
+            <a:endParaRPr dirty="0"/>
           </a:p>
           <a:p>
             <a:pPr>
@@ -9463,7 +9837,16 @@
               </a:defRPr>
             </a:pPr>
             <a:r>
-              <a:t>Tokenizacija (NLTK)</a:t>
+              <a:rPr lang="sr-Cyrl-RS" dirty="0" smtClean="0"/>
+              <a:t>Токенизација</a:t>
+            </a:r>
+            <a:r>
+              <a:rPr dirty="0" smtClean="0"/>
+              <a:t> </a:t>
+            </a:r>
+            <a:r>
+              <a:rPr dirty="0"/>
+              <a:t>(NLTK)</a:t>
             </a:r>
           </a:p>
           <a:p>
@@ -9478,6 +9861,7 @@
               </a:defRPr>
             </a:pPr>
             <a:r>
+              <a:rPr dirty="0"/>
               <a:t>Stop words removal</a:t>
             </a:r>
           </a:p>
@@ -9493,7 +9877,16 @@
               </a:defRPr>
             </a:pPr>
             <a:r>
-              <a:t>Lemmatization (WordNetLemmatizer)</a:t>
+              <a:rPr dirty="0"/>
+              <a:t>Lemmatization (</a:t>
+            </a:r>
+            <a:r>
+              <a:rPr dirty="0" err="1"/>
+              <a:t>WordNetLemmatizer</a:t>
+            </a:r>
+            <a:r>
+              <a:rPr dirty="0"/>
+              <a:t>)</a:t>
             </a:r>
           </a:p>
         </p:txBody>
@@ -9583,7 +9976,7 @@
         <p:spPr>
           <a:xfrm>
             <a:off x="457200" y="457200"/>
-            <a:ext cx="8229600" cy="914400"/>
+            <a:ext cx="4988738" cy="646331"/>
           </a:xfrm>
           <a:prstGeom prst="rect">
             <a:avLst/>
@@ -9604,8 +9997,10 @@
               </a:defRPr>
             </a:pPr>
             <a:r>
-              <a:t>Korišćene Tehnologije</a:t>
-            </a:r>
+              <a:rPr lang="sr-Cyrl-RS" dirty="0" smtClean="0"/>
+              <a:t>Коришћене технологије</a:t>
+            </a:r>
+            <a:endParaRPr dirty="0"/>
           </a:p>
         </p:txBody>
       </p:sp>
@@ -9639,6 +10034,7 @@
               </a:defRPr>
             </a:pPr>
             <a:r>
+              <a:rPr dirty="0"/>
               <a:t>Python 3.11</a:t>
             </a:r>
           </a:p>
@@ -9653,7 +10049,7 @@
         <p:spPr>
           <a:xfrm>
             <a:off x="1097280" y="2103120"/>
-            <a:ext cx="3474720" cy="274320"/>
+            <a:ext cx="1537600" cy="307777"/>
           </a:xfrm>
           <a:prstGeom prst="rect">
             <a:avLst/>
@@ -9674,8 +10070,10 @@
               </a:defRPr>
             </a:pPr>
             <a:r>
-              <a:t>Programski jezik</a:t>
-            </a:r>
+              <a:rPr lang="sr-Cyrl-RS" dirty="0" smtClean="0"/>
+              <a:t>Програмски језик</a:t>
+            </a:r>
+            <a:endParaRPr dirty="0"/>
           </a:p>
         </p:txBody>
       </p:sp>
@@ -9744,6 +10142,7 @@
               </a:defRPr>
             </a:pPr>
             <a:r>
+              <a:rPr dirty="0"/>
               <a:t>Deep learning framework</a:t>
             </a:r>
           </a:p>
@@ -9793,7 +10192,7 @@
         <p:spPr>
           <a:xfrm>
             <a:off x="1097280" y="3749039"/>
-            <a:ext cx="3474720" cy="274320"/>
+            <a:ext cx="2189958" cy="307777"/>
           </a:xfrm>
           <a:prstGeom prst="rect">
             <a:avLst/>
@@ -9814,8 +10213,14 @@
               </a:defRPr>
             </a:pPr>
             <a:r>
-              <a:t>Hugging Face BERT modeli</a:t>
-            </a:r>
+              <a:rPr dirty="0"/>
+              <a:t>Hugging Face BERT </a:t>
+            </a:r>
+            <a:r>
+              <a:rPr lang="sr-Cyrl-RS" dirty="0" smtClean="0"/>
+              <a:t>модели</a:t>
+            </a:r>
+            <a:endParaRPr dirty="0"/>
           </a:p>
         </p:txBody>
       </p:sp>
@@ -9863,7 +10268,7 @@
         <p:spPr>
           <a:xfrm>
             <a:off x="1097280" y="4572000"/>
-            <a:ext cx="3474720" cy="274320"/>
+            <a:ext cx="1693092" cy="307777"/>
           </a:xfrm>
           <a:prstGeom prst="rect">
             <a:avLst/>
@@ -9884,8 +10289,14 @@
               </a:defRPr>
             </a:pPr>
             <a:r>
-              <a:t>Baseline ML modeli</a:t>
-            </a:r>
+              <a:rPr dirty="0"/>
+              <a:t>Baseline ML </a:t>
+            </a:r>
+            <a:r>
+              <a:rPr lang="sr-Cyrl-RS" dirty="0" smtClean="0"/>
+              <a:t>модели</a:t>
+            </a:r>
+            <a:endParaRPr dirty="0"/>
           </a:p>
         </p:txBody>
       </p:sp>
@@ -10073,7 +10484,7 @@
         <p:spPr>
           <a:xfrm>
             <a:off x="5212080" y="3749039"/>
-            <a:ext cx="3474720" cy="274320"/>
+            <a:ext cx="1302664" cy="307777"/>
           </a:xfrm>
           <a:prstGeom prst="rect">
             <a:avLst/>
@@ -10094,8 +10505,10 @@
               </a:defRPr>
             </a:pPr>
             <a:r>
-              <a:t>Vizualizacije</a:t>
-            </a:r>
+              <a:rPr lang="sr-Cyrl-RS" dirty="0" smtClean="0"/>
+              <a:t>Визуализације</a:t>
+            </a:r>
+            <a:endParaRPr dirty="0"/>
           </a:p>
         </p:txBody>
       </p:sp>
@@ -10164,6 +10577,7 @@
               </a:defRPr>
             </a:pPr>
             <a:r>
+              <a:rPr dirty="0"/>
               <a:t>Bitcoin price data</a:t>
             </a:r>
           </a:p>
@@ -10254,7 +10668,7 @@
         <p:spPr>
           <a:xfrm>
             <a:off x="457200" y="457200"/>
-            <a:ext cx="8229600" cy="914400"/>
+            <a:ext cx="4397101" cy="646331"/>
           </a:xfrm>
           <a:prstGeom prst="rect">
             <a:avLst/>
@@ -10275,8 +10689,10 @@
               </a:defRPr>
             </a:pPr>
             <a:r>
-              <a:t>Arhitektura Sistema</a:t>
-            </a:r>
+              <a:rPr lang="sr-Cyrl-RS" dirty="0" smtClean="0"/>
+              <a:t>Архитектура система</a:t>
+            </a:r>
+            <a:endParaRPr dirty="0"/>
           </a:p>
         </p:txBody>
       </p:sp>
@@ -10289,7 +10705,7 @@
         <p:spPr>
           <a:xfrm>
             <a:off x="731520" y="1645920"/>
-            <a:ext cx="7772400" cy="4572000"/>
+            <a:ext cx="7772400" cy="4647426"/>
           </a:xfrm>
           <a:prstGeom prst="rect">
             <a:avLst/>
@@ -10313,6 +10729,7 @@
               </a:defRPr>
             </a:pPr>
             <a:r>
+              <a:rPr dirty="0"/>
               <a:t>Data Pipeline</a:t>
             </a:r>
           </a:p>
@@ -10328,8 +10745,18 @@
               </a:defRPr>
             </a:pPr>
             <a:r>
-              <a:t>Data Collection → Twitter dataset (5,000 tweets)</a:t>
-            </a:r>
+              <a:rPr dirty="0"/>
+              <a:t>Data Collection → Twitter dataset (5,000 </a:t>
+            </a:r>
+            <a:r>
+              <a:rPr lang="sr-Cyrl-RS" dirty="0" smtClean="0"/>
+              <a:t>твитова</a:t>
+            </a:r>
+            <a:r>
+              <a:rPr dirty="0" smtClean="0"/>
+              <a:t>)</a:t>
+            </a:r>
+            <a:endParaRPr dirty="0"/>
           </a:p>
           <a:p>
             <a:pPr>
@@ -10343,8 +10770,14 @@
               </a:defRPr>
             </a:pPr>
             <a:r>
-              <a:t>Preprocessing → Text cleaning i tokenizacija</a:t>
-            </a:r>
+              <a:rPr dirty="0"/>
+              <a:t>Preprocessing → Text cleaning </a:t>
+            </a:r>
+            <a:r>
+              <a:rPr lang="sr-Cyrl-RS" dirty="0" smtClean="0"/>
+              <a:t>и токенизација</a:t>
+            </a:r>
+            <a:endParaRPr dirty="0"/>
           </a:p>
           <a:p>
             <a:pPr>
@@ -10358,8 +10791,14 @@
               </a:defRPr>
             </a:pPr>
             <a:r>
-              <a:t>Feature Extraction → TF-IDF / BERT embeddings</a:t>
-            </a:r>
+              <a:rPr dirty="0"/>
+              <a:t>Feature Extraction → TF-IDF / BERT </a:t>
+            </a:r>
+            <a:r>
+              <a:rPr dirty="0" err="1"/>
+              <a:t>embeddings</a:t>
+            </a:r>
+            <a:endParaRPr dirty="0"/>
           </a:p>
           <a:p>
             <a:pPr>
@@ -10373,6 +10812,7 @@
               </a:defRPr>
             </a:pPr>
             <a:r>
+              <a:rPr dirty="0"/>
               <a:t>Model Pipeline</a:t>
             </a:r>
           </a:p>
@@ -10388,6 +10828,7 @@
               </a:defRPr>
             </a:pPr>
             <a:r>
+              <a:rPr dirty="0"/>
               <a:t>Train/Test Split → 80% / 20%</a:t>
             </a:r>
           </a:p>
@@ -10403,6 +10844,7 @@
               </a:defRPr>
             </a:pPr>
             <a:r>
+              <a:rPr dirty="0"/>
               <a:t>Model Training → Naive Bayes, SVM, BERT</a:t>
             </a:r>
           </a:p>
@@ -10418,7 +10860,20 @@
               </a:defRPr>
             </a:pPr>
             <a:r>
-              <a:t>Hyperparameter Tuning → GridSearchCV / Manual tuning</a:t>
+              <a:rPr dirty="0" err="1"/>
+              <a:t>Hyperparameter</a:t>
+            </a:r>
+            <a:r>
+              <a:rPr dirty="0"/>
+              <a:t> Tuning → </a:t>
+            </a:r>
+            <a:r>
+              <a:rPr dirty="0" err="1"/>
+              <a:t>GridSearchCV</a:t>
+            </a:r>
+            <a:r>
+              <a:rPr dirty="0"/>
+              <a:t> / Manual tuning</a:t>
             </a:r>
           </a:p>
           <a:p>
@@ -10433,6 +10888,7 @@
               </a:defRPr>
             </a:pPr>
             <a:r>
+              <a:rPr dirty="0"/>
               <a:t>Evaluation → Accuracy, Precision, Recall, F1-Score</a:t>
             </a:r>
           </a:p>
@@ -10448,6 +10904,7 @@
               </a:defRPr>
             </a:pPr>
             <a:r>
+              <a:rPr dirty="0"/>
               <a:t>Analysis Pipeline</a:t>
             </a:r>
           </a:p>
@@ -10463,7 +10920,16 @@
               </a:defRPr>
             </a:pPr>
             <a:r>
-              <a:t>Bitcoin Price Data → yfinance API</a:t>
+              <a:rPr dirty="0"/>
+              <a:t>Bitcoin Price Data → </a:t>
+            </a:r>
+            <a:r>
+              <a:rPr dirty="0" err="1"/>
+              <a:t>yfinance</a:t>
+            </a:r>
+            <a:r>
+              <a:rPr dirty="0"/>
+              <a:t> API</a:t>
             </a:r>
           </a:p>
           <a:p>
@@ -10478,7 +10944,20 @@
               </a:defRPr>
             </a:pPr>
             <a:r>
-              <a:t>Sentiment Scoring → -1 (negative) to +1 (positive)</a:t>
+              <a:rPr dirty="0"/>
+              <a:t>Sentiment Scoring → -1 (negative) </a:t>
+            </a:r>
+            <a:r>
+              <a:rPr lang="sr-Cyrl-RS" dirty="0" smtClean="0"/>
+              <a:t>до</a:t>
+            </a:r>
+            <a:r>
+              <a:rPr dirty="0" smtClean="0"/>
+              <a:t> </a:t>
+            </a:r>
+            <a:r>
+              <a:rPr dirty="0"/>
+              <a:t>+1 (positive)</a:t>
             </a:r>
           </a:p>
           <a:p>
@@ -10493,6 +10972,7 @@
               </a:defRPr>
             </a:pPr>
             <a:r>
+              <a:rPr dirty="0"/>
               <a:t>Statistical Analysis → Pearson &amp; Spearman correlation</a:t>
             </a:r>
           </a:p>
@@ -10583,7 +11063,7 @@
         <p:spPr>
           <a:xfrm>
             <a:off x="457200" y="457200"/>
-            <a:ext cx="8229600" cy="914400"/>
+            <a:ext cx="5627503" cy="646331"/>
           </a:xfrm>
           <a:prstGeom prst="rect">
             <a:avLst/>
@@ -10604,8 +11084,10 @@
               </a:defRPr>
             </a:pPr>
             <a:r>
-              <a:t>Model Training Process</a:t>
-            </a:r>
+              <a:rPr lang="sr-Cyrl-RS" dirty="0" smtClean="0"/>
+              <a:t>Процес тренирања модела</a:t>
+            </a:r>
+            <a:endParaRPr dirty="0"/>
           </a:p>
         </p:txBody>
       </p:sp>
@@ -10618,7 +11100,7 @@
         <p:spPr>
           <a:xfrm>
             <a:off x="731520" y="1645920"/>
-            <a:ext cx="7772400" cy="4572000"/>
+            <a:ext cx="7772400" cy="3857466"/>
           </a:xfrm>
           <a:prstGeom prst="rect">
             <a:avLst/>
@@ -10642,6 +11124,7 @@
               </a:defRPr>
             </a:pPr>
             <a:r>
+              <a:rPr dirty="0"/>
               <a:t>Training Setup</a:t>
             </a:r>
           </a:p>
@@ -10657,8 +11140,18 @@
               </a:defRPr>
             </a:pPr>
             <a:r>
-              <a:t>80/20 Train-Test Split (4,000 / 1,000 tweetova)</a:t>
-            </a:r>
+              <a:rPr dirty="0"/>
+              <a:t>80/20 Train-Test Split (4,000 / 1,000 </a:t>
+            </a:r>
+            <a:r>
+              <a:rPr lang="sr-Cyrl-RS" dirty="0" smtClean="0"/>
+              <a:t>твитова</a:t>
+            </a:r>
+            <a:r>
+              <a:rPr dirty="0" smtClean="0"/>
+              <a:t>)</a:t>
+            </a:r>
+            <a:endParaRPr dirty="0"/>
           </a:p>
           <a:p>
             <a:pPr>
@@ -10672,8 +11165,14 @@
               </a:defRPr>
             </a:pPr>
             <a:r>
-              <a:t>5-Fold Cross Validation za sve modele</a:t>
-            </a:r>
+              <a:rPr dirty="0"/>
+              <a:t>5-Fold Cross Validation </a:t>
+            </a:r>
+            <a:r>
+              <a:rPr lang="sr-Cyrl-RS" dirty="0" smtClean="0"/>
+              <a:t>за све моделе</a:t>
+            </a:r>
+            <a:endParaRPr dirty="0"/>
           </a:p>
           <a:p>
             <a:pPr>
@@ -10687,6 +11186,7 @@
               </a:defRPr>
             </a:pPr>
             <a:r>
+              <a:rPr dirty="0"/>
               <a:t>GPU Acceleration: NVIDIA RTX 4060 (8GB VRAM)</a:t>
             </a:r>
           </a:p>
@@ -10702,6 +11202,7 @@
               </a:defRPr>
             </a:pPr>
             <a:r>
+              <a:rPr dirty="0"/>
               <a:t>Batch Size: 16 (BERT), Full dataset (NB, SVM)</a:t>
             </a:r>
           </a:p>
@@ -10717,8 +11218,14 @@
               </a:defRPr>
             </a:pPr>
             <a:r>
-              <a:t>BERT Fine-Tuning Specifics</a:t>
-            </a:r>
+              <a:rPr dirty="0"/>
+              <a:t>BERT Fine-Tuning </a:t>
+            </a:r>
+            <a:r>
+              <a:rPr lang="sr-Cyrl-RS" dirty="0" smtClean="0"/>
+              <a:t>специфичности</a:t>
+            </a:r>
+            <a:endParaRPr dirty="0"/>
           </a:p>
           <a:p>
             <a:pPr>
@@ -10732,7 +11239,16 @@
               </a:defRPr>
             </a:pPr>
             <a:r>
-              <a:t>Pre-trained model: bert-base-uncased</a:t>
+              <a:rPr dirty="0"/>
+              <a:t>Pre-trained model: </a:t>
+            </a:r>
+            <a:r>
+              <a:rPr dirty="0" err="1"/>
+              <a:t>bert</a:t>
+            </a:r>
+            <a:r>
+              <a:rPr dirty="0"/>
+              <a:t>-base-uncased</a:t>
             </a:r>
           </a:p>
           <a:p>
@@ -10747,6 +11263,7 @@
               </a:defRPr>
             </a:pPr>
             <a:r>
+              <a:rPr dirty="0"/>
               <a:t>Learning rate: 2e-5</a:t>
             </a:r>
           </a:p>
@@ -10762,6 +11279,7 @@
               </a:defRPr>
             </a:pPr>
             <a:r>
+              <a:rPr dirty="0"/>
               <a:t>Epochs: 3</a:t>
             </a:r>
           </a:p>
@@ -10777,6 +11295,7 @@
               </a:defRPr>
             </a:pPr>
             <a:r>
+              <a:rPr dirty="0"/>
               <a:t>Max sequence length: 128 tokens</a:t>
             </a:r>
           </a:p>
@@ -10792,8 +11311,14 @@
               </a:defRPr>
             </a:pPr>
             <a:r>
-              <a:t>Optimizer: AdamW</a:t>
-            </a:r>
+              <a:rPr dirty="0"/>
+              <a:t>Optimizer: </a:t>
+            </a:r>
+            <a:r>
+              <a:rPr dirty="0" err="1"/>
+              <a:t>AdamW</a:t>
+            </a:r>
+            <a:endParaRPr dirty="0"/>
           </a:p>
         </p:txBody>
       </p:sp>

--- a/Prezentacija_Diplomski_Boris_Letic_RA_207_2021.pptx
+++ b/Prezentacija_Diplomski_Boris_Letic_RA_207_2021.pptx
@@ -3222,8 +3222,8 @@
         </p:nvSpPr>
         <p:spPr>
           <a:xfrm>
-            <a:off x="4167773" y="1909676"/>
-            <a:ext cx="4572000" cy="2554545"/>
+            <a:off x="3906175" y="1734295"/>
+            <a:ext cx="4833598" cy="2062103"/>
           </a:xfrm>
           <a:prstGeom prst="rect">
             <a:avLst/>
@@ -3357,7 +3357,7 @@
         </p:nvSpPr>
         <p:spPr>
           <a:xfrm flipH="1">
-            <a:off x="3906175" y="4937836"/>
+            <a:off x="3892858" y="4655058"/>
             <a:ext cx="5015884" cy="954107"/>
           </a:xfrm>
           <a:prstGeom prst="rect">
@@ -3430,15 +3430,7 @@
                   <a:srgbClr val="1C453D"/>
                 </a:solidFill>
               </a:rPr>
-              <a:t>RA </a:t>
-            </a:r>
-            <a:r>
-              <a:rPr lang="en-US" sz="1900" b="1" dirty="0" smtClean="0">
-                <a:solidFill>
-                  <a:srgbClr val="1C453D"/>
-                </a:solidFill>
-              </a:rPr>
-              <a:t>207/2021</a:t>
+              <a:t>RA 207/2021</a:t>
             </a:r>
           </a:p>
           <a:p>
@@ -7010,7 +7002,6 @@
               <a:rPr lang="ru-RU" dirty="0"/>
               <a:t>Показано да сентимент реагује на цену, не предвиђа је</a:t>
             </a:r>
-            <a:endParaRPr lang="ru-RU" dirty="0"/>
           </a:p>
         </p:txBody>
       </p:sp>

--- a/Prezentacija_Diplomski_Boris_Letic_RA_207_2021.pptx
+++ b/Prezentacija_Diplomski_Boris_Letic_RA_207_2021.pptx
@@ -319,7 +319,7 @@
           <a:p>
             <a:fld id="{5BCAD085-E8A6-8845-BD4E-CB4CCA059FC4}" type="datetimeFigureOut">
               <a:rPr lang="en-US" smtClean="0"/>
-              <a:t>11/14/2025</a:t>
+              <a:t>11/15/2025</a:t>
             </a:fld>
             <a:endParaRPr lang="en-US"/>
           </a:p>
@@ -489,7 +489,7 @@
           <a:p>
             <a:fld id="{5BCAD085-E8A6-8845-BD4E-CB4CCA059FC4}" type="datetimeFigureOut">
               <a:rPr lang="en-US" smtClean="0"/>
-              <a:t>11/14/2025</a:t>
+              <a:t>11/15/2025</a:t>
             </a:fld>
             <a:endParaRPr lang="en-US"/>
           </a:p>
@@ -669,7 +669,7 @@
           <a:p>
             <a:fld id="{5BCAD085-E8A6-8845-BD4E-CB4CCA059FC4}" type="datetimeFigureOut">
               <a:rPr lang="en-US" smtClean="0"/>
-              <a:t>11/14/2025</a:t>
+              <a:t>11/15/2025</a:t>
             </a:fld>
             <a:endParaRPr lang="en-US"/>
           </a:p>
@@ -839,7 +839,7 @@
           <a:p>
             <a:fld id="{5BCAD085-E8A6-8845-BD4E-CB4CCA059FC4}" type="datetimeFigureOut">
               <a:rPr lang="en-US" smtClean="0"/>
-              <a:t>11/14/2025</a:t>
+              <a:t>11/15/2025</a:t>
             </a:fld>
             <a:endParaRPr lang="en-US"/>
           </a:p>
@@ -1085,7 +1085,7 @@
           <a:p>
             <a:fld id="{5BCAD085-E8A6-8845-BD4E-CB4CCA059FC4}" type="datetimeFigureOut">
               <a:rPr lang="en-US" smtClean="0"/>
-              <a:t>11/14/2025</a:t>
+              <a:t>11/15/2025</a:t>
             </a:fld>
             <a:endParaRPr lang="en-US"/>
           </a:p>
@@ -1373,7 +1373,7 @@
           <a:p>
             <a:fld id="{5BCAD085-E8A6-8845-BD4E-CB4CCA059FC4}" type="datetimeFigureOut">
               <a:rPr lang="en-US" smtClean="0"/>
-              <a:t>11/14/2025</a:t>
+              <a:t>11/15/2025</a:t>
             </a:fld>
             <a:endParaRPr lang="en-US"/>
           </a:p>
@@ -1795,7 +1795,7 @@
           <a:p>
             <a:fld id="{5BCAD085-E8A6-8845-BD4E-CB4CCA059FC4}" type="datetimeFigureOut">
               <a:rPr lang="en-US" smtClean="0"/>
-              <a:t>11/14/2025</a:t>
+              <a:t>11/15/2025</a:t>
             </a:fld>
             <a:endParaRPr lang="en-US"/>
           </a:p>
@@ -1913,7 +1913,7 @@
           <a:p>
             <a:fld id="{5BCAD085-E8A6-8845-BD4E-CB4CCA059FC4}" type="datetimeFigureOut">
               <a:rPr lang="en-US" smtClean="0"/>
-              <a:t>11/14/2025</a:t>
+              <a:t>11/15/2025</a:t>
             </a:fld>
             <a:endParaRPr lang="en-US"/>
           </a:p>
@@ -2008,7 +2008,7 @@
           <a:p>
             <a:fld id="{5BCAD085-E8A6-8845-BD4E-CB4CCA059FC4}" type="datetimeFigureOut">
               <a:rPr lang="en-US" smtClean="0"/>
-              <a:t>11/14/2025</a:t>
+              <a:t>11/15/2025</a:t>
             </a:fld>
             <a:endParaRPr lang="en-US"/>
           </a:p>
@@ -2285,7 +2285,7 @@
           <a:p>
             <a:fld id="{5BCAD085-E8A6-8845-BD4E-CB4CCA059FC4}" type="datetimeFigureOut">
               <a:rPr lang="en-US" smtClean="0"/>
-              <a:t>11/14/2025</a:t>
+              <a:t>11/15/2025</a:t>
             </a:fld>
             <a:endParaRPr lang="en-US"/>
           </a:p>
@@ -2538,7 +2538,7 @@
           <a:p>
             <a:fld id="{5BCAD085-E8A6-8845-BD4E-CB4CCA059FC4}" type="datetimeFigureOut">
               <a:rPr lang="en-US" smtClean="0"/>
-              <a:t>11/14/2025</a:t>
+              <a:t>11/15/2025</a:t>
             </a:fld>
             <a:endParaRPr lang="en-US"/>
           </a:p>
@@ -2751,7 +2751,7 @@
           <a:p>
             <a:fld id="{5BCAD085-E8A6-8845-BD4E-CB4CCA059FC4}" type="datetimeFigureOut">
               <a:rPr lang="en-US" smtClean="0"/>
-              <a:t>11/14/2025</a:t>
+              <a:t>11/15/2025</a:t>
             </a:fld>
             <a:endParaRPr lang="en-US"/>
           </a:p>
@@ -3780,8 +3780,8 @@
         </p:nvSpPr>
         <p:spPr>
           <a:xfrm>
-            <a:off x="3406043" y="1828800"/>
-            <a:ext cx="1234633" cy="338554"/>
+            <a:off x="3591252" y="1828800"/>
+            <a:ext cx="864211" cy="338554"/>
           </a:xfrm>
           <a:prstGeom prst="rect">
             <a:avLst/>
@@ -3807,7 +3807,7 @@
                   <a:srgbClr val="1C453D"/>
                 </a:solidFill>
               </a:rPr>
-              <a:t>Прецизност</a:t>
+              <a:t>Тачност</a:t>
             </a:r>
             <a:endParaRPr dirty="0">
               <a:solidFill>
@@ -4424,8 +4424,8 @@
               </a:defRPr>
             </a:pPr>
             <a:r>
-              <a:rPr dirty="0"/>
-              <a:t>🏆 SVM </a:t>
+              <a:rPr dirty="0" smtClean="0"/>
+              <a:t>SVM </a:t>
             </a:r>
             <a:r>
               <a:rPr lang="sr-Cyrl-RS" dirty="0" smtClean="0"/>
@@ -5755,12 +5755,12 @@
               </a:defRPr>
             </a:pPr>
             <a:r>
-              <a:rPr dirty="0"/>
-              <a:t>💡 </a:t>
+              <a:rPr lang="ru-RU" dirty="0" smtClean="0"/>
+              <a:t>Кључни </a:t>
             </a:r>
             <a:r>
               <a:rPr lang="ru-RU" dirty="0"/>
-              <a:t>Кључни налаз: </a:t>
+              <a:t>налаз: </a:t>
             </a:r>
             <a:r>
               <a:rPr lang="en-US" dirty="0" smtClean="0"/>
@@ -6842,8 +6842,8 @@
               </a:defRPr>
             </a:pPr>
             <a:r>
-              <a:rPr dirty="0"/>
-              <a:t>✅ </a:t>
+              <a:rPr dirty="0" smtClean="0"/>
+              <a:t> </a:t>
             </a:r>
             <a:r>
               <a:rPr lang="sr-Cyrl-RS" dirty="0" smtClean="0"/>
@@ -6867,8 +6867,13 @@
             </a:r>
             <a:r>
               <a:rPr dirty="0"/>
-              <a:t>(Naive Bayes, SVM, BERT)</a:t>
-            </a:r>
+              <a:t>(Naive Bayes, SVM, BERT</a:t>
+            </a:r>
+            <a:r>
+              <a:rPr dirty="0" smtClean="0"/>
+              <a:t>)</a:t>
+            </a:r>
+            <a:endParaRPr lang="sr-Cyrl-RS" dirty="0" smtClean="0"/>
           </a:p>
           <a:p>
             <a:pPr>
@@ -6882,29 +6887,38 @@
               </a:defRPr>
             </a:pPr>
             <a:r>
-              <a:rPr dirty="0"/>
-              <a:t>✅ SVM </a:t>
-            </a:r>
-            <a:r>
-              <a:rPr lang="sr-Cyrl-RS" dirty="0" smtClean="0"/>
-              <a:t>постигао</a:t>
-            </a:r>
-            <a:r>
               <a:rPr dirty="0" smtClean="0"/>
               <a:t> </a:t>
             </a:r>
             <a:r>
-              <a:rPr lang="sr-Cyrl-RS" dirty="0" smtClean="0"/>
-              <a:t>изванредних</a:t>
+              <a:rPr dirty="0"/>
+              <a:t>SVM </a:t>
+            </a:r>
+            <a:r>
+              <a:rPr lang="sr-Cyrl-RS" dirty="0" smtClean="0"/>
+              <a:t>постигао</a:t>
             </a:r>
             <a:r>
               <a:rPr dirty="0" smtClean="0"/>
               <a:t> </a:t>
             </a:r>
             <a:r>
-              <a:rPr dirty="0"/>
-              <a:t>95.24% accuracy</a:t>
-            </a:r>
+              <a:rPr lang="sr-Cyrl-RS" dirty="0" smtClean="0"/>
+              <a:t>изванредну тачност од</a:t>
+            </a:r>
+            <a:r>
+              <a:rPr dirty="0" smtClean="0"/>
+              <a:t> </a:t>
+            </a:r>
+            <a:r>
+              <a:rPr dirty="0"/>
+              <a:t>95.24</a:t>
+            </a:r>
+            <a:r>
+              <a:rPr dirty="0" smtClean="0"/>
+              <a:t>%</a:t>
+            </a:r>
+            <a:endParaRPr dirty="0"/>
           </a:p>
           <a:p>
             <a:pPr>
@@ -6918,8 +6932,12 @@
               </a:defRPr>
             </a:pPr>
             <a:r>
-              <a:rPr dirty="0"/>
-              <a:t>✅ BERT </a:t>
+              <a:rPr dirty="0" smtClean="0"/>
+              <a:t> </a:t>
+            </a:r>
+            <a:r>
+              <a:rPr dirty="0"/>
+              <a:t>BERT </a:t>
             </a:r>
             <a:r>
               <a:rPr lang="sr-Cyrl-RS" dirty="0" smtClean="0"/>
@@ -6958,8 +6976,8 @@
               </a:defRPr>
             </a:pPr>
             <a:r>
-              <a:rPr dirty="0"/>
-              <a:t>✅ </a:t>
+              <a:rPr dirty="0" smtClean="0"/>
+              <a:t> </a:t>
             </a:r>
             <a:r>
               <a:rPr lang="ru-RU" dirty="0"/>
@@ -6995,8 +7013,8 @@
               </a:defRPr>
             </a:pPr>
             <a:r>
-              <a:rPr dirty="0"/>
-              <a:t>✅ </a:t>
+              <a:rPr dirty="0" smtClean="0"/>
+              <a:t> </a:t>
             </a:r>
             <a:r>
               <a:rPr lang="ru-RU" dirty="0"/>
@@ -7119,8 +7137,12 @@
               </a:defRPr>
             </a:pPr>
             <a:r>
-              <a:rPr dirty="0"/>
-              <a:t>🚀 Real-time sentiment tracking dashboard</a:t>
+              <a:rPr dirty="0" smtClean="0"/>
+              <a:t> </a:t>
+            </a:r>
+            <a:r>
+              <a:rPr dirty="0"/>
+              <a:t>Real-time sentiment tracking dashboard</a:t>
             </a:r>
           </a:p>
           <a:p>
@@ -7135,8 +7157,8 @@
               </a:defRPr>
             </a:pPr>
             <a:r>
-              <a:rPr dirty="0"/>
-              <a:t>🔍 </a:t>
+              <a:rPr dirty="0" smtClean="0"/>
+              <a:t> </a:t>
             </a:r>
             <a:r>
               <a:rPr lang="ru-RU" dirty="0"/>
@@ -7176,8 +7198,12 @@
               </a:defRPr>
             </a:pPr>
             <a:r>
-              <a:rPr dirty="0"/>
-              <a:t>🎯 Multimodal </a:t>
+              <a:rPr dirty="0" smtClean="0"/>
+              <a:t> </a:t>
+            </a:r>
+            <a:r>
+              <a:rPr dirty="0"/>
+              <a:t>Multimodal </a:t>
             </a:r>
             <a:r>
               <a:rPr lang="sr-Cyrl-RS" dirty="0" smtClean="0"/>
@@ -7229,8 +7255,8 @@
               </a:defRPr>
             </a:pPr>
             <a:r>
-              <a:rPr dirty="0"/>
-              <a:t>⚡ </a:t>
+              <a:rPr dirty="0" smtClean="0"/>
+              <a:t> </a:t>
             </a:r>
             <a:r>
               <a:rPr lang="sr-Cyrl-RS" dirty="0" smtClean="0"/>
@@ -7286,8 +7312,12 @@
               </a:defRPr>
             </a:pPr>
             <a:r>
-              <a:rPr dirty="0"/>
-              <a:t>🌐 Deploy </a:t>
+              <a:rPr dirty="0" smtClean="0"/>
+              <a:t> </a:t>
+            </a:r>
+            <a:r>
+              <a:rPr dirty="0"/>
+              <a:t>Deploy </a:t>
             </a:r>
             <a:r>
               <a:rPr lang="sr-Cyrl-RS" dirty="0" smtClean="0"/>
@@ -7319,8 +7349,8 @@
               </a:defRPr>
             </a:pPr>
             <a:r>
-              <a:rPr dirty="0"/>
-              <a:t>📊 </a:t>
+              <a:rPr dirty="0" smtClean="0"/>
+              <a:t> </a:t>
             </a:r>
             <a:r>
               <a:rPr lang="sr-Cyrl-RS" dirty="0" smtClean="0"/>
@@ -7352,18 +7382,18 @@
             </a:pPr>
             <a:r>
               <a:rPr dirty="0" smtClean="0"/>
-              <a:t>🔬 </a:t>
+              <a:t> </a:t>
             </a:r>
             <a:r>
               <a:rPr lang="ru-RU" dirty="0"/>
               <a:t>Експерименти са новим </a:t>
             </a:r>
             <a:r>
-              <a:rPr lang="en-US" smtClean="0"/>
+              <a:rPr lang="en-US" dirty="0" smtClean="0"/>
               <a:t>transformer</a:t>
             </a:r>
             <a:r>
-              <a:rPr lang="ru-RU" smtClean="0"/>
+              <a:rPr lang="ru-RU" dirty="0" smtClean="0"/>
               <a:t> </a:t>
             </a:r>
             <a:r>
@@ -8207,8 +8237,8 @@
         </p:nvSpPr>
         <p:spPr>
           <a:xfrm>
-            <a:off x="3443491" y="2103120"/>
-            <a:ext cx="2439899" cy="369332"/>
+            <a:off x="3461925" y="2103120"/>
+            <a:ext cx="2403030" cy="369332"/>
           </a:xfrm>
           <a:prstGeom prst="rect">
             <a:avLst/>
@@ -8242,8 +8272,13 @@
             </a:r>
             <a:r>
               <a:rPr lang="sr-Cyrl-RS" dirty="0"/>
-              <a:t>Модела</a:t>
-            </a:r>
+              <a:t>м</a:t>
+            </a:r>
+            <a:r>
+              <a:rPr lang="sr-Cyrl-RS" dirty="0" smtClean="0"/>
+              <a:t>одела</a:t>
+            </a:r>
+            <a:endParaRPr lang="sr-Cyrl-RS" dirty="0"/>
           </a:p>
         </p:txBody>
       </p:sp>

--- a/Prezentacija_Diplomski_Boris_Letic_RA_207_2021.pptx
+++ b/Prezentacija_Diplomski_Boris_Letic_RA_207_2021.pptx
@@ -176,10 +176,9 @@
           <a:lstStyle/>
           <a:p>
             <a:r>
-              <a:rPr lang="en-US" smtClean="0"/>
+              <a:rPr lang="en-US"/>
               <a:t>Click to edit Master title style</a:t>
             </a:r>
-            <a:endParaRPr lang="en-US"/>
           </a:p>
         </p:txBody>
       </p:sp>
@@ -295,10 +294,9 @@
           </a:lstStyle>
           <a:p>
             <a:r>
-              <a:rPr lang="en-US" smtClean="0"/>
+              <a:rPr lang="en-US"/>
               <a:t>Click to edit Master subtitle style</a:t>
             </a:r>
-            <a:endParaRPr lang="en-US"/>
           </a:p>
         </p:txBody>
       </p:sp>
@@ -319,7 +317,7 @@
           <a:p>
             <a:fld id="{5BCAD085-E8A6-8845-BD4E-CB4CCA059FC4}" type="datetimeFigureOut">
               <a:rPr lang="en-US" smtClean="0"/>
-              <a:t>11/15/2025</a:t>
+              <a:t>11/23/2025</a:t>
             </a:fld>
             <a:endParaRPr lang="en-US"/>
           </a:p>
@@ -413,10 +411,9 @@
           <a:lstStyle/>
           <a:p>
             <a:r>
-              <a:rPr lang="en-US" smtClean="0"/>
+              <a:rPr lang="en-US"/>
               <a:t>Click to edit Master title style</a:t>
             </a:r>
-            <a:endParaRPr lang="en-US"/>
           </a:p>
         </p:txBody>
       </p:sp>
@@ -437,38 +434,37 @@
           <a:p>
             <a:pPr lvl="0"/>
             <a:r>
-              <a:rPr lang="en-US" smtClean="0"/>
+              <a:rPr lang="en-US"/>
               <a:t>Click to edit Master text styles</a:t>
             </a:r>
           </a:p>
           <a:p>
             <a:pPr lvl="1"/>
             <a:r>
-              <a:rPr lang="en-US" smtClean="0"/>
+              <a:rPr lang="en-US"/>
               <a:t>Second level</a:t>
             </a:r>
           </a:p>
           <a:p>
             <a:pPr lvl="2"/>
             <a:r>
-              <a:rPr lang="en-US" smtClean="0"/>
+              <a:rPr lang="en-US"/>
               <a:t>Third level</a:t>
             </a:r>
           </a:p>
           <a:p>
             <a:pPr lvl="3"/>
             <a:r>
-              <a:rPr lang="en-US" smtClean="0"/>
+              <a:rPr lang="en-US"/>
               <a:t>Fourth level</a:t>
             </a:r>
           </a:p>
           <a:p>
             <a:pPr lvl="4"/>
             <a:r>
-              <a:rPr lang="en-US" smtClean="0"/>
+              <a:rPr lang="en-US"/>
               <a:t>Fifth level</a:t>
             </a:r>
-            <a:endParaRPr lang="en-US"/>
           </a:p>
         </p:txBody>
       </p:sp>
@@ -489,7 +485,7 @@
           <a:p>
             <a:fld id="{5BCAD085-E8A6-8845-BD4E-CB4CCA059FC4}" type="datetimeFigureOut">
               <a:rPr lang="en-US" smtClean="0"/>
-              <a:t>11/15/2025</a:t>
+              <a:t>11/23/2025</a:t>
             </a:fld>
             <a:endParaRPr lang="en-US"/>
           </a:p>
@@ -588,10 +584,9 @@
           <a:lstStyle/>
           <a:p>
             <a:r>
-              <a:rPr lang="en-US" smtClean="0"/>
+              <a:rPr lang="en-US"/>
               <a:t>Click to edit Master title style</a:t>
             </a:r>
-            <a:endParaRPr lang="en-US"/>
           </a:p>
         </p:txBody>
       </p:sp>
@@ -617,38 +612,37 @@
           <a:p>
             <a:pPr lvl="0"/>
             <a:r>
-              <a:rPr lang="en-US" smtClean="0"/>
+              <a:rPr lang="en-US"/>
               <a:t>Click to edit Master text styles</a:t>
             </a:r>
           </a:p>
           <a:p>
             <a:pPr lvl="1"/>
             <a:r>
-              <a:rPr lang="en-US" smtClean="0"/>
+              <a:rPr lang="en-US"/>
               <a:t>Second level</a:t>
             </a:r>
           </a:p>
           <a:p>
             <a:pPr lvl="2"/>
             <a:r>
-              <a:rPr lang="en-US" smtClean="0"/>
+              <a:rPr lang="en-US"/>
               <a:t>Third level</a:t>
             </a:r>
           </a:p>
           <a:p>
             <a:pPr lvl="3"/>
             <a:r>
-              <a:rPr lang="en-US" smtClean="0"/>
+              <a:rPr lang="en-US"/>
               <a:t>Fourth level</a:t>
             </a:r>
           </a:p>
           <a:p>
             <a:pPr lvl="4"/>
             <a:r>
-              <a:rPr lang="en-US" smtClean="0"/>
+              <a:rPr lang="en-US"/>
               <a:t>Fifth level</a:t>
             </a:r>
-            <a:endParaRPr lang="en-US"/>
           </a:p>
         </p:txBody>
       </p:sp>
@@ -669,7 +663,7 @@
           <a:p>
             <a:fld id="{5BCAD085-E8A6-8845-BD4E-CB4CCA059FC4}" type="datetimeFigureOut">
               <a:rPr lang="en-US" smtClean="0"/>
-              <a:t>11/15/2025</a:t>
+              <a:t>11/23/2025</a:t>
             </a:fld>
             <a:endParaRPr lang="en-US"/>
           </a:p>
@@ -763,10 +757,9 @@
           <a:lstStyle/>
           <a:p>
             <a:r>
-              <a:rPr lang="en-US" smtClean="0"/>
+              <a:rPr lang="en-US"/>
               <a:t>Click to edit Master title style</a:t>
             </a:r>
-            <a:endParaRPr lang="en-US"/>
           </a:p>
         </p:txBody>
       </p:sp>
@@ -787,38 +780,37 @@
           <a:p>
             <a:pPr lvl="0"/>
             <a:r>
-              <a:rPr lang="en-US" smtClean="0"/>
+              <a:rPr lang="en-US"/>
               <a:t>Click to edit Master text styles</a:t>
             </a:r>
           </a:p>
           <a:p>
             <a:pPr lvl="1"/>
             <a:r>
-              <a:rPr lang="en-US" smtClean="0"/>
+              <a:rPr lang="en-US"/>
               <a:t>Second level</a:t>
             </a:r>
           </a:p>
           <a:p>
             <a:pPr lvl="2"/>
             <a:r>
-              <a:rPr lang="en-US" smtClean="0"/>
+              <a:rPr lang="en-US"/>
               <a:t>Third level</a:t>
             </a:r>
           </a:p>
           <a:p>
             <a:pPr lvl="3"/>
             <a:r>
-              <a:rPr lang="en-US" smtClean="0"/>
+              <a:rPr lang="en-US"/>
               <a:t>Fourth level</a:t>
             </a:r>
           </a:p>
           <a:p>
             <a:pPr lvl="4"/>
             <a:r>
-              <a:rPr lang="en-US" smtClean="0"/>
+              <a:rPr lang="en-US"/>
               <a:t>Fifth level</a:t>
             </a:r>
-            <a:endParaRPr lang="en-US"/>
           </a:p>
         </p:txBody>
       </p:sp>
@@ -839,7 +831,7 @@
           <a:p>
             <a:fld id="{5BCAD085-E8A6-8845-BD4E-CB4CCA059FC4}" type="datetimeFigureOut">
               <a:rPr lang="en-US" smtClean="0"/>
-              <a:t>11/15/2025</a:t>
+              <a:t>11/23/2025</a:t>
             </a:fld>
             <a:endParaRPr lang="en-US"/>
           </a:p>
@@ -942,10 +934,9 @@
           </a:lstStyle>
           <a:p>
             <a:r>
-              <a:rPr lang="en-US" smtClean="0"/>
+              <a:rPr lang="en-US"/>
               <a:t>Click to edit Master title style</a:t>
             </a:r>
-            <a:endParaRPr lang="en-US"/>
           </a:p>
         </p:txBody>
       </p:sp>
@@ -1062,7 +1053,7 @@
           <a:p>
             <a:pPr lvl="0"/>
             <a:r>
-              <a:rPr lang="en-US" smtClean="0"/>
+              <a:rPr lang="en-US"/>
               <a:t>Click to edit Master text styles</a:t>
             </a:r>
           </a:p>
@@ -1085,7 +1076,7 @@
           <a:p>
             <a:fld id="{5BCAD085-E8A6-8845-BD4E-CB4CCA059FC4}" type="datetimeFigureOut">
               <a:rPr lang="en-US" smtClean="0"/>
-              <a:t>11/15/2025</a:t>
+              <a:t>11/23/2025</a:t>
             </a:fld>
             <a:endParaRPr lang="en-US"/>
           </a:p>
@@ -1179,10 +1170,9 @@
           <a:lstStyle/>
           <a:p>
             <a:r>
-              <a:rPr lang="en-US" smtClean="0"/>
+              <a:rPr lang="en-US"/>
               <a:t>Click to edit Master title style</a:t>
             </a:r>
-            <a:endParaRPr lang="en-US"/>
           </a:p>
         </p:txBody>
       </p:sp>
@@ -1236,38 +1226,37 @@
           <a:p>
             <a:pPr lvl="0"/>
             <a:r>
-              <a:rPr lang="en-US" smtClean="0"/>
+              <a:rPr lang="en-US"/>
               <a:t>Click to edit Master text styles</a:t>
             </a:r>
           </a:p>
           <a:p>
             <a:pPr lvl="1"/>
             <a:r>
-              <a:rPr lang="en-US" smtClean="0"/>
+              <a:rPr lang="en-US"/>
               <a:t>Second level</a:t>
             </a:r>
           </a:p>
           <a:p>
             <a:pPr lvl="2"/>
             <a:r>
-              <a:rPr lang="en-US" smtClean="0"/>
+              <a:rPr lang="en-US"/>
               <a:t>Third level</a:t>
             </a:r>
           </a:p>
           <a:p>
             <a:pPr lvl="3"/>
             <a:r>
-              <a:rPr lang="en-US" smtClean="0"/>
+              <a:rPr lang="en-US"/>
               <a:t>Fourth level</a:t>
             </a:r>
           </a:p>
           <a:p>
             <a:pPr lvl="4"/>
             <a:r>
-              <a:rPr lang="en-US" smtClean="0"/>
+              <a:rPr lang="en-US"/>
               <a:t>Fifth level</a:t>
             </a:r>
-            <a:endParaRPr lang="en-US"/>
           </a:p>
         </p:txBody>
       </p:sp>
@@ -1321,38 +1310,37 @@
           <a:p>
             <a:pPr lvl="0"/>
             <a:r>
-              <a:rPr lang="en-US" smtClean="0"/>
+              <a:rPr lang="en-US"/>
               <a:t>Click to edit Master text styles</a:t>
             </a:r>
           </a:p>
           <a:p>
             <a:pPr lvl="1"/>
             <a:r>
-              <a:rPr lang="en-US" smtClean="0"/>
+              <a:rPr lang="en-US"/>
               <a:t>Second level</a:t>
             </a:r>
           </a:p>
           <a:p>
             <a:pPr lvl="2"/>
             <a:r>
-              <a:rPr lang="en-US" smtClean="0"/>
+              <a:rPr lang="en-US"/>
               <a:t>Third level</a:t>
             </a:r>
           </a:p>
           <a:p>
             <a:pPr lvl="3"/>
             <a:r>
-              <a:rPr lang="en-US" smtClean="0"/>
+              <a:rPr lang="en-US"/>
               <a:t>Fourth level</a:t>
             </a:r>
           </a:p>
           <a:p>
             <a:pPr lvl="4"/>
             <a:r>
-              <a:rPr lang="en-US" smtClean="0"/>
+              <a:rPr lang="en-US"/>
               <a:t>Fifth level</a:t>
             </a:r>
-            <a:endParaRPr lang="en-US"/>
           </a:p>
         </p:txBody>
       </p:sp>
@@ -1373,7 +1361,7 @@
           <a:p>
             <a:fld id="{5BCAD085-E8A6-8845-BD4E-CB4CCA059FC4}" type="datetimeFigureOut">
               <a:rPr lang="en-US" smtClean="0"/>
-              <a:t>11/15/2025</a:t>
+              <a:t>11/23/2025</a:t>
             </a:fld>
             <a:endParaRPr lang="en-US"/>
           </a:p>
@@ -1471,10 +1459,9 @@
           </a:lstStyle>
           <a:p>
             <a:r>
-              <a:rPr lang="en-US" smtClean="0"/>
+              <a:rPr lang="en-US"/>
               <a:t>Click to edit Master title style</a:t>
             </a:r>
-            <a:endParaRPr lang="en-US"/>
           </a:p>
         </p:txBody>
       </p:sp>
@@ -1537,7 +1524,7 @@
           <a:p>
             <a:pPr lvl="0"/>
             <a:r>
-              <a:rPr lang="en-US" smtClean="0"/>
+              <a:rPr lang="en-US"/>
               <a:t>Click to edit Master text styles</a:t>
             </a:r>
           </a:p>
@@ -1593,38 +1580,37 @@
           <a:p>
             <a:pPr lvl="0"/>
             <a:r>
-              <a:rPr lang="en-US" smtClean="0"/>
+              <a:rPr lang="en-US"/>
               <a:t>Click to edit Master text styles</a:t>
             </a:r>
           </a:p>
           <a:p>
             <a:pPr lvl="1"/>
             <a:r>
-              <a:rPr lang="en-US" smtClean="0"/>
+              <a:rPr lang="en-US"/>
               <a:t>Second level</a:t>
             </a:r>
           </a:p>
           <a:p>
             <a:pPr lvl="2"/>
             <a:r>
-              <a:rPr lang="en-US" smtClean="0"/>
+              <a:rPr lang="en-US"/>
               <a:t>Third level</a:t>
             </a:r>
           </a:p>
           <a:p>
             <a:pPr lvl="3"/>
             <a:r>
-              <a:rPr lang="en-US" smtClean="0"/>
+              <a:rPr lang="en-US"/>
               <a:t>Fourth level</a:t>
             </a:r>
           </a:p>
           <a:p>
             <a:pPr lvl="4"/>
             <a:r>
-              <a:rPr lang="en-US" smtClean="0"/>
+              <a:rPr lang="en-US"/>
               <a:t>Fifth level</a:t>
             </a:r>
-            <a:endParaRPr lang="en-US"/>
           </a:p>
         </p:txBody>
       </p:sp>
@@ -1687,7 +1673,7 @@
           <a:p>
             <a:pPr lvl="0"/>
             <a:r>
-              <a:rPr lang="en-US" smtClean="0"/>
+              <a:rPr lang="en-US"/>
               <a:t>Click to edit Master text styles</a:t>
             </a:r>
           </a:p>
@@ -1743,38 +1729,37 @@
           <a:p>
             <a:pPr lvl="0"/>
             <a:r>
-              <a:rPr lang="en-US" smtClean="0"/>
+              <a:rPr lang="en-US"/>
               <a:t>Click to edit Master text styles</a:t>
             </a:r>
           </a:p>
           <a:p>
             <a:pPr lvl="1"/>
             <a:r>
-              <a:rPr lang="en-US" smtClean="0"/>
+              <a:rPr lang="en-US"/>
               <a:t>Second level</a:t>
             </a:r>
           </a:p>
           <a:p>
             <a:pPr lvl="2"/>
             <a:r>
-              <a:rPr lang="en-US" smtClean="0"/>
+              <a:rPr lang="en-US"/>
               <a:t>Third level</a:t>
             </a:r>
           </a:p>
           <a:p>
             <a:pPr lvl="3"/>
             <a:r>
-              <a:rPr lang="en-US" smtClean="0"/>
+              <a:rPr lang="en-US"/>
               <a:t>Fourth level</a:t>
             </a:r>
           </a:p>
           <a:p>
             <a:pPr lvl="4"/>
             <a:r>
-              <a:rPr lang="en-US" smtClean="0"/>
+              <a:rPr lang="en-US"/>
               <a:t>Fifth level</a:t>
             </a:r>
-            <a:endParaRPr lang="en-US"/>
           </a:p>
         </p:txBody>
       </p:sp>
@@ -1795,7 +1780,7 @@
           <a:p>
             <a:fld id="{5BCAD085-E8A6-8845-BD4E-CB4CCA059FC4}" type="datetimeFigureOut">
               <a:rPr lang="en-US" smtClean="0"/>
-              <a:t>11/15/2025</a:t>
+              <a:t>11/23/2025</a:t>
             </a:fld>
             <a:endParaRPr lang="en-US"/>
           </a:p>
@@ -1889,10 +1874,9 @@
           <a:lstStyle/>
           <a:p>
             <a:r>
-              <a:rPr lang="en-US" smtClean="0"/>
+              <a:rPr lang="en-US"/>
               <a:t>Click to edit Master title style</a:t>
             </a:r>
-            <a:endParaRPr lang="en-US"/>
           </a:p>
         </p:txBody>
       </p:sp>
@@ -1913,7 +1897,7 @@
           <a:p>
             <a:fld id="{5BCAD085-E8A6-8845-BD4E-CB4CCA059FC4}" type="datetimeFigureOut">
               <a:rPr lang="en-US" smtClean="0"/>
-              <a:t>11/15/2025</a:t>
+              <a:t>11/23/2025</a:t>
             </a:fld>
             <a:endParaRPr lang="en-US"/>
           </a:p>
@@ -2008,7 +1992,7 @@
           <a:p>
             <a:fld id="{5BCAD085-E8A6-8845-BD4E-CB4CCA059FC4}" type="datetimeFigureOut">
               <a:rPr lang="en-US" smtClean="0"/>
-              <a:t>11/15/2025</a:t>
+              <a:t>11/23/2025</a:t>
             </a:fld>
             <a:endParaRPr lang="en-US"/>
           </a:p>
@@ -2111,10 +2095,9 @@
           </a:lstStyle>
           <a:p>
             <a:r>
-              <a:rPr lang="en-US" smtClean="0"/>
+              <a:rPr lang="en-US"/>
               <a:t>Click to edit Master title style</a:t>
             </a:r>
-            <a:endParaRPr lang="en-US"/>
           </a:p>
         </p:txBody>
       </p:sp>
@@ -2168,38 +2151,37 @@
           <a:p>
             <a:pPr lvl="0"/>
             <a:r>
-              <a:rPr lang="en-US" smtClean="0"/>
+              <a:rPr lang="en-US"/>
               <a:t>Click to edit Master text styles</a:t>
             </a:r>
           </a:p>
           <a:p>
             <a:pPr lvl="1"/>
             <a:r>
-              <a:rPr lang="en-US" smtClean="0"/>
+              <a:rPr lang="en-US"/>
               <a:t>Second level</a:t>
             </a:r>
           </a:p>
           <a:p>
             <a:pPr lvl="2"/>
             <a:r>
-              <a:rPr lang="en-US" smtClean="0"/>
+              <a:rPr lang="en-US"/>
               <a:t>Third level</a:t>
             </a:r>
           </a:p>
           <a:p>
             <a:pPr lvl="3"/>
             <a:r>
-              <a:rPr lang="en-US" smtClean="0"/>
+              <a:rPr lang="en-US"/>
               <a:t>Fourth level</a:t>
             </a:r>
           </a:p>
           <a:p>
             <a:pPr lvl="4"/>
             <a:r>
-              <a:rPr lang="en-US" smtClean="0"/>
+              <a:rPr lang="en-US"/>
               <a:t>Fifth level</a:t>
             </a:r>
-            <a:endParaRPr lang="en-US"/>
           </a:p>
         </p:txBody>
       </p:sp>
@@ -2262,7 +2244,7 @@
           <a:p>
             <a:pPr lvl="0"/>
             <a:r>
-              <a:rPr lang="en-US" smtClean="0"/>
+              <a:rPr lang="en-US"/>
               <a:t>Click to edit Master text styles</a:t>
             </a:r>
           </a:p>
@@ -2285,7 +2267,7 @@
           <a:p>
             <a:fld id="{5BCAD085-E8A6-8845-BD4E-CB4CCA059FC4}" type="datetimeFigureOut">
               <a:rPr lang="en-US" smtClean="0"/>
-              <a:t>11/15/2025</a:t>
+              <a:t>11/23/2025</a:t>
             </a:fld>
             <a:endParaRPr lang="en-US"/>
           </a:p>
@@ -2388,10 +2370,9 @@
           </a:lstStyle>
           <a:p>
             <a:r>
-              <a:rPr lang="en-US" smtClean="0"/>
+              <a:rPr lang="en-US"/>
               <a:t>Click to edit Master title style</a:t>
             </a:r>
-            <a:endParaRPr lang="en-US"/>
           </a:p>
         </p:txBody>
       </p:sp>
@@ -2515,7 +2496,7 @@
           <a:p>
             <a:pPr lvl="0"/>
             <a:r>
-              <a:rPr lang="en-US" smtClean="0"/>
+              <a:rPr lang="en-US"/>
               <a:t>Click to edit Master text styles</a:t>
             </a:r>
           </a:p>
@@ -2538,7 +2519,7 @@
           <a:p>
             <a:fld id="{5BCAD085-E8A6-8845-BD4E-CB4CCA059FC4}" type="datetimeFigureOut">
               <a:rPr lang="en-US" smtClean="0"/>
-              <a:t>11/15/2025</a:t>
+              <a:t>11/23/2025</a:t>
             </a:fld>
             <a:endParaRPr lang="en-US"/>
           </a:p>
@@ -2647,10 +2628,9 @@
           <a:lstStyle/>
           <a:p>
             <a:r>
-              <a:rPr lang="en-US" smtClean="0"/>
+              <a:rPr lang="en-US"/>
               <a:t>Click to edit Master title style</a:t>
             </a:r>
-            <a:endParaRPr lang="en-US"/>
           </a:p>
         </p:txBody>
       </p:sp>
@@ -2681,38 +2661,37 @@
           <a:p>
             <a:pPr lvl="0"/>
             <a:r>
-              <a:rPr lang="en-US" smtClean="0"/>
+              <a:rPr lang="en-US"/>
               <a:t>Click to edit Master text styles</a:t>
             </a:r>
           </a:p>
           <a:p>
             <a:pPr lvl="1"/>
             <a:r>
-              <a:rPr lang="en-US" smtClean="0"/>
+              <a:rPr lang="en-US"/>
               <a:t>Second level</a:t>
             </a:r>
           </a:p>
           <a:p>
             <a:pPr lvl="2"/>
             <a:r>
-              <a:rPr lang="en-US" smtClean="0"/>
+              <a:rPr lang="en-US"/>
               <a:t>Third level</a:t>
             </a:r>
           </a:p>
           <a:p>
             <a:pPr lvl="3"/>
             <a:r>
-              <a:rPr lang="en-US" smtClean="0"/>
+              <a:rPr lang="en-US"/>
               <a:t>Fourth level</a:t>
             </a:r>
           </a:p>
           <a:p>
             <a:pPr lvl="4"/>
             <a:r>
-              <a:rPr lang="en-US" smtClean="0"/>
+              <a:rPr lang="en-US"/>
               <a:t>Fifth level</a:t>
             </a:r>
-            <a:endParaRPr lang="en-US"/>
           </a:p>
         </p:txBody>
       </p:sp>
@@ -2751,7 +2730,7 @@
           <a:p>
             <a:fld id="{5BCAD085-E8A6-8845-BD4E-CB4CCA059FC4}" type="datetimeFigureOut">
               <a:rPr lang="en-US" smtClean="0"/>
-              <a:t>11/15/2025</a:t>
+              <a:t>11/23/2025</a:t>
             </a:fld>
             <a:endParaRPr lang="en-US"/>
           </a:p>
@@ -3244,7 +3223,7 @@
               </a:defRPr>
             </a:pPr>
             <a:r>
-              <a:rPr lang="sr-Cyrl-RS" sz="3200" b="1" dirty="0" smtClean="0"/>
+              <a:rPr lang="sr-Cyrl-RS" sz="3200" b="1" dirty="0"/>
               <a:t>Анализа сентимента крипто заједнице на друштвеним мрежама помоћу машинског учења</a:t>
             </a:r>
             <a:endParaRPr dirty="0"/>
@@ -3281,7 +3260,7 @@
               </a:defRPr>
             </a:pPr>
             <a:r>
-              <a:rPr lang="sr-Cyrl-RS" sz="3200" dirty="0" smtClean="0">
+              <a:rPr lang="sr-Cyrl-RS" sz="3200" dirty="0">
                 <a:solidFill>
                   <a:srgbClr val="9DD5C8"/>
                 </a:solidFill>
@@ -3319,14 +3298,14 @@
           <a:lstStyle/>
           <a:p>
             <a:r>
-              <a:rPr lang="sr-Cyrl-RS" sz="1900" b="1" dirty="0" smtClean="0">
+              <a:rPr lang="sr-Cyrl-RS" sz="1900" b="1" dirty="0">
                 <a:solidFill>
                   <a:srgbClr val="1C453D"/>
                 </a:solidFill>
               </a:rPr>
               <a:t>Универзитет у Новом Саду</a:t>
             </a:r>
-            <a:endParaRPr lang="en-US" sz="1900" b="1" dirty="0" smtClean="0">
+            <a:endParaRPr lang="en-US" sz="1900" b="1" dirty="0">
               <a:solidFill>
                 <a:srgbClr val="1C453D"/>
               </a:solidFill>
@@ -3334,7 +3313,7 @@
           </a:p>
           <a:p>
             <a:r>
-              <a:rPr lang="sr-Cyrl-RS" sz="1900" b="1" dirty="0" smtClean="0">
+              <a:rPr lang="sr-Cyrl-RS" sz="1900" b="1" dirty="0">
                 <a:solidFill>
                   <a:srgbClr val="1C453D"/>
                 </a:solidFill>
@@ -3379,14 +3358,14 @@
               </a:defRPr>
             </a:pPr>
             <a:r>
-              <a:rPr lang="sr-Cyrl-RS" sz="1900" b="1" dirty="0" smtClean="0">
+              <a:rPr lang="sr-Cyrl-RS" sz="1900" b="1" dirty="0">
                 <a:solidFill>
                   <a:srgbClr val="1C453D"/>
                 </a:solidFill>
               </a:rPr>
               <a:t>Ментор: др Душан Гајић, ванредни професор</a:t>
             </a:r>
-            <a:endParaRPr lang="en-US" sz="1900" b="1" dirty="0" smtClean="0">
+            <a:endParaRPr lang="en-US" sz="1900" b="1" dirty="0">
               <a:solidFill>
                 <a:srgbClr val="1C453D"/>
               </a:solidFill>
@@ -3401,7 +3380,7 @@
               </a:defRPr>
             </a:pPr>
             <a:r>
-              <a:rPr lang="sr-Cyrl-RS" sz="1900" b="1" dirty="0" smtClean="0">
+              <a:rPr lang="sr-Cyrl-RS" sz="1900" b="1" dirty="0">
                 <a:solidFill>
                   <a:srgbClr val="1C453D"/>
                 </a:solidFill>
@@ -3409,7 +3388,7 @@
               <a:t>Кандидат</a:t>
             </a:r>
             <a:r>
-              <a:rPr lang="en-US" sz="1900" b="1" dirty="0" smtClean="0">
+              <a:rPr lang="en-US" sz="1900" b="1" dirty="0">
                 <a:solidFill>
                   <a:srgbClr val="1C453D"/>
                 </a:solidFill>
@@ -3417,7 +3396,7 @@
               <a:t>: </a:t>
             </a:r>
             <a:r>
-              <a:rPr lang="sr-Cyrl-RS" sz="1900" b="1" dirty="0" smtClean="0">
+              <a:rPr lang="sr-Cyrl-RS" sz="1900" b="1" dirty="0">
                 <a:solidFill>
                   <a:srgbClr val="1C453D"/>
                 </a:solidFill>
@@ -3425,7 +3404,7 @@
               <a:t>Борис Летић </a:t>
             </a:r>
             <a:r>
-              <a:rPr lang="en-US" sz="1900" b="1" dirty="0" smtClean="0">
+              <a:rPr lang="en-US" sz="1900" b="1" dirty="0">
                 <a:solidFill>
                   <a:srgbClr val="1C453D"/>
                 </a:solidFill>
@@ -3443,13 +3422,6 @@
   <p:clrMapOvr>
     <a:masterClrMapping/>
   </p:clrMapOvr>
-  <p:timing>
-    <p:tnLst>
-      <p:par>
-        <p:cTn id="1" dur="indefinite" restart="never" nodeType="tmRoot"/>
-      </p:par>
-    </p:tnLst>
-  </p:timing>
 </p:sld>
 </file>
 
@@ -3720,7 +3692,7 @@
               </a:defRPr>
             </a:pPr>
             <a:r>
-              <a:rPr lang="sr-Cyrl-RS" dirty="0" smtClean="0"/>
+              <a:rPr lang="sr-Cyrl-RS" dirty="0"/>
               <a:t>Резултати – перформансе модела</a:t>
             </a:r>
             <a:endParaRPr dirty="0"/>
@@ -3757,7 +3729,7 @@
               </a:defRPr>
             </a:pPr>
             <a:r>
-              <a:rPr lang="sr-Cyrl-RS" dirty="0" smtClean="0">
+              <a:rPr lang="sr-Cyrl-RS" dirty="0">
                 <a:solidFill>
                   <a:srgbClr val="1C453D"/>
                 </a:solidFill>
@@ -3802,7 +3774,7 @@
               </a:defRPr>
             </a:pPr>
             <a:r>
-              <a:rPr lang="sr-Cyrl-RS" dirty="0" smtClean="0">
+              <a:rPr lang="sr-Cyrl-RS" dirty="0">
                 <a:solidFill>
                   <a:srgbClr val="1C453D"/>
                 </a:solidFill>
@@ -3887,7 +3859,7 @@
               </a:defRPr>
             </a:pPr>
             <a:r>
-              <a:rPr lang="sr-Cyrl-RS" dirty="0" smtClean="0">
+              <a:rPr lang="sr-Cyrl-RS" dirty="0">
                 <a:solidFill>
                   <a:srgbClr val="1C453D"/>
                 </a:solidFill>
@@ -4041,7 +4013,7 @@
               <a:t>~10 </a:t>
             </a:r>
             <a:r>
-              <a:rPr lang="sr-Cyrl-RS" dirty="0" smtClean="0"/>
+              <a:rPr lang="sr-Cyrl-RS" dirty="0"/>
               <a:t>секунди</a:t>
             </a:r>
             <a:endParaRPr dirty="0"/>
@@ -4187,7 +4159,7 @@
               <a:t>~45 </a:t>
             </a:r>
             <a:r>
-              <a:rPr lang="sr-Cyrl-RS" dirty="0" smtClean="0"/>
+              <a:rPr lang="sr-Cyrl-RS" dirty="0"/>
               <a:t>секунди</a:t>
             </a:r>
             <a:endParaRPr dirty="0"/>
@@ -4333,16 +4305,12 @@
               <a:t>~15 </a:t>
             </a:r>
             <a:r>
-              <a:rPr lang="sr-Cyrl-RS" dirty="0" smtClean="0"/>
+              <a:rPr lang="sr-Cyrl-RS" dirty="0"/>
               <a:t>минута</a:t>
             </a:r>
             <a:r>
-              <a:rPr dirty="0" smtClean="0"/>
-              <a:t> </a:t>
-            </a:r>
-            <a:r>
-              <a:rPr dirty="0"/>
-              <a:t>(GPU)</a:t>
+              <a:rPr dirty="0"/>
+              <a:t> (GPU)</a:t>
             </a:r>
           </a:p>
         </p:txBody>
@@ -4424,40 +4392,32 @@
               </a:defRPr>
             </a:pPr>
             <a:r>
-              <a:rPr dirty="0" smtClean="0"/>
+              <a:rPr dirty="0"/>
               <a:t>SVM </a:t>
             </a:r>
             <a:r>
-              <a:rPr lang="sr-Cyrl-RS" dirty="0" smtClean="0"/>
+              <a:rPr lang="sr-Cyrl-RS" dirty="0"/>
               <a:t>постигао најбоље резултате </a:t>
             </a:r>
             <a:r>
-              <a:rPr dirty="0" smtClean="0"/>
-              <a:t>(95.24</a:t>
-            </a:r>
-            <a:r>
-              <a:rPr dirty="0"/>
-              <a:t>%), </a:t>
-            </a:r>
-            <a:r>
-              <a:rPr lang="sr-Cyrl-RS" dirty="0" smtClean="0"/>
+              <a:rPr dirty="0"/>
+              <a:t>(95.24%), </a:t>
+            </a:r>
+            <a:r>
+              <a:rPr lang="sr-Cyrl-RS" dirty="0"/>
               <a:t>док је </a:t>
             </a:r>
             <a:r>
-              <a:rPr dirty="0" smtClean="0"/>
+              <a:rPr dirty="0"/>
               <a:t>BERT </a:t>
             </a:r>
             <a:r>
-              <a:rPr lang="sr-Cyrl-RS" dirty="0" smtClean="0"/>
+              <a:rPr lang="sr-Cyrl-RS" dirty="0"/>
               <a:t>био други са </a:t>
             </a:r>
             <a:r>
-              <a:rPr dirty="0" smtClean="0"/>
-              <a:t>94.84</a:t>
-            </a:r>
-            <a:r>
-              <a:rPr dirty="0"/>
-              <a:t>%.</a:t>
+              <a:rPr dirty="0"/>
+              <a:t>94.84%.</a:t>
             </a:r>
             <a:br>
               <a:rPr dirty="0"/>
@@ -4467,24 +4427,20 @@
               <a:t>Naive Bayes </a:t>
             </a:r>
             <a:r>
-              <a:rPr lang="sr-Cyrl-RS" dirty="0" smtClean="0"/>
+              <a:rPr lang="sr-Cyrl-RS" dirty="0"/>
               <a:t>показао солидне </a:t>
             </a:r>
             <a:r>
-              <a:rPr dirty="0" smtClean="0"/>
+              <a:rPr dirty="0"/>
               <a:t>baseline </a:t>
             </a:r>
             <a:r>
-              <a:rPr lang="sr-Cyrl-RS" dirty="0" smtClean="0"/>
+              <a:rPr lang="sr-Cyrl-RS" dirty="0"/>
               <a:t>перформансе</a:t>
             </a:r>
             <a:r>
-              <a:rPr dirty="0" smtClean="0"/>
-              <a:t> </a:t>
-            </a:r>
-            <a:r>
-              <a:rPr dirty="0"/>
-              <a:t>(90.87%).</a:t>
+              <a:rPr dirty="0"/>
+              <a:t> (90.87%).</a:t>
             </a:r>
           </a:p>
         </p:txBody>
@@ -4494,13 +4450,6 @@
   <p:clrMapOvr>
     <a:masterClrMapping/>
   </p:clrMapOvr>
-  <p:timing>
-    <p:tnLst>
-      <p:par>
-        <p:cTn id="1" dur="indefinite" restart="never" nodeType="tmRoot"/>
-      </p:par>
-    </p:tnLst>
-  </p:timing>
 </p:sld>
 </file>
 
@@ -4595,15 +4544,15 @@
               </a:defRPr>
             </a:pPr>
             <a:r>
-              <a:rPr lang="sr-Cyrl-RS" dirty="0" smtClean="0"/>
+              <a:rPr lang="sr-Cyrl-RS" dirty="0"/>
               <a:t>Корелациона анализа </a:t>
             </a:r>
             <a:r>
-              <a:rPr dirty="0" smtClean="0"/>
+              <a:rPr dirty="0"/>
               <a:t>- </a:t>
             </a:r>
             <a:r>
-              <a:rPr lang="sr-Cyrl-RS" dirty="0" smtClean="0"/>
+              <a:rPr lang="sr-Cyrl-RS" dirty="0"/>
               <a:t>методологија</a:t>
             </a:r>
             <a:endParaRPr dirty="0"/>
@@ -4643,9 +4592,10 @@
               </a:defRPr>
             </a:pPr>
             <a:r>
-              <a:rPr dirty="0"/>
-              <a:t>Sentiment Scoring</a:t>
-            </a:r>
+              <a:rPr lang="sr-Cyrl-RS" dirty="0"/>
+              <a:t>Бодовање сентимента</a:t>
+            </a:r>
+            <a:endParaRPr dirty="0"/>
           </a:p>
           <a:p>
             <a:pPr>
@@ -4659,48 +4609,36 @@
               </a:defRPr>
             </a:pPr>
             <a:r>
-              <a:rPr lang="sr-Cyrl-RS" dirty="0" smtClean="0"/>
+              <a:rPr lang="sr-Cyrl-RS" dirty="0"/>
               <a:t>Сваки твит класификован у 3 класе</a:t>
             </a:r>
             <a:r>
-              <a:rPr dirty="0" smtClean="0"/>
+              <a:rPr dirty="0"/>
               <a:t>: </a:t>
             </a:r>
             <a:r>
-              <a:rPr lang="sr-Cyrl-RS" dirty="0" smtClean="0"/>
+              <a:rPr lang="sr-Cyrl-RS" dirty="0"/>
               <a:t>позитиван</a:t>
             </a:r>
             <a:r>
-              <a:rPr dirty="0" smtClean="0"/>
-              <a:t> </a:t>
-            </a:r>
-            <a:r>
-              <a:rPr dirty="0"/>
-              <a:t>(+1), </a:t>
-            </a:r>
-            <a:r>
-              <a:rPr lang="sr-Cyrl-RS" dirty="0" smtClean="0"/>
+              <a:rPr dirty="0"/>
+              <a:t> (+1), </a:t>
+            </a:r>
+            <a:r>
+              <a:rPr lang="sr-Cyrl-RS" dirty="0"/>
               <a:t>неутралан</a:t>
             </a:r>
             <a:r>
-              <a:rPr dirty="0" smtClean="0"/>
-              <a:t> </a:t>
-            </a:r>
-            <a:r>
-              <a:rPr dirty="0"/>
-              <a:t>(0), </a:t>
-            </a:r>
-            <a:r>
-              <a:rPr lang="sr-Cyrl-RS" dirty="0" smtClean="0"/>
+              <a:rPr dirty="0"/>
+              <a:t> (0), </a:t>
+            </a:r>
+            <a:r>
+              <a:rPr lang="sr-Cyrl-RS" dirty="0"/>
               <a:t>негативан</a:t>
             </a:r>
             <a:r>
-              <a:rPr dirty="0" smtClean="0"/>
-              <a:t> </a:t>
-            </a:r>
-            <a:r>
-              <a:rPr dirty="0"/>
-              <a:t>(-1)</a:t>
+              <a:rPr dirty="0"/>
+              <a:t> (-1)</a:t>
             </a:r>
           </a:p>
           <a:p>
@@ -4715,19 +4653,15 @@
               </a:defRPr>
             </a:pPr>
             <a:r>
-              <a:rPr lang="sr-Cyrl-RS" dirty="0" smtClean="0"/>
-              <a:t>Дневни</a:t>
-            </a:r>
-            <a:r>
-              <a:rPr dirty="0" smtClean="0"/>
-              <a:t> </a:t>
-            </a:r>
-            <a:r>
-              <a:rPr dirty="0"/>
-              <a:t>sentiment score = </a:t>
-            </a:r>
-            <a:r>
-              <a:rPr lang="sr-Cyrl-RS" dirty="0" smtClean="0"/>
+              <a:rPr lang="sr-Cyrl-RS" dirty="0"/>
+              <a:t>Дневно бодовање сентимента </a:t>
+            </a:r>
+            <a:r>
+              <a:rPr dirty="0"/>
+              <a:t>= </a:t>
+            </a:r>
+            <a:r>
+              <a:rPr lang="sr-Cyrl-RS" dirty="0"/>
               <a:t>просек свих твитова тог дана</a:t>
             </a:r>
             <a:endParaRPr dirty="0"/>
@@ -4744,54 +4678,37 @@
               </a:defRPr>
             </a:pPr>
             <a:r>
-              <a:rPr lang="sr-Cyrl-RS" dirty="0" smtClean="0"/>
+              <a:rPr lang="sr-Cyrl-RS" dirty="0"/>
               <a:t>Опсег вредности</a:t>
             </a:r>
             <a:r>
-              <a:rPr dirty="0" smtClean="0"/>
-              <a:t>: </a:t>
-            </a:r>
-            <a:r>
-              <a:rPr dirty="0"/>
-              <a:t>-1.0 </a:t>
-            </a:r>
-            <a:r>
-              <a:rPr dirty="0" smtClean="0"/>
-              <a:t>(</a:t>
-            </a:r>
-            <a:r>
-              <a:rPr lang="sr-Cyrl-RS" dirty="0" smtClean="0"/>
+              <a:rPr dirty="0"/>
+              <a:t>: -1.0 (</a:t>
+            </a:r>
+            <a:r>
+              <a:rPr lang="sr-Cyrl-RS" dirty="0"/>
               <a:t>врло негативан</a:t>
             </a:r>
             <a:r>
-              <a:rPr dirty="0" smtClean="0"/>
+              <a:rPr dirty="0"/>
               <a:t>) </a:t>
             </a:r>
             <a:r>
-              <a:rPr lang="sr-Cyrl-RS" dirty="0" smtClean="0"/>
+              <a:rPr lang="sr-Cyrl-RS" dirty="0"/>
               <a:t>до</a:t>
             </a:r>
             <a:r>
-              <a:rPr dirty="0" smtClean="0"/>
-              <a:t> </a:t>
-            </a:r>
-            <a:r>
-              <a:rPr dirty="0"/>
-              <a:t>+1.0 </a:t>
-            </a:r>
-            <a:r>
-              <a:rPr dirty="0" smtClean="0"/>
-              <a:t>(</a:t>
-            </a:r>
-            <a:r>
-              <a:rPr lang="sr-Cyrl-RS" dirty="0" smtClean="0"/>
+              <a:rPr dirty="0"/>
+              <a:t> +1.0 (</a:t>
+            </a:r>
+            <a:r>
+              <a:rPr lang="sr-Cyrl-RS" dirty="0"/>
               <a:t>врло позитиван</a:t>
             </a:r>
             <a:r>
-              <a:rPr dirty="0" smtClean="0"/>
+              <a:rPr dirty="0"/>
               <a:t>)</a:t>
             </a:r>
-            <a:endParaRPr dirty="0"/>
           </a:p>
           <a:p>
             <a:pPr>
@@ -4805,9 +4722,18 @@
               </a:defRPr>
             </a:pPr>
             <a:r>
-              <a:rPr dirty="0"/>
-              <a:t>Bitcoin Price Data</a:t>
-            </a:r>
+              <a:rPr lang="sr-Cyrl-RS" dirty="0"/>
+              <a:t>Подаци о цени </a:t>
+            </a:r>
+            <a:r>
+              <a:rPr lang="en-US" dirty="0"/>
+              <a:t>Bitcoin-</a:t>
+            </a:r>
+            <a:r>
+              <a:rPr lang="sr-Cyrl-RS" dirty="0"/>
+              <a:t>а</a:t>
+            </a:r>
+            <a:endParaRPr dirty="0"/>
           </a:p>
           <a:p>
             <a:pPr>
@@ -4821,20 +4747,16 @@
               </a:defRPr>
             </a:pPr>
             <a:r>
-              <a:rPr lang="sr-Cyrl-RS" dirty="0" smtClean="0"/>
+              <a:rPr lang="sr-Cyrl-RS" dirty="0"/>
               <a:t>Преузето преко </a:t>
             </a:r>
             <a:r>
-              <a:rPr dirty="0" err="1" smtClean="0"/>
+              <a:rPr dirty="0" err="1"/>
               <a:t>yfinance</a:t>
             </a:r>
             <a:r>
-              <a:rPr dirty="0" smtClean="0"/>
-              <a:t> </a:t>
-            </a:r>
-            <a:r>
-              <a:rPr dirty="0"/>
-              <a:t>API</a:t>
+              <a:rPr dirty="0"/>
+              <a:t> API</a:t>
             </a:r>
           </a:p>
           <a:p>
@@ -4849,46 +4771,37 @@
               </a:defRPr>
             </a:pPr>
             <a:r>
-              <a:rPr lang="sr-Cyrl-RS" dirty="0" smtClean="0"/>
+              <a:rPr lang="sr-Cyrl-RS" dirty="0"/>
               <a:t>Временски период</a:t>
             </a:r>
             <a:r>
-              <a:rPr dirty="0" smtClean="0"/>
+              <a:rPr dirty="0"/>
               <a:t>: </a:t>
             </a:r>
             <a:r>
-              <a:rPr lang="sr-Cyrl-RS" dirty="0" smtClean="0"/>
+              <a:rPr lang="sr-Cyrl-RS" dirty="0"/>
               <a:t>Јануар</a:t>
             </a:r>
             <a:r>
-              <a:rPr dirty="0" smtClean="0"/>
-              <a:t> </a:t>
-            </a:r>
-            <a:r>
-              <a:rPr dirty="0"/>
-              <a:t>- </a:t>
-            </a:r>
-            <a:r>
-              <a:rPr lang="sr-Cyrl-RS" dirty="0" smtClean="0"/>
+              <a:rPr dirty="0"/>
+              <a:t> - </a:t>
+            </a:r>
+            <a:r>
+              <a:rPr lang="sr-Cyrl-RS" dirty="0"/>
               <a:t>Мај</a:t>
             </a:r>
             <a:r>
-              <a:rPr dirty="0" smtClean="0"/>
-              <a:t> </a:t>
-            </a:r>
-            <a:r>
-              <a:rPr dirty="0"/>
-              <a:t>2024 (106 </a:t>
-            </a:r>
-            <a:r>
-              <a:rPr lang="sr-Cyrl-RS" dirty="0" smtClean="0"/>
+              <a:rPr dirty="0"/>
+              <a:t> 2024 (106 </a:t>
+            </a:r>
+            <a:r>
+              <a:rPr lang="sr-Cyrl-RS" dirty="0"/>
               <a:t>дана</a:t>
             </a:r>
             <a:r>
-              <a:rPr dirty="0" smtClean="0"/>
+              <a:rPr dirty="0"/>
               <a:t>)</a:t>
             </a:r>
-            <a:endParaRPr dirty="0"/>
           </a:p>
           <a:p>
             <a:pPr>
@@ -4902,16 +4815,12 @@
               </a:defRPr>
             </a:pPr>
             <a:r>
-              <a:rPr lang="sr-Cyrl-RS" dirty="0" smtClean="0"/>
+              <a:rPr lang="sr-Cyrl-RS" dirty="0"/>
               <a:t>Метрике</a:t>
             </a:r>
             <a:r>
-              <a:rPr dirty="0" smtClean="0"/>
-              <a:t>: </a:t>
-            </a:r>
-            <a:r>
-              <a:rPr dirty="0"/>
-              <a:t>closing price, volume, daily change (%)</a:t>
+              <a:rPr dirty="0"/>
+              <a:t>: closing price, volume, daily change (%)</a:t>
             </a:r>
           </a:p>
           <a:p>
@@ -4926,7 +4835,7 @@
               </a:defRPr>
             </a:pPr>
             <a:r>
-              <a:rPr lang="sr-Cyrl-RS" dirty="0" smtClean="0"/>
+              <a:rPr lang="sr-Cyrl-RS" dirty="0"/>
               <a:t>Статистичка анализа</a:t>
             </a:r>
             <a:endParaRPr dirty="0"/>
@@ -4944,18 +4853,22 @@
             </a:pPr>
             <a:r>
               <a:rPr dirty="0"/>
-              <a:t>Pearson correlation </a:t>
-            </a:r>
-            <a:r>
-              <a:rPr lang="en-US" dirty="0" smtClean="0"/>
+              <a:t>Pearson </a:t>
+            </a:r>
+            <a:r>
+              <a:rPr lang="sr-Cyrl-RS" dirty="0"/>
+              <a:t>корелација</a:t>
+            </a:r>
+            <a:r>
+              <a:rPr lang="en-US" dirty="0"/>
               <a:t>–</a:t>
             </a:r>
             <a:r>
-              <a:rPr dirty="0" smtClean="0"/>
+              <a:rPr dirty="0"/>
               <a:t> </a:t>
             </a:r>
             <a:r>
-              <a:rPr lang="sr-Cyrl-RS" dirty="0" smtClean="0"/>
+              <a:rPr lang="sr-Cyrl-RS" dirty="0"/>
               <a:t>линеарна веза</a:t>
             </a:r>
             <a:endParaRPr dirty="0"/>
@@ -4973,18 +4886,26 @@
             </a:pPr>
             <a:r>
               <a:rPr dirty="0"/>
-              <a:t>Spearman correlation </a:t>
-            </a:r>
-            <a:r>
-              <a:rPr lang="en-US" dirty="0" smtClean="0"/>
+              <a:t>Spearman </a:t>
+            </a:r>
+            <a:r>
+              <a:rPr lang="sr-Cyrl-RS" dirty="0"/>
+              <a:t>корелација</a:t>
+            </a:r>
+            <a:r>
+              <a:rPr dirty="0"/>
+              <a:t> </a:t>
+            </a:r>
+            <a:r>
+              <a:rPr lang="en-US" dirty="0"/>
               <a:t>–</a:t>
             </a:r>
             <a:r>
-              <a:rPr dirty="0" smtClean="0"/>
+              <a:rPr dirty="0"/>
               <a:t> </a:t>
             </a:r>
             <a:r>
-              <a:rPr lang="sr-Cyrl-RS" dirty="0" smtClean="0"/>
+              <a:rPr lang="sr-Cyrl-RS" dirty="0"/>
               <a:t>монотона веза</a:t>
             </a:r>
             <a:endParaRPr dirty="0"/>
@@ -5001,50 +4922,49 @@
               </a:defRPr>
             </a:pPr>
             <a:r>
-              <a:rPr dirty="0"/>
-              <a:t>Lag analysis </a:t>
-            </a:r>
-            <a:r>
-              <a:rPr lang="en-US" dirty="0" smtClean="0"/>
+              <a:rPr lang="sr-Cyrl-RS" dirty="0"/>
+              <a:t>Анализа кашњења (енгл. </a:t>
+            </a:r>
+            <a:r>
+              <a:rPr lang="en-US" dirty="0"/>
+              <a:t>lag analysis</a:t>
+            </a:r>
+            <a:r>
+              <a:rPr lang="sr-Cyrl-RS" dirty="0"/>
+              <a:t>)</a:t>
+            </a:r>
+            <a:r>
+              <a:rPr lang="en-US" dirty="0"/>
               <a:t>–</a:t>
             </a:r>
             <a:r>
-              <a:rPr dirty="0" smtClean="0"/>
+              <a:rPr dirty="0"/>
               <a:t> </a:t>
             </a:r>
             <a:r>
-              <a:rPr lang="sr-Cyrl-RS" dirty="0" smtClean="0"/>
+              <a:rPr lang="sr-Cyrl-RS" dirty="0"/>
               <a:t>провера временског кашњења </a:t>
             </a:r>
             <a:r>
-              <a:rPr dirty="0" smtClean="0"/>
-              <a:t>(-</a:t>
-            </a:r>
-            <a:r>
-              <a:rPr dirty="0"/>
-              <a:t>7 </a:t>
-            </a:r>
-            <a:r>
-              <a:rPr lang="sr-Cyrl-RS" dirty="0" smtClean="0"/>
+              <a:rPr dirty="0"/>
+              <a:t>(-7 </a:t>
+            </a:r>
+            <a:r>
+              <a:rPr lang="sr-Cyrl-RS" dirty="0"/>
               <a:t>до</a:t>
             </a:r>
             <a:r>
-              <a:rPr dirty="0" smtClean="0"/>
-              <a:t> </a:t>
-            </a:r>
-            <a:r>
-              <a:rPr dirty="0"/>
-              <a:t>+7 </a:t>
-            </a:r>
-            <a:r>
-              <a:rPr lang="sr-Cyrl-RS" dirty="0" smtClean="0"/>
+              <a:rPr dirty="0"/>
+              <a:t> +7 </a:t>
+            </a:r>
+            <a:r>
+              <a:rPr lang="sr-Cyrl-RS" dirty="0"/>
               <a:t>дана</a:t>
             </a:r>
             <a:r>
-              <a:rPr dirty="0" smtClean="0"/>
+              <a:rPr dirty="0"/>
               <a:t>)</a:t>
             </a:r>
-            <a:endParaRPr dirty="0"/>
           </a:p>
           <a:p>
             <a:pPr>
@@ -5062,7 +4982,7 @@
               <a:t>P-value &lt; 0.05 </a:t>
             </a:r>
             <a:r>
-              <a:rPr lang="sr-Cyrl-RS" dirty="0" smtClean="0"/>
+              <a:rPr lang="sr-Cyrl-RS" dirty="0"/>
               <a:t>за статистичку значајност</a:t>
             </a:r>
             <a:endParaRPr dirty="0"/>
@@ -5074,13 +4994,6 @@
   <p:clrMapOvr>
     <a:masterClrMapping/>
   </p:clrMapOvr>
-  <p:timing>
-    <p:tnLst>
-      <p:par>
-        <p:cTn id="1" dur="indefinite" restart="never" nodeType="tmRoot"/>
-      </p:par>
-    </p:tnLst>
-  </p:timing>
 </p:sld>
 </file>
 
@@ -5175,7 +5088,7 @@
               </a:defRPr>
             </a:pPr>
             <a:r>
-              <a:rPr lang="sr-Cyrl-RS" dirty="0" smtClean="0"/>
+              <a:rPr lang="sr-Cyrl-RS" dirty="0"/>
               <a:t>Корелациона анализа - резултати</a:t>
             </a:r>
             <a:endParaRPr dirty="0"/>
@@ -5237,7 +5150,7 @@
         <p:spPr>
           <a:xfrm>
             <a:off x="1188720" y="1920240"/>
-            <a:ext cx="2737031" cy="338554"/>
+            <a:ext cx="3414589" cy="338554"/>
           </a:xfrm>
           <a:prstGeom prst="rect">
             <a:avLst/>
@@ -5258,22 +5171,21 @@
               </a:defRPr>
             </a:pPr>
             <a:r>
-              <a:rPr dirty="0"/>
-              <a:t>Sentiment vs Price </a:t>
-            </a:r>
-            <a:r>
-              <a:rPr dirty="0" smtClean="0"/>
+              <a:rPr lang="sr-Cyrl-RS" dirty="0"/>
+              <a:t>Сентимент наспрам цене </a:t>
+            </a:r>
+            <a:r>
+              <a:rPr dirty="0"/>
               <a:t>(</a:t>
             </a:r>
             <a:r>
-              <a:rPr lang="sr-Cyrl-RS" dirty="0" smtClean="0"/>
+              <a:rPr lang="sr-Cyrl-RS" dirty="0"/>
               <a:t>тренутно</a:t>
             </a:r>
             <a:r>
-              <a:rPr dirty="0" smtClean="0"/>
+              <a:rPr dirty="0"/>
               <a:t>)</a:t>
             </a:r>
-            <a:endParaRPr dirty="0"/>
           </a:p>
         </p:txBody>
       </p:sp>
@@ -5347,7 +5259,7 @@
               <a:t>❌ </a:t>
             </a:r>
             <a:r>
-              <a:rPr lang="sr-Cyrl-RS" dirty="0" smtClean="0"/>
+              <a:rPr lang="sr-Cyrl-RS" dirty="0"/>
               <a:t>Није статистички значајно</a:t>
             </a:r>
             <a:endParaRPr dirty="0"/>
@@ -5409,7 +5321,7 @@
         <p:spPr>
           <a:xfrm>
             <a:off x="1188720" y="3108960"/>
-            <a:ext cx="1972335" cy="338554"/>
+            <a:ext cx="2626616" cy="338554"/>
           </a:xfrm>
           <a:prstGeom prst="rect">
             <a:avLst/>
@@ -5430,18 +5342,21 @@
               </a:defRPr>
             </a:pPr>
             <a:r>
-              <a:rPr dirty="0"/>
-              <a:t>Lag Analysis (6 </a:t>
-            </a:r>
-            <a:r>
-              <a:rPr lang="sr-Cyrl-RS" dirty="0" smtClean="0"/>
+              <a:rPr lang="sr-Cyrl-RS" dirty="0"/>
+              <a:t>Анализа кашњења </a:t>
+            </a:r>
+            <a:r>
+              <a:rPr dirty="0"/>
+              <a:t>(6 </a:t>
+            </a:r>
+            <a:r>
+              <a:rPr lang="sr-Cyrl-RS" dirty="0"/>
               <a:t>дана</a:t>
             </a:r>
             <a:r>
-              <a:rPr dirty="0" smtClean="0"/>
+              <a:rPr dirty="0"/>
               <a:t>)</a:t>
             </a:r>
-            <a:endParaRPr dirty="0"/>
           </a:p>
         </p:txBody>
       </p:sp>
@@ -5514,7 +5429,7 @@
               <a:t>✅ </a:t>
             </a:r>
             <a:r>
-              <a:rPr lang="sr-Cyrl-RS" dirty="0" smtClean="0"/>
+              <a:rPr lang="sr-Cyrl-RS" dirty="0"/>
               <a:t>Статистички значајно!</a:t>
             </a:r>
             <a:endParaRPr dirty="0"/>
@@ -5597,7 +5512,7 @@
               </a:defRPr>
             </a:pPr>
             <a:r>
-              <a:rPr lang="sr-Cyrl-RS" dirty="0" smtClean="0"/>
+              <a:rPr lang="sr-Cyrl-RS" dirty="0"/>
               <a:t>Интерпретација</a:t>
             </a:r>
             <a:endParaRPr dirty="0"/>
@@ -5634,7 +5549,7 @@
               </a:defRPr>
             </a:pPr>
             <a:r>
-              <a:rPr lang="sr-Cyrl-RS" dirty="0" smtClean="0"/>
+              <a:rPr lang="sr-Cyrl-RS" dirty="0"/>
               <a:t>Цена води сентимент</a:t>
             </a:r>
             <a:endParaRPr dirty="0"/>
@@ -5671,7 +5586,7 @@
               </a:defRPr>
             </a:pPr>
             <a:r>
-              <a:rPr lang="sr-Cyrl-RS" dirty="0" smtClean="0"/>
+              <a:rPr lang="sr-Cyrl-RS" dirty="0"/>
               <a:t>Сентимент реагује на цену</a:t>
             </a:r>
             <a:endParaRPr dirty="0"/>
@@ -5755,36 +5670,24 @@
               </a:defRPr>
             </a:pPr>
             <a:r>
-              <a:rPr lang="ru-RU" dirty="0" smtClean="0"/>
-              <a:t>Кључни </a:t>
-            </a:r>
-            <a:r>
               <a:rPr lang="ru-RU" dirty="0"/>
-              <a:t>налаз: </a:t>
-            </a:r>
-            <a:r>
-              <a:rPr lang="en-US" dirty="0" smtClean="0"/>
+              <a:t>Кључни налаз: </a:t>
+            </a:r>
+            <a:r>
+              <a:rPr lang="en-US" dirty="0"/>
               <a:t>Twitter</a:t>
             </a:r>
             <a:r>
-              <a:rPr lang="ru-RU" dirty="0" smtClean="0"/>
-              <a:t> </a:t>
-            </a:r>
-            <a:r>
               <a:rPr lang="ru-RU" dirty="0"/>
-              <a:t>сентимент НЕ предвиђа </a:t>
-            </a:r>
-            <a:r>
-              <a:rPr lang="en-US" dirty="0" smtClean="0"/>
+              <a:t> сентимент НЕ предвиђа </a:t>
+            </a:r>
+            <a:r>
+              <a:rPr lang="en-US" dirty="0"/>
               <a:t>Bitcoin</a:t>
             </a:r>
             <a:r>
-              <a:rPr lang="ru-RU" dirty="0" smtClean="0"/>
-              <a:t> </a:t>
-            </a:r>
-            <a:r>
               <a:rPr lang="ru-RU" dirty="0"/>
-              <a:t>цену, већ реагује на њу са кашњењем од ~6 дана. Корисници коментаришу постојеће кретање цене уместо да антиципирају будуће промене.</a:t>
+              <a:t> цену, већ реагује на њу са кашњењем од ~6 дана. Корисници коментаришу постојеће кретање цене уместо да антиципирају будуће промене.</a:t>
             </a:r>
             <a:endParaRPr dirty="0"/>
           </a:p>
@@ -5795,13 +5698,6 @@
   <p:clrMapOvr>
     <a:masterClrMapping/>
   </p:clrMapOvr>
-  <p:timing>
-    <p:tnLst>
-      <p:par>
-        <p:cTn id="1" dur="indefinite" restart="never" nodeType="tmRoot"/>
-      </p:par>
-    </p:tnLst>
-  </p:timing>
 </p:sld>
 </file>
 
@@ -5896,7 +5792,7 @@
               </a:defRPr>
             </a:pPr>
             <a:r>
-              <a:rPr lang="sr-Cyrl-RS" dirty="0" smtClean="0"/>
+              <a:rPr lang="sr-Cyrl-RS" dirty="0"/>
               <a:t>Евалуација и метрике</a:t>
             </a:r>
             <a:endParaRPr dirty="0"/>
@@ -5936,9 +5832,10 @@
               </a:defRPr>
             </a:pPr>
             <a:r>
-              <a:rPr dirty="0"/>
-              <a:t>Classification Metrics</a:t>
-            </a:r>
+              <a:rPr lang="sr-Cyrl-RS" dirty="0"/>
+              <a:t>Метрике класификације</a:t>
+            </a:r>
+            <a:endParaRPr dirty="0"/>
           </a:p>
           <a:p>
             <a:pPr>
@@ -5952,11 +5849,15 @@
               </a:defRPr>
             </a:pPr>
             <a:r>
-              <a:rPr dirty="0"/>
-              <a:t>Accuracy: </a:t>
-            </a:r>
-            <a:r>
-              <a:rPr lang="sr-Cyrl-RS" dirty="0" smtClean="0"/>
+              <a:rPr lang="en-US" dirty="0"/>
+              <a:t>Accuracy</a:t>
+            </a:r>
+            <a:r>
+              <a:rPr dirty="0"/>
+              <a:t>: </a:t>
+            </a:r>
+            <a:r>
+              <a:rPr lang="sr-Cyrl-RS" dirty="0"/>
               <a:t>Укупна тачност класификације</a:t>
             </a:r>
             <a:endParaRPr dirty="0"/>
@@ -5977,7 +5878,7 @@
               <a:t>Precision: </a:t>
             </a:r>
             <a:r>
-              <a:rPr lang="sr-Cyrl-RS" dirty="0" smtClean="0"/>
+              <a:rPr lang="sr-Cyrl-RS" dirty="0"/>
               <a:t>Тачност позитивних предикција</a:t>
             </a:r>
             <a:endParaRPr dirty="0"/>
@@ -5999,11 +5900,7 @@
             </a:r>
             <a:r>
               <a:rPr lang="sr-Cyrl-RS" dirty="0"/>
-              <a:t>Покривеност стварних позитивних </a:t>
-            </a:r>
-            <a:r>
-              <a:rPr lang="sr-Cyrl-RS" dirty="0" smtClean="0"/>
-              <a:t>случајева</a:t>
+              <a:t>Покривеност стварних позитивних случајева</a:t>
             </a:r>
           </a:p>
           <a:p>
@@ -6018,25 +5915,38 @@
               </a:defRPr>
             </a:pPr>
             <a:r>
-              <a:rPr dirty="0" smtClean="0"/>
+              <a:rPr dirty="0"/>
               <a:t>F1-Score: </a:t>
             </a:r>
             <a:r>
-              <a:rPr lang="sr-Cyrl-RS" dirty="0" smtClean="0"/>
+              <a:rPr lang="sr-Cyrl-RS" dirty="0"/>
               <a:t>Хармонијска средина </a:t>
             </a:r>
             <a:r>
-              <a:rPr dirty="0" smtClean="0"/>
-              <a:t>precision </a:t>
-            </a:r>
-            <a:r>
-              <a:rPr lang="sr-Cyrl-RS" dirty="0" err="1"/>
+              <a:rPr dirty="0"/>
+              <a:t>precision</a:t>
+            </a:r>
+            <a:r>
+              <a:rPr lang="sr-Cyrl-RS" dirty="0"/>
+              <a:t>-а</a:t>
+            </a:r>
+            <a:r>
+              <a:rPr dirty="0"/>
+              <a:t> </a:t>
+            </a:r>
+            <a:r>
+              <a:rPr lang="sr-Cyrl-RS" dirty="0"/>
               <a:t>и</a:t>
             </a:r>
             <a:r>
-              <a:rPr dirty="0" smtClean="0"/>
+              <a:rPr dirty="0"/>
               <a:t> recall</a:t>
             </a:r>
+            <a:r>
+              <a:rPr lang="sr-Cyrl-RS" dirty="0"/>
+              <a:t>-а</a:t>
+            </a:r>
+            <a:endParaRPr dirty="0"/>
           </a:p>
           <a:p>
             <a:pPr>
@@ -6050,8 +5960,8 @@
               </a:defRPr>
             </a:pPr>
             <a:r>
-              <a:rPr dirty="0" smtClean="0"/>
-              <a:t>Cross-Validation</a:t>
+              <a:rPr lang="sr-Cyrl-RS" dirty="0"/>
+              <a:t>Унакрсна валидација</a:t>
             </a:r>
             <a:endParaRPr dirty="0"/>
           </a:p>
@@ -6068,7 +5978,15 @@
             </a:pPr>
             <a:r>
               <a:rPr dirty="0"/>
-              <a:t>5-Fold stratified cross-validation</a:t>
+              <a:t>5-</a:t>
+            </a:r>
+            <a:r>
+              <a:rPr lang="en-US" dirty="0"/>
+              <a:t>f</a:t>
+            </a:r>
+            <a:r>
+              <a:rPr dirty="0"/>
+              <a:t>old stratified cross-validation</a:t>
             </a:r>
           </a:p>
           <a:p>
@@ -6115,13 +6033,18 @@
               </a:defRPr>
             </a:pPr>
             <a:r>
-              <a:rPr dirty="0" smtClean="0"/>
-              <a:t>Confusion </a:t>
-            </a:r>
-            <a:r>
-              <a:rPr dirty="0"/>
-              <a:t>Matrix</a:t>
-            </a:r>
+              <a:rPr lang="sr-Cyrl-RS" dirty="0"/>
+              <a:t>Матрица конфузије (енгл. </a:t>
+            </a:r>
+            <a:r>
+              <a:rPr dirty="0"/>
+              <a:t>Confusion Matrix</a:t>
+            </a:r>
+            <a:r>
+              <a:rPr lang="sr-Cyrl-RS" dirty="0"/>
+              <a:t>)</a:t>
+            </a:r>
+            <a:endParaRPr dirty="0"/>
           </a:p>
           <a:p>
             <a:pPr>
@@ -6167,12 +6090,8 @@
               </a:defRPr>
             </a:pPr>
             <a:r>
-              <a:rPr dirty="0" smtClean="0"/>
-              <a:t>BERT</a:t>
-            </a:r>
-            <a:r>
-              <a:rPr dirty="0"/>
-              <a:t>: </a:t>
+              <a:rPr dirty="0"/>
+              <a:t>BERT: </a:t>
             </a:r>
             <a:r>
               <a:rPr lang="sr-Cyrl-RS" dirty="0"/>
@@ -6186,13 +6105,6 @@
   <p:clrMapOvr>
     <a:masterClrMapping/>
   </p:clrMapOvr>
-  <p:timing>
-    <p:tnLst>
-      <p:par>
-        <p:cTn id="1" dur="indefinite" restart="never" nodeType="tmRoot"/>
-      </p:par>
-    </p:tnLst>
-  </p:timing>
 </p:sld>
 </file>
 
@@ -6287,7 +6199,7 @@
               </a:defRPr>
             </a:pPr>
             <a:r>
-              <a:rPr lang="sr-Cyrl-RS" dirty="0" smtClean="0"/>
+              <a:rPr lang="sr-Cyrl-RS" dirty="0"/>
               <a:t>Технички изазови и решења</a:t>
             </a:r>
             <a:endParaRPr dirty="0"/>
@@ -6303,7 +6215,7 @@
         <p:spPr>
           <a:xfrm>
             <a:off x="731520" y="1645920"/>
-            <a:ext cx="7772400" cy="3534301"/>
+            <a:ext cx="7772400" cy="4026743"/>
           </a:xfrm>
           <a:prstGeom prst="rect">
             <a:avLst/>
@@ -6327,7 +6239,7 @@
               </a:defRPr>
             </a:pPr>
             <a:r>
-              <a:rPr lang="sr-Cyrl-RS" dirty="0" smtClean="0"/>
+              <a:rPr lang="sr-Cyrl-RS" dirty="0"/>
               <a:t>Изазови</a:t>
             </a:r>
             <a:endParaRPr dirty="0"/>
@@ -6344,29 +6256,62 @@
               </a:defRPr>
             </a:pPr>
             <a:r>
-              <a:rPr lang="sr-Cyrl-RS" dirty="0" smtClean="0"/>
+              <a:rPr lang="sr-Cyrl-RS" dirty="0"/>
               <a:t>Небалансиран</a:t>
             </a:r>
             <a:r>
-              <a:rPr dirty="0" smtClean="0"/>
+              <a:rPr dirty="0"/>
               <a:t> </a:t>
             </a:r>
             <a:r>
-              <a:rPr dirty="0"/>
-              <a:t>dataset → Data augmentation </a:t>
-            </a:r>
-            <a:r>
-              <a:rPr lang="sr-Cyrl-RS" dirty="0" err="1" smtClean="0"/>
+              <a:rPr lang="sr-Cyrl-RS" dirty="0"/>
+              <a:t>скуп података</a:t>
+            </a:r>
+            <a:r>
+              <a:rPr dirty="0"/>
+              <a:t> → </a:t>
+            </a:r>
+            <a:r>
+              <a:rPr lang="sr-Cyrl-RS" dirty="0"/>
+              <a:t>Аугментација података (енгл. </a:t>
+            </a:r>
+            <a:r>
+              <a:rPr lang="en-US" dirty="0"/>
+              <a:t>d</a:t>
+            </a:r>
+            <a:r>
+              <a:rPr dirty="0"/>
+              <a:t>ata augmentation</a:t>
+            </a:r>
+            <a:r>
+              <a:rPr lang="sr-Cyrl-RS" dirty="0"/>
+              <a:t>)</a:t>
+            </a:r>
+            <a:r>
+              <a:rPr dirty="0"/>
+              <a:t> </a:t>
+            </a:r>
+            <a:r>
+              <a:rPr lang="sr-Cyrl-RS" dirty="0"/>
               <a:t>и</a:t>
             </a:r>
             <a:r>
-              <a:rPr dirty="0" smtClean="0"/>
+              <a:rPr dirty="0"/>
               <a:t> </a:t>
             </a:r>
             <a:r>
+              <a:rPr lang="sr-Cyrl-RS" dirty="0"/>
+              <a:t>пондерисани губитак (енгл. </a:t>
+            </a:r>
+            <a:r>
               <a:rPr dirty="0"/>
               <a:t>weighted loss</a:t>
             </a:r>
+            <a:r>
+              <a:rPr lang="sr-Cyrl-RS" dirty="0"/>
+              <a:t>)</a:t>
+            </a:r>
+            <a:endParaRPr dirty="0"/>
           </a:p>
           <a:p>
             <a:pPr>
@@ -6380,25 +6325,18 @@
               </a:defRPr>
             </a:pPr>
             <a:r>
-              <a:rPr lang="sr-Cyrl-RS" dirty="0" smtClean="0"/>
+              <a:rPr lang="sr-Cyrl-RS" dirty="0"/>
               <a:t>Сленг и нестандардан језик </a:t>
             </a:r>
             <a:r>
-              <a:rPr dirty="0" smtClean="0"/>
+              <a:rPr dirty="0"/>
               <a:t>→ </a:t>
             </a:r>
             <a:r>
-              <a:rPr lang="sr-Cyrl-RS" dirty="0" smtClean="0"/>
-              <a:t>Екстензивни</a:t>
-            </a:r>
-            <a:r>
-              <a:rPr dirty="0" smtClean="0"/>
-              <a:t> </a:t>
-            </a:r>
-            <a:r>
-              <a:rPr dirty="0"/>
-              <a:t>preprocessing</a:t>
-            </a:r>
+              <a:rPr lang="sr-Cyrl-RS" dirty="0"/>
+              <a:t>Екстензивно претпроцесирање</a:t>
+            </a:r>
+            <a:endParaRPr dirty="0"/>
           </a:p>
           <a:p>
             <a:pPr>
@@ -6413,19 +6351,23 @@
             </a:pPr>
             <a:r>
               <a:rPr dirty="0"/>
-              <a:t>BERT GPU memory → Batch size </a:t>
-            </a:r>
-            <a:r>
-              <a:rPr lang="sr-Cyrl-RS" dirty="0" smtClean="0"/>
+              <a:t>BERT GPU </a:t>
+            </a:r>
+            <a:r>
+              <a:rPr lang="sr-Cyrl-RS" dirty="0"/>
+              <a:t>меморија</a:t>
+            </a:r>
+            <a:r>
+              <a:rPr dirty="0"/>
+              <a:t> → Batch size </a:t>
+            </a:r>
+            <a:r>
+              <a:rPr lang="sr-Cyrl-RS" dirty="0"/>
               <a:t>оптимизација</a:t>
             </a:r>
             <a:r>
-              <a:rPr dirty="0" smtClean="0"/>
-              <a:t> </a:t>
-            </a:r>
-            <a:r>
-              <a:rPr dirty="0"/>
-              <a:t>(16)</a:t>
+              <a:rPr dirty="0"/>
+              <a:t> (16)</a:t>
             </a:r>
           </a:p>
           <a:p>
@@ -6440,21 +6382,66 @@
               </a:defRPr>
             </a:pPr>
             <a:r>
-              <a:rPr dirty="0"/>
-              <a:t>Overfitting → Dropout (0.3) </a:t>
-            </a:r>
-            <a:r>
-              <a:rPr lang="sr-Cyrl-RS" dirty="0" err="1" smtClean="0"/>
+              <a:rPr lang="sr-Cyrl-RS" sz="1600" dirty="0"/>
+              <a:t>Преобучавање (енгл. </a:t>
+            </a:r>
+            <a:r>
+              <a:rPr lang="en-US" sz="1600" dirty="0"/>
+              <a:t>o</a:t>
+            </a:r>
+            <a:r>
+              <a:rPr dirty="0"/>
+              <a:t>verfitting</a:t>
+            </a:r>
+            <a:r>
+              <a:rPr lang="sr-Cyrl-RS" dirty="0"/>
+              <a:t>)</a:t>
+            </a:r>
+            <a:r>
+              <a:rPr dirty="0"/>
+              <a:t> → </a:t>
+            </a:r>
+            <a:r>
+              <a:rPr lang="sr-Cyrl-RS" dirty="0"/>
+              <a:t>Испадање (енгл. </a:t>
+            </a:r>
+            <a:r>
+              <a:rPr lang="en-US" dirty="0"/>
+              <a:t>d</a:t>
+            </a:r>
+            <a:r>
+              <a:rPr dirty="0"/>
+              <a:t>ropout</a:t>
+            </a:r>
+            <a:r>
+              <a:rPr lang="sr-Cyrl-RS" dirty="0"/>
+              <a:t>)</a:t>
+            </a:r>
+            <a:r>
+              <a:rPr dirty="0"/>
+              <a:t> (0.3) </a:t>
+            </a:r>
+            <a:r>
+              <a:rPr lang="sr-Cyrl-RS" dirty="0"/>
               <a:t>и</a:t>
             </a:r>
             <a:r>
-              <a:rPr dirty="0" smtClean="0"/>
+              <a:rPr dirty="0"/>
               <a:t> </a:t>
             </a:r>
             <a:r>
+              <a:rPr lang="sr-Cyrl-RS" dirty="0"/>
+              <a:t>превремено заустављање (енгл. </a:t>
+            </a:r>
+            <a:r>
               <a:rPr dirty="0"/>
               <a:t>early stopping</a:t>
             </a:r>
+            <a:r>
+              <a:rPr lang="sr-Cyrl-RS" dirty="0"/>
+              <a:t>)</a:t>
+            </a:r>
+            <a:endParaRPr dirty="0"/>
           </a:p>
           <a:p>
             <a:pPr>
@@ -6468,7 +6455,7 @@
               </a:defRPr>
             </a:pPr>
             <a:r>
-              <a:rPr lang="sr-Cyrl-RS" dirty="0" smtClean="0"/>
+              <a:rPr lang="sr-Cyrl-RS" dirty="0"/>
               <a:t>Оптимизације</a:t>
             </a:r>
             <a:endParaRPr dirty="0"/>
@@ -6486,22 +6473,26 @@
             </a:pPr>
             <a:r>
               <a:rPr dirty="0"/>
-              <a:t>GPU acceleration (RTX 4060) → 10x </a:t>
-            </a:r>
-            <a:r>
-              <a:rPr lang="sr-Cyrl-RS" dirty="0" smtClean="0"/>
+              <a:t>GPU </a:t>
+            </a:r>
+            <a:r>
+              <a:rPr lang="sr-Cyrl-RS" dirty="0"/>
+              <a:t>убрзање</a:t>
+            </a:r>
+            <a:r>
+              <a:rPr dirty="0"/>
+              <a:t> (RTX 4060) → 10x </a:t>
+            </a:r>
+            <a:r>
+              <a:rPr lang="sr-Cyrl-RS" dirty="0"/>
               <a:t>брже</a:t>
             </a:r>
             <a:r>
-              <a:rPr dirty="0" smtClean="0"/>
-              <a:t> </a:t>
-            </a:r>
-            <a:r>
-              <a:rPr dirty="0"/>
-              <a:t>BERT </a:t>
-            </a:r>
-            <a:r>
-              <a:rPr lang="sr-Cyrl-RS" dirty="0" smtClean="0"/>
+              <a:rPr dirty="0"/>
+              <a:t> BERT </a:t>
+            </a:r>
+            <a:r>
+              <a:rPr lang="sr-Cyrl-RS" dirty="0"/>
               <a:t>тренирање</a:t>
             </a:r>
             <a:endParaRPr dirty="0"/>
@@ -6518,12 +6509,12 @@
               </a:defRPr>
             </a:pPr>
             <a:r>
-              <a:rPr dirty="0" err="1"/>
-              <a:t>Hyperparameter</a:t>
-            </a:r>
-            <a:r>
-              <a:rPr dirty="0"/>
-              <a:t> tuning → </a:t>
+              <a:rPr lang="sr-Cyrl-RS" dirty="0"/>
+              <a:t>Подешавање хиперпараметара </a:t>
+            </a:r>
+            <a:r>
+              <a:rPr dirty="0"/>
+              <a:t>→ </a:t>
             </a:r>
             <a:r>
               <a:rPr dirty="0" err="1"/>
@@ -6534,16 +6525,12 @@
               <a:t> </a:t>
             </a:r>
             <a:r>
-              <a:rPr lang="sr-Cyrl-RS" dirty="0" smtClean="0"/>
+              <a:rPr lang="sr-Cyrl-RS" dirty="0"/>
               <a:t>за</a:t>
             </a:r>
             <a:r>
-              <a:rPr dirty="0" smtClean="0"/>
-              <a:t> </a:t>
-            </a:r>
-            <a:r>
-              <a:rPr dirty="0"/>
-              <a:t>SVM</a:t>
+              <a:rPr dirty="0"/>
+              <a:t> SVM</a:t>
             </a:r>
           </a:p>
           <a:p>
@@ -6558,8 +6545,12 @@
               </a:defRPr>
             </a:pPr>
             <a:r>
-              <a:rPr dirty="0"/>
-              <a:t>Learning rate scheduling → </a:t>
+              <a:rPr lang="sr-Cyrl-RS" dirty="0"/>
+              <a:t>Распоред брзине учења </a:t>
+            </a:r>
+            <a:r>
+              <a:rPr dirty="0"/>
+              <a:t>→ </a:t>
             </a:r>
             <a:r>
               <a:rPr dirty="0" err="1"/>
@@ -6570,16 +6561,12 @@
               <a:t> </a:t>
             </a:r>
             <a:r>
-              <a:rPr lang="sr-Cyrl-RS" dirty="0" smtClean="0"/>
+              <a:rPr lang="sr-Cyrl-RS" dirty="0"/>
               <a:t>за</a:t>
             </a:r>
             <a:r>
-              <a:rPr dirty="0" smtClean="0"/>
-              <a:t> </a:t>
-            </a:r>
-            <a:r>
-              <a:rPr dirty="0"/>
-              <a:t>BERT</a:t>
+              <a:rPr dirty="0"/>
+              <a:t> BERT</a:t>
             </a:r>
           </a:p>
           <a:p>
@@ -6594,20 +6581,24 @@
               </a:defRPr>
             </a:pPr>
             <a:r>
-              <a:rPr dirty="0"/>
-              <a:t>Data caching → </a:t>
-            </a:r>
-            <a:r>
-              <a:rPr lang="sr-Cyrl-RS" dirty="0" smtClean="0"/>
+              <a:rPr lang="sr-Cyrl-RS" dirty="0"/>
+              <a:t>Кеширање података</a:t>
+            </a:r>
+            <a:r>
+              <a:rPr dirty="0"/>
+              <a:t> → </a:t>
+            </a:r>
+            <a:r>
+              <a:rPr lang="sr-Cyrl-RS" dirty="0"/>
               <a:t>Убрзање</a:t>
             </a:r>
             <a:r>
-              <a:rPr dirty="0" smtClean="0"/>
-              <a:t> preprocessing-</a:t>
-            </a:r>
-            <a:r>
-              <a:rPr lang="sr-Cyrl-RS" dirty="0" smtClean="0"/>
-              <a:t>а</a:t>
+              <a:rPr dirty="0"/>
+              <a:t> </a:t>
+            </a:r>
+            <a:r>
+              <a:rPr lang="sr-Cyrl-RS" dirty="0"/>
+              <a:t>претпроцесирања</a:t>
             </a:r>
             <a:endParaRPr dirty="0"/>
           </a:p>
@@ -6618,13 +6609,6 @@
   <p:clrMapOvr>
     <a:masterClrMapping/>
   </p:clrMapOvr>
-  <p:timing>
-    <p:tnLst>
-      <p:par>
-        <p:cTn id="1" dur="indefinite" restart="never" nodeType="tmRoot"/>
-      </p:par>
-    </p:tnLst>
-  </p:timing>
 </p:sld>
 </file>
 
@@ -6719,7 +6703,7 @@
               </a:defRPr>
             </a:pPr>
             <a:r>
-              <a:rPr lang="sr-Cyrl-RS" dirty="0" smtClean="0"/>
+              <a:rPr lang="sr-Cyrl-RS" dirty="0"/>
               <a:t>Закључак и будући правци</a:t>
             </a:r>
             <a:endParaRPr dirty="0"/>
@@ -6802,7 +6786,7 @@
               </a:defRPr>
             </a:pPr>
             <a:r>
-              <a:rPr lang="sr-Cyrl-RS" dirty="0" smtClean="0"/>
+              <a:rPr lang="sr-Cyrl-RS" dirty="0"/>
               <a:t>Постигнути резултати</a:t>
             </a:r>
             <a:endParaRPr dirty="0"/>
@@ -6842,38 +6826,26 @@
               </a:defRPr>
             </a:pPr>
             <a:r>
-              <a:rPr dirty="0" smtClean="0"/>
+              <a:rPr dirty="0"/>
               <a:t> </a:t>
             </a:r>
             <a:r>
-              <a:rPr lang="sr-Cyrl-RS" dirty="0" smtClean="0"/>
+              <a:rPr lang="sr-Cyrl-RS" dirty="0"/>
               <a:t>Успешно имплементирана </a:t>
             </a:r>
             <a:r>
-              <a:rPr dirty="0" smtClean="0"/>
-              <a:t>3 </a:t>
-            </a:r>
-            <a:r>
-              <a:rPr dirty="0"/>
-              <a:t>ML </a:t>
-            </a:r>
-            <a:r>
-              <a:rPr lang="sr-Cyrl-RS" dirty="0" smtClean="0"/>
+              <a:rPr dirty="0"/>
+              <a:t>3 ML </a:t>
+            </a:r>
+            <a:r>
+              <a:rPr lang="sr-Cyrl-RS" dirty="0"/>
               <a:t>модела</a:t>
             </a:r>
             <a:r>
-              <a:rPr dirty="0" smtClean="0"/>
-              <a:t> </a:t>
-            </a:r>
-            <a:r>
-              <a:rPr dirty="0"/>
-              <a:t>(Naive Bayes, SVM, BERT</a:t>
-            </a:r>
-            <a:r>
-              <a:rPr dirty="0" smtClean="0"/>
-              <a:t>)</a:t>
-            </a:r>
-            <a:endParaRPr lang="sr-Cyrl-RS" dirty="0" smtClean="0"/>
+              <a:rPr dirty="0"/>
+              <a:t> (Naive Bayes, SVM, BERT)</a:t>
+            </a:r>
+            <a:endParaRPr lang="sr-Cyrl-RS" dirty="0"/>
           </a:p>
           <a:p>
             <a:pPr>
@@ -6887,38 +6859,25 @@
               </a:defRPr>
             </a:pPr>
             <a:r>
-              <a:rPr dirty="0" smtClean="0"/>
+              <a:rPr dirty="0"/>
+              <a:t> SVM </a:t>
+            </a:r>
+            <a:r>
+              <a:rPr lang="sr-Cyrl-RS" dirty="0"/>
+              <a:t>постигао</a:t>
+            </a:r>
+            <a:r>
+              <a:rPr dirty="0"/>
               <a:t> </a:t>
             </a:r>
             <a:r>
-              <a:rPr dirty="0"/>
-              <a:t>SVM </a:t>
-            </a:r>
-            <a:r>
-              <a:rPr lang="sr-Cyrl-RS" dirty="0" smtClean="0"/>
-              <a:t>постигао</a:t>
-            </a:r>
-            <a:r>
-              <a:rPr dirty="0" smtClean="0"/>
-              <a:t> </a:t>
-            </a:r>
-            <a:r>
-              <a:rPr lang="sr-Cyrl-RS" dirty="0" smtClean="0"/>
+              <a:rPr lang="sr-Cyrl-RS" dirty="0"/>
               <a:t>изванредну тачност од</a:t>
             </a:r>
             <a:r>
-              <a:rPr dirty="0" smtClean="0"/>
-              <a:t> </a:t>
-            </a:r>
-            <a:r>
-              <a:rPr dirty="0"/>
-              <a:t>95.24</a:t>
-            </a:r>
-            <a:r>
-              <a:rPr dirty="0" smtClean="0"/>
-              <a:t>%</a:t>
-            </a:r>
-            <a:endParaRPr dirty="0"/>
+              <a:rPr dirty="0"/>
+              <a:t> 95.24%</a:t>
+            </a:r>
           </a:p>
           <a:p>
             <a:pPr>
@@ -6932,36 +6891,32 @@
               </a:defRPr>
             </a:pPr>
             <a:r>
-              <a:rPr dirty="0" smtClean="0"/>
+              <a:rPr dirty="0"/>
+              <a:t> BERT </a:t>
+            </a:r>
+            <a:r>
+              <a:rPr lang="sr-Cyrl-RS" dirty="0"/>
+              <a:t>демонстрирао</a:t>
+            </a:r>
+            <a:r>
+              <a:rPr dirty="0"/>
               <a:t> </a:t>
             </a:r>
             <a:r>
-              <a:rPr dirty="0"/>
-              <a:t>BERT </a:t>
-            </a:r>
-            <a:r>
-              <a:rPr lang="sr-Cyrl-RS" dirty="0" smtClean="0"/>
-              <a:t>демонстрирао</a:t>
-            </a:r>
-            <a:r>
-              <a:rPr dirty="0" smtClean="0"/>
+              <a:rPr lang="sr-Cyrl-RS" dirty="0"/>
+              <a:t>изванредне</a:t>
+            </a:r>
+            <a:r>
+              <a:rPr dirty="0"/>
               <a:t> </a:t>
             </a:r>
             <a:r>
-              <a:rPr dirty="0"/>
-              <a:t>state-of-the-art </a:t>
-            </a:r>
-            <a:r>
-              <a:rPr lang="sr-Cyrl-RS" dirty="0" smtClean="0"/>
+              <a:rPr lang="sr-Cyrl-RS" dirty="0"/>
               <a:t>перформансе</a:t>
             </a:r>
             <a:r>
-              <a:rPr dirty="0" smtClean="0"/>
-              <a:t> </a:t>
-            </a:r>
-            <a:r>
-              <a:rPr dirty="0"/>
-              <a:t>(94.84%)</a:t>
+              <a:rPr dirty="0"/>
+              <a:t> (94.84%)</a:t>
             </a:r>
           </a:p>
           <a:p>
@@ -6976,7 +6931,7 @@
               </a:defRPr>
             </a:pPr>
             <a:r>
-              <a:rPr dirty="0" smtClean="0"/>
+              <a:rPr dirty="0"/>
               <a:t> </a:t>
             </a:r>
             <a:r>
@@ -6984,22 +6939,25 @@
               <a:t>Корелациона анализа открила статистички значајну везу </a:t>
             </a:r>
             <a:r>
-              <a:rPr dirty="0" smtClean="0"/>
+              <a:rPr dirty="0"/>
               <a:t>(</a:t>
             </a:r>
             <a:r>
-              <a:rPr dirty="0"/>
-              <a:t>lag 6 </a:t>
-            </a:r>
-            <a:r>
-              <a:rPr lang="sr-Cyrl-RS" dirty="0" smtClean="0"/>
+              <a:rPr lang="sr-Cyrl-RS" dirty="0"/>
+              <a:t>кашњење</a:t>
+            </a:r>
+            <a:r>
+              <a:rPr dirty="0"/>
+              <a:t> 6 </a:t>
+            </a:r>
+            <a:r>
+              <a:rPr lang="sr-Cyrl-RS" dirty="0"/>
               <a:t>дана</a:t>
             </a:r>
             <a:r>
-              <a:rPr dirty="0" smtClean="0"/>
+              <a:rPr dirty="0"/>
               <a:t>)</a:t>
             </a:r>
-            <a:endParaRPr dirty="0"/>
           </a:p>
           <a:p>
             <a:pPr>
@@ -7013,7 +6971,7 @@
               </a:defRPr>
             </a:pPr>
             <a:r>
-              <a:rPr dirty="0" smtClean="0"/>
+              <a:rPr dirty="0"/>
               <a:t> </a:t>
             </a:r>
             <a:r>
@@ -7097,7 +7055,7 @@
               </a:defRPr>
             </a:pPr>
             <a:r>
-              <a:rPr lang="sr-Cyrl-RS" dirty="0" smtClean="0"/>
+              <a:rPr lang="sr-Cyrl-RS" dirty="0"/>
               <a:t>Будући правци развоја</a:t>
             </a:r>
             <a:endParaRPr dirty="0"/>
@@ -7137,13 +7095,14 @@
               </a:defRPr>
             </a:pPr>
             <a:r>
-              <a:rPr dirty="0" smtClean="0"/>
+              <a:rPr dirty="0"/>
               <a:t> </a:t>
             </a:r>
             <a:r>
-              <a:rPr dirty="0"/>
-              <a:t>Real-time sentiment tracking dashboard</a:t>
-            </a:r>
+              <a:rPr lang="ru-RU" dirty="0"/>
+              <a:t>Контролна табла за праћење сентимента у реалном времену</a:t>
+            </a:r>
+            <a:endParaRPr dirty="0"/>
           </a:p>
           <a:p>
             <a:pPr>
@@ -7157,7 +7116,7 @@
               </a:defRPr>
             </a:pPr>
             <a:r>
-              <a:rPr dirty="0" smtClean="0"/>
+              <a:rPr dirty="0"/>
               <a:t> </a:t>
             </a:r>
             <a:r>
@@ -7165,7 +7124,7 @@
               <a:t>Проширење анализе на више криптовалута </a:t>
             </a:r>
             <a:r>
-              <a:rPr dirty="0" smtClean="0"/>
+              <a:rPr dirty="0"/>
               <a:t>(</a:t>
             </a:r>
             <a:r>
@@ -7177,14 +7136,13 @@
               <a:t>, Solana, </a:t>
             </a:r>
             <a:r>
-              <a:rPr lang="sr-Cyrl-RS" dirty="0" smtClean="0"/>
+              <a:rPr lang="sr-Cyrl-RS" dirty="0"/>
               <a:t>итд</a:t>
             </a:r>
             <a:r>
-              <a:rPr dirty="0" smtClean="0"/>
+              <a:rPr dirty="0"/>
               <a:t>.)</a:t>
             </a:r>
-            <a:endParaRPr dirty="0"/>
           </a:p>
           <a:p>
             <a:pPr>
@@ -7198,50 +7156,37 @@
               </a:defRPr>
             </a:pPr>
             <a:r>
-              <a:rPr dirty="0" smtClean="0"/>
-              <a:t> </a:t>
-            </a:r>
-            <a:r>
-              <a:rPr dirty="0"/>
-              <a:t>Multimodal </a:t>
-            </a:r>
-            <a:r>
-              <a:rPr lang="sr-Cyrl-RS" dirty="0" smtClean="0"/>
-              <a:t>анализа</a:t>
-            </a:r>
-            <a:r>
-              <a:rPr dirty="0" smtClean="0"/>
+              <a:rPr lang="sr-Cyrl-RS" dirty="0"/>
+              <a:t> Мултимодална анализа</a:t>
+            </a:r>
+            <a:r>
+              <a:rPr dirty="0"/>
               <a:t> (</a:t>
             </a:r>
             <a:r>
-              <a:rPr lang="sr-Cyrl-RS" dirty="0" smtClean="0"/>
+              <a:rPr lang="sr-Cyrl-RS" dirty="0"/>
               <a:t>текст</a:t>
             </a:r>
             <a:r>
-              <a:rPr dirty="0" smtClean="0"/>
-              <a:t> </a:t>
-            </a:r>
-            <a:r>
-              <a:rPr dirty="0"/>
-              <a:t>+ </a:t>
-            </a:r>
-            <a:r>
-              <a:rPr lang="sr-Cyrl-RS" dirty="0" smtClean="0"/>
+              <a:rPr dirty="0"/>
+              <a:t> + </a:t>
+            </a:r>
+            <a:r>
+              <a:rPr lang="sr-Cyrl-RS" dirty="0"/>
               <a:t>слике са </a:t>
             </a:r>
             <a:r>
-              <a:rPr dirty="0" smtClean="0"/>
+              <a:rPr dirty="0"/>
               <a:t>Twitter-</a:t>
             </a:r>
             <a:r>
-              <a:rPr lang="sr-Cyrl-RS" dirty="0" smtClean="0"/>
+              <a:rPr lang="sr-Cyrl-RS" dirty="0"/>
               <a:t>а</a:t>
             </a:r>
             <a:r>
-              <a:rPr dirty="0" smtClean="0"/>
+              <a:rPr dirty="0"/>
               <a:t>)</a:t>
             </a:r>
-            <a:endParaRPr dirty="0"/>
           </a:p>
           <a:p>
             <a:pPr>
@@ -7255,32 +7200,24 @@
               </a:defRPr>
             </a:pPr>
             <a:r>
-              <a:rPr dirty="0" smtClean="0"/>
+              <a:rPr dirty="0"/>
               <a:t> </a:t>
             </a:r>
             <a:r>
-              <a:rPr lang="sr-Cyrl-RS" dirty="0" smtClean="0"/>
+              <a:rPr lang="sr-Cyrl-RS" dirty="0"/>
               <a:t>Оптимизација</a:t>
             </a:r>
             <a:r>
-              <a:rPr dirty="0" smtClean="0"/>
-              <a:t> </a:t>
-            </a:r>
-            <a:r>
-              <a:rPr dirty="0"/>
-              <a:t>BERT </a:t>
-            </a:r>
-            <a:r>
-              <a:rPr lang="sr-Cyrl-RS" dirty="0" smtClean="0"/>
+              <a:rPr dirty="0"/>
+              <a:t> BERT </a:t>
+            </a:r>
+            <a:r>
+              <a:rPr lang="sr-Cyrl-RS" dirty="0"/>
               <a:t>модела</a:t>
             </a:r>
             <a:r>
-              <a:rPr dirty="0" smtClean="0"/>
-              <a:t> </a:t>
-            </a:r>
-            <a:r>
-              <a:rPr dirty="0"/>
-              <a:t>(</a:t>
+              <a:rPr dirty="0"/>
+              <a:t> (</a:t>
             </a:r>
             <a:r>
               <a:rPr dirty="0" err="1"/>
@@ -7288,17 +7225,32 @@
             </a:r>
             <a:r>
               <a:rPr dirty="0"/>
-              <a:t>, lightweight </a:t>
-            </a:r>
-            <a:r>
-              <a:rPr lang="sr-Cyrl-RS" dirty="0" smtClean="0"/>
+              <a:t>, </a:t>
+            </a:r>
+            <a:r>
+              <a:rPr lang="sr-Cyrl-RS" dirty="0"/>
+              <a:t>лагане (енгл. </a:t>
+            </a:r>
+            <a:r>
+              <a:rPr dirty="0"/>
+              <a:t>lightweight</a:t>
+            </a:r>
+            <a:r>
+              <a:rPr lang="sr-Cyrl-RS" dirty="0"/>
+              <a:t>)</a:t>
+            </a:r>
+            <a:r>
+              <a:rPr dirty="0"/>
+              <a:t> </a:t>
+            </a:r>
+            <a:r>
+              <a:rPr lang="sr-Cyrl-RS" dirty="0"/>
               <a:t>верзије</a:t>
             </a:r>
             <a:r>
-              <a:rPr dirty="0" smtClean="0"/>
+              <a:rPr dirty="0"/>
               <a:t>)</a:t>
             </a:r>
-            <a:endParaRPr dirty="0"/>
           </a:p>
           <a:p>
             <a:pPr>
@@ -7312,27 +7264,15 @@
               </a:defRPr>
             </a:pPr>
             <a:r>
-              <a:rPr dirty="0" smtClean="0"/>
-              <a:t> </a:t>
-            </a:r>
-            <a:r>
-              <a:rPr dirty="0"/>
-              <a:t>Deploy </a:t>
-            </a:r>
-            <a:r>
-              <a:rPr lang="sr-Cyrl-RS" dirty="0" smtClean="0"/>
-              <a:t>као</a:t>
-            </a:r>
-            <a:r>
-              <a:rPr dirty="0" smtClean="0"/>
-              <a:t> </a:t>
-            </a:r>
-            <a:r>
-              <a:rPr dirty="0"/>
-              <a:t>REST API </a:t>
-            </a:r>
-            <a:r>
-              <a:rPr lang="sr-Cyrl-RS" dirty="0" smtClean="0"/>
+              <a:rPr lang="sr-Cyrl-RS" dirty="0"/>
+              <a:t> Имплементација као</a:t>
+            </a:r>
+            <a:r>
+              <a:rPr dirty="0"/>
+              <a:t> REST API </a:t>
+            </a:r>
+            <a:r>
+              <a:rPr lang="sr-Cyrl-RS" dirty="0"/>
               <a:t>за екстерни приступ</a:t>
             </a:r>
             <a:endParaRPr dirty="0"/>
@@ -7349,24 +7289,12 @@
               </a:defRPr>
             </a:pPr>
             <a:r>
-              <a:rPr dirty="0" smtClean="0"/>
+              <a:rPr dirty="0"/>
               <a:t> </a:t>
             </a:r>
             <a:r>
-              <a:rPr lang="sr-Cyrl-RS" dirty="0" smtClean="0"/>
-              <a:t>Интеграција са </a:t>
-            </a:r>
-            <a:r>
-              <a:rPr dirty="0" smtClean="0"/>
-              <a:t>trading </a:t>
-            </a:r>
-            <a:r>
-              <a:rPr lang="sr-Cyrl-RS" dirty="0"/>
-              <a:t>платформама за аутоматске </a:t>
-            </a:r>
-            <a:r>
-              <a:rPr lang="sr-Cyrl-RS" dirty="0" smtClean="0"/>
-              <a:t>сигнале</a:t>
+              <a:rPr lang="sr-Cyrl-RS" dirty="0"/>
+              <a:t>Интеграција са трејдинг платформама за аутоматске сигнале</a:t>
             </a:r>
           </a:p>
           <a:p>
@@ -7381,41 +7309,36 @@
               </a:defRPr>
             </a:pPr>
             <a:r>
-              <a:rPr dirty="0" smtClean="0"/>
+              <a:rPr dirty="0"/>
               <a:t> </a:t>
             </a:r>
             <a:r>
               <a:rPr lang="ru-RU" dirty="0"/>
-              <a:t>Експерименти са новим </a:t>
-            </a:r>
-            <a:r>
-              <a:rPr lang="en-US" dirty="0" smtClean="0"/>
-              <a:t>transformer</a:t>
-            </a:r>
-            <a:r>
-              <a:rPr lang="ru-RU" dirty="0" smtClean="0"/>
-              <a:t> </a:t>
+              <a:t>Експерименти са новим</a:t>
+            </a:r>
+            <a:r>
+              <a:rPr lang="sr-Cyrl-RS" dirty="0"/>
+              <a:t> трансформер </a:t>
             </a:r>
             <a:r>
               <a:rPr lang="ru-RU" dirty="0"/>
               <a:t>архитектурама </a:t>
             </a:r>
             <a:r>
-              <a:rPr dirty="0" smtClean="0"/>
-              <a:t>(</a:t>
-            </a:r>
-            <a:r>
-              <a:rPr dirty="0"/>
-              <a:t>GPT-4, </a:t>
-            </a:r>
-            <a:r>
-              <a:rPr dirty="0" err="1"/>
-              <a:t>LLaMA</a:t>
-            </a:r>
-            <a:r>
-              <a:rPr dirty="0"/>
+              <a:rPr dirty="0"/>
+              <a:t>(GPT-4, </a:t>
+            </a:r>
+            <a:r>
+              <a:t>L</a:t>
+            </a:r>
+            <a:r>
+              <a:rPr lang="en-US"/>
+              <a:t>lama</a:t>
+            </a:r>
+            <a:r>
               <a:t>)</a:t>
             </a:r>
+            <a:endParaRPr dirty="0"/>
           </a:p>
         </p:txBody>
       </p:sp>
@@ -7424,13 +7347,6 @@
   <p:clrMapOvr>
     <a:masterClrMapping/>
   </p:clrMapOvr>
-  <p:timing>
-    <p:tnLst>
-      <p:par>
-        <p:cTn id="1" dur="indefinite" restart="never" nodeType="tmRoot"/>
-      </p:par>
-    </p:tnLst>
-  </p:timing>
 </p:sld>
 </file>
 
@@ -7525,7 +7441,7 @@
               </a:defRPr>
             </a:pPr>
             <a:r>
-              <a:rPr lang="sr-Cyrl-RS" dirty="0" smtClean="0">
+              <a:rPr lang="sr-Cyrl-RS" dirty="0">
                 <a:solidFill>
                   <a:schemeClr val="accent3">
                     <a:lumMod val="60000"/>
@@ -7576,22 +7492,18 @@
               </a:defRPr>
             </a:pPr>
             <a:r>
-              <a:rPr lang="sr-Cyrl-RS" sz="2000" b="1" dirty="0" smtClean="0"/>
+              <a:rPr lang="sr-Cyrl-RS" sz="2000" b="1" dirty="0"/>
               <a:t>Борис Летић</a:t>
             </a:r>
             <a:r>
-              <a:rPr sz="2000" b="1" dirty="0" smtClean="0"/>
-              <a:t> </a:t>
-            </a:r>
-            <a:r>
               <a:rPr sz="2000" b="1" dirty="0"/>
-              <a:t>| RA 207/2021</a:t>
+              <a:t> | RA 207/2021</a:t>
             </a:r>
             <a:br>
               <a:rPr sz="2000" b="1" dirty="0"/>
             </a:br>
             <a:r>
-              <a:rPr lang="sr-Cyrl-RS" sz="2000" b="1" dirty="0" smtClean="0"/>
+              <a:rPr lang="sr-Cyrl-RS" sz="2000" b="1" dirty="0"/>
               <a:t>Факултет техничких наука, Нови Сад</a:t>
             </a:r>
             <a:endParaRPr sz="2000" b="1" dirty="0"/>
@@ -7621,7 +7533,7 @@
           <a:lstStyle/>
           <a:p>
             <a:r>
-              <a:rPr lang="sr-Cyrl-RS" sz="4000" b="1" dirty="0" smtClean="0">
+              <a:rPr lang="sr-Cyrl-RS" sz="4000" b="1" dirty="0">
                 <a:solidFill>
                   <a:schemeClr val="accent3">
                     <a:lumMod val="60000"/>
@@ -7647,13 +7559,6 @@
   <p:clrMapOvr>
     <a:masterClrMapping/>
   </p:clrMapOvr>
-  <p:timing>
-    <p:tnLst>
-      <p:par>
-        <p:cTn id="1" dur="indefinite" restart="never" nodeType="tmRoot"/>
-      </p:par>
-    </p:tnLst>
-  </p:timing>
 </p:sld>
 </file>
 
@@ -7752,7 +7657,7 @@
               </a:defRPr>
             </a:pPr>
             <a:r>
-              <a:rPr lang="sr-Cyrl-RS" dirty="0" smtClean="0"/>
+              <a:rPr lang="sr-Cyrl-RS" dirty="0"/>
               <a:t>Проблем и мотивација</a:t>
             </a:r>
             <a:endParaRPr dirty="0"/>
@@ -7792,7 +7697,7 @@
               </a:defRPr>
             </a:pPr>
             <a:r>
-              <a:rPr lang="sr-Cyrl-RS" dirty="0" smtClean="0"/>
+              <a:rPr lang="sr-Cyrl-RS" dirty="0"/>
               <a:t>Традиционални приступ анализи јавног мишљења</a:t>
             </a:r>
             <a:endParaRPr dirty="0"/>
@@ -7809,19 +7714,19 @@
               </a:defRPr>
             </a:pPr>
             <a:r>
-              <a:rPr lang="sr-Cyrl-RS" dirty="0" smtClean="0"/>
+              <a:rPr lang="sr-Cyrl-RS" dirty="0"/>
               <a:t>Ручна анализа хиљада твитова </a:t>
             </a:r>
             <a:r>
-              <a:rPr lang="en-US" dirty="0" smtClean="0"/>
+              <a:rPr lang="en-US" dirty="0"/>
               <a:t>–</a:t>
             </a:r>
             <a:r>
-              <a:rPr dirty="0" smtClean="0"/>
+              <a:rPr dirty="0"/>
               <a:t> </a:t>
             </a:r>
             <a:r>
-              <a:rPr lang="sr-Cyrl-RS" dirty="0" smtClean="0"/>
+              <a:rPr lang="sr-Cyrl-RS" dirty="0"/>
               <a:t>немогућа у реалном времену</a:t>
             </a:r>
             <a:endParaRPr dirty="0"/>
@@ -7838,7 +7743,7 @@
               </a:defRPr>
             </a:pPr>
             <a:r>
-              <a:rPr lang="sr-Cyrl-RS" dirty="0" smtClean="0"/>
+              <a:rPr lang="sr-Cyrl-RS" dirty="0"/>
               <a:t>Субјективност људске интерпретације</a:t>
             </a:r>
             <a:endParaRPr dirty="0"/>
@@ -7855,7 +7760,7 @@
               </a:defRPr>
             </a:pPr>
             <a:r>
-              <a:rPr lang="sr-Cyrl-RS" dirty="0" smtClean="0"/>
+              <a:rPr lang="sr-Cyrl-RS" dirty="0"/>
               <a:t>Високи трошкови и време потребно за анализу</a:t>
             </a:r>
             <a:endParaRPr dirty="0"/>
@@ -7872,7 +7777,7 @@
               </a:defRPr>
             </a:pPr>
             <a:r>
-              <a:rPr lang="sr-Cyrl-RS" dirty="0" smtClean="0"/>
+              <a:rPr lang="sr-Cyrl-RS" dirty="0"/>
               <a:t>Недостатак скалабилности</a:t>
             </a:r>
             <a:endParaRPr dirty="0"/>
@@ -7889,7 +7794,7 @@
               </a:defRPr>
             </a:pPr>
             <a:r>
-              <a:rPr lang="sr-Cyrl-RS" dirty="0" smtClean="0"/>
+              <a:rPr lang="sr-Cyrl-RS" dirty="0"/>
               <a:t>Последице</a:t>
             </a:r>
             <a:endParaRPr dirty="0"/>
@@ -7906,14 +7811,13 @@
               </a:defRPr>
             </a:pPr>
             <a:r>
-              <a:rPr lang="sr-Cyrl-RS" dirty="0" smtClean="0"/>
+              <a:rPr lang="sr-Cyrl-RS" dirty="0"/>
               <a:t>Инвеститори и аналитичари не могу ефикасно пратити сентимент крипто заједнице</a:t>
             </a:r>
             <a:r>
-              <a:rPr dirty="0" smtClean="0"/>
+              <a:rPr dirty="0"/>
               <a:t>.</a:t>
             </a:r>
-            <a:endParaRPr dirty="0"/>
           </a:p>
           <a:p>
             <a:pPr>
@@ -7927,14 +7831,13 @@
               </a:defRPr>
             </a:pPr>
             <a:r>
-              <a:rPr lang="sr-Cyrl-RS" dirty="0" smtClean="0"/>
+              <a:rPr lang="sr-Cyrl-RS" dirty="0"/>
               <a:t>Пропуштене инвестиционе прилике због недостатка брзих увида</a:t>
             </a:r>
             <a:r>
-              <a:rPr dirty="0" smtClean="0"/>
+              <a:rPr dirty="0"/>
               <a:t>.</a:t>
             </a:r>
-            <a:endParaRPr dirty="0"/>
           </a:p>
         </p:txBody>
       </p:sp>
@@ -7943,13 +7846,6 @@
   <p:clrMapOvr>
     <a:masterClrMapping/>
   </p:clrMapOvr>
-  <p:timing>
-    <p:tnLst>
-      <p:par>
-        <p:cTn id="1" dur="indefinite" restart="never" nodeType="tmRoot"/>
-      </p:par>
-    </p:tnLst>
-  </p:timing>
 </p:sld>
 </file>
 
@@ -8044,7 +7940,7 @@
               </a:defRPr>
             </a:pPr>
             <a:r>
-              <a:rPr lang="sr-Cyrl-RS" dirty="0" smtClean="0"/>
+              <a:rPr lang="sr-Cyrl-RS" dirty="0"/>
               <a:t>Циљ рада</a:t>
             </a:r>
             <a:endParaRPr dirty="0"/>
@@ -8127,7 +8023,7 @@
               </a:defRPr>
             </a:pPr>
             <a:r>
-              <a:rPr lang="sr-Cyrl-RS" dirty="0" smtClean="0"/>
+              <a:rPr lang="sr-Cyrl-RS" dirty="0"/>
               <a:t>Аутоматска класификација</a:t>
             </a:r>
             <a:endParaRPr dirty="0"/>
@@ -8168,16 +8064,12 @@
               <a:t>Развој система за аутоматску класификацију </a:t>
             </a:r>
             <a:r>
-              <a:rPr lang="en-US" dirty="0" smtClean="0"/>
+              <a:rPr lang="en-US" dirty="0"/>
               <a:t>Twitter</a:t>
             </a:r>
             <a:r>
-              <a:rPr lang="ru-RU" dirty="0" smtClean="0"/>
-              <a:t> </a:t>
-            </a:r>
-            <a:r>
               <a:rPr lang="ru-RU" dirty="0"/>
-              <a:t>сентимента у три категорије: позитиван, негативан и неутралан.</a:t>
+              <a:t> сентимента у три категорије: позитиван, негативан и неутралан.</a:t>
             </a:r>
             <a:endParaRPr dirty="0"/>
           </a:p>
@@ -8263,22 +8155,13 @@
               <a:t>Поређење </a:t>
             </a:r>
             <a:r>
-              <a:rPr lang="en-US" dirty="0" smtClean="0"/>
+              <a:rPr lang="en-US" dirty="0"/>
               <a:t>ML</a:t>
             </a:r>
             <a:r>
-              <a:rPr lang="sr-Cyrl-RS" dirty="0" smtClean="0"/>
-              <a:t> </a:t>
-            </a:r>
-            <a:r>
-              <a:rPr lang="sr-Cyrl-RS" dirty="0"/>
-              <a:t>м</a:t>
-            </a:r>
-            <a:r>
-              <a:rPr lang="sr-Cyrl-RS" dirty="0" smtClean="0"/>
-              <a:t>одела</a:t>
-            </a:r>
-            <a:endParaRPr lang="sr-Cyrl-RS" dirty="0"/>
+              <a:rPr lang="sr-Cyrl-RS" dirty="0"/>
+              <a:t> модела</a:t>
+            </a:r>
           </a:p>
         </p:txBody>
       </p:sp>
@@ -8316,36 +8199,28 @@
               <a:t>Имплементација и евалуација три различита приступа: </a:t>
             </a:r>
             <a:r>
-              <a:rPr lang="en-US" dirty="0" smtClean="0"/>
+              <a:rPr lang="en-US" dirty="0"/>
               <a:t>Naive Bayes</a:t>
             </a:r>
             <a:r>
-              <a:rPr lang="ru-RU" dirty="0" smtClean="0"/>
+              <a:rPr lang="ru-RU" dirty="0"/>
               <a:t>, </a:t>
             </a:r>
             <a:r>
-              <a:rPr lang="en-US" dirty="0" smtClean="0"/>
+              <a:rPr lang="en-US" dirty="0"/>
               <a:t>SVM</a:t>
             </a:r>
             <a:r>
-              <a:rPr lang="ru-RU" dirty="0" smtClean="0"/>
-              <a:t> </a:t>
-            </a:r>
-            <a:r>
               <a:rPr lang="ru-RU" dirty="0"/>
-              <a:t>и </a:t>
-            </a:r>
-            <a:r>
-              <a:rPr lang="en-US" dirty="0" smtClean="0"/>
+              <a:t> и </a:t>
+            </a:r>
+            <a:r>
+              <a:rPr lang="en-US" dirty="0"/>
               <a:t>BERT</a:t>
             </a:r>
             <a:r>
-              <a:rPr lang="ru-RU" dirty="0" smtClean="0"/>
-              <a:t> </a:t>
-            </a:r>
-            <a:r>
               <a:rPr lang="ru-RU" dirty="0"/>
-              <a:t>трансформер модел.</a:t>
+              <a:t> трансформер модел.</a:t>
             </a:r>
             <a:endParaRPr dirty="0"/>
           </a:p>
@@ -8427,7 +8302,7 @@
               </a:defRPr>
             </a:pPr>
             <a:r>
-              <a:rPr lang="sr-Cyrl-RS" dirty="0" smtClean="0"/>
+              <a:rPr lang="sr-Cyrl-RS" dirty="0"/>
               <a:t>Корелациона анализа</a:t>
             </a:r>
             <a:endParaRPr dirty="0"/>
@@ -8468,28 +8343,20 @@
               <a:t>Анализа статистичке повезаности између </a:t>
             </a:r>
             <a:r>
-              <a:rPr lang="en-US" dirty="0" smtClean="0"/>
+              <a:rPr lang="en-US" dirty="0"/>
               <a:t>Twitter</a:t>
             </a:r>
             <a:r>
-              <a:rPr lang="ru-RU" dirty="0" smtClean="0"/>
-              <a:t> </a:t>
-            </a:r>
-            <a:r>
               <a:rPr lang="ru-RU" dirty="0"/>
-              <a:t>сентимента и цене </a:t>
-            </a:r>
-            <a:r>
-              <a:rPr lang="en-US" dirty="0" smtClean="0"/>
+              <a:t> сентимента и цене </a:t>
+            </a:r>
+            <a:r>
+              <a:rPr lang="en-US" dirty="0"/>
               <a:t>Bitcoin</a:t>
             </a:r>
             <a:r>
-              <a:rPr lang="ru-RU" dirty="0" smtClean="0"/>
-              <a:t>-а</a:t>
-            </a:r>
-            <a:r>
               <a:rPr lang="ru-RU" dirty="0"/>
-              <a:t>.</a:t>
+              <a:t>-а.</a:t>
             </a:r>
             <a:endParaRPr dirty="0"/>
           </a:p>
@@ -8500,13 +8367,6 @@
   <p:clrMapOvr>
     <a:masterClrMapping/>
   </p:clrMapOvr>
-  <p:timing>
-    <p:tnLst>
-      <p:par>
-        <p:cTn id="1" dur="indefinite" restart="never" nodeType="tmRoot"/>
-      </p:par>
-    </p:tnLst>
-  </p:timing>
 </p:sld>
 </file>
 
@@ -8601,7 +8461,7 @@
               </a:defRPr>
             </a:pPr>
             <a:r>
-              <a:rPr lang="sr-Cyrl-RS" dirty="0" smtClean="0"/>
+              <a:rPr lang="sr-Cyrl-RS" dirty="0"/>
               <a:t>Анализа сентимента - основе</a:t>
             </a:r>
             <a:endParaRPr dirty="0"/>
@@ -8641,7 +8501,7 @@
               </a:defRPr>
             </a:pPr>
             <a:r>
-              <a:rPr lang="sr-Cyrl-RS" dirty="0" smtClean="0"/>
+              <a:rPr lang="sr-Cyrl-RS" dirty="0"/>
               <a:t>Дефиниција</a:t>
             </a:r>
             <a:endParaRPr dirty="0"/>
@@ -8675,28 +8535,17 @@
             </a:pPr>
             <a:r>
               <a:rPr lang="ru-RU" dirty="0"/>
-              <a:t>Грана </a:t>
-            </a:r>
-            <a:r>
-              <a:rPr lang="en-US" dirty="0" smtClean="0"/>
-              <a:t>Natural Language Processing </a:t>
-            </a:r>
-            <a:r>
-              <a:rPr lang="ru-RU" dirty="0" smtClean="0"/>
-              <a:t>(</a:t>
-            </a:r>
-            <a:r>
-              <a:rPr lang="en-US" dirty="0" smtClean="0"/>
-              <a:t>NLP</a:t>
-            </a:r>
-            <a:r>
-              <a:rPr lang="ru-RU" dirty="0" smtClean="0"/>
-              <a:t>) </a:t>
-            </a:r>
-            <a:r>
-              <a:rPr lang="ru-RU" dirty="0"/>
-              <a:t>технологије</a:t>
-            </a:r>
+              <a:t>Грана обраде природног језика (енгл. </a:t>
+            </a:r>
+            <a:r>
+              <a:rPr lang="en-US" dirty="0"/>
+              <a:t>Natural Language Processing</a:t>
+            </a:r>
+            <a:r>
+              <a:rPr lang="sr-Cyrl-RS" dirty="0"/>
+              <a:t>)</a:t>
+            </a:r>
+            <a:endParaRPr lang="ru-RU" dirty="0"/>
           </a:p>
           <a:p>
             <a:pPr>
@@ -8726,7 +8575,7 @@
               </a:defRPr>
             </a:pPr>
             <a:r>
-              <a:rPr lang="sr-Cyrl-RS" dirty="0" smtClean="0"/>
+              <a:rPr lang="sr-Cyrl-RS" dirty="0"/>
               <a:t>Примена у финансијама</a:t>
             </a:r>
             <a:endParaRPr dirty="0"/>
@@ -8775,17 +8624,22 @@
               </a:defRPr>
             </a:pPr>
             <a:r>
-              <a:rPr lang="en-US" dirty="0" smtClean="0"/>
-              <a:t>Real-Time</a:t>
-            </a:r>
-            <a:r>
-              <a:rPr lang="ru-RU" dirty="0" smtClean="0"/>
-              <a:t> </a:t>
+              <a:rPr lang="sr-Cyrl-RS" dirty="0"/>
+              <a:t>П</a:t>
+            </a:r>
+            <a:r>
+              <a:rPr lang="ru-RU"/>
+              <a:t>раћење </a:t>
             </a:r>
             <a:r>
               <a:rPr lang="ru-RU" dirty="0"/>
-              <a:t>праћење перцепције бренда и производа</a:t>
-            </a:r>
+              <a:t>перцепције бренда </a:t>
+            </a:r>
+            <a:r>
+              <a:rPr lang="ru-RU"/>
+              <a:t>и производа у реалном времену</a:t>
+            </a:r>
+            <a:endParaRPr lang="ru-RU" dirty="0"/>
           </a:p>
         </p:txBody>
       </p:sp>
@@ -8794,13 +8648,6 @@
   <p:clrMapOvr>
     <a:masterClrMapping/>
   </p:clrMapOvr>
-  <p:timing>
-    <p:tnLst>
-      <p:par>
-        <p:cTn id="1" dur="indefinite" restart="never" nodeType="tmRoot"/>
-      </p:par>
-    </p:tnLst>
-  </p:timing>
 </p:sld>
 </file>
 
@@ -8895,7 +8742,7 @@
               </a:defRPr>
             </a:pPr>
             <a:r>
-              <a:rPr lang="sr-Cyrl-RS" dirty="0" smtClean="0"/>
+              <a:rPr lang="sr-Cyrl-RS" dirty="0"/>
               <a:t>Модели машинског учења</a:t>
             </a:r>
             <a:endParaRPr dirty="0"/>
@@ -8992,7 +8839,7 @@
         <p:spPr>
           <a:xfrm>
             <a:off x="640080" y="2743200"/>
-            <a:ext cx="2194560" cy="1123384"/>
+            <a:ext cx="2194560" cy="1323439"/>
           </a:xfrm>
           <a:prstGeom prst="rect">
             <a:avLst/>
@@ -9020,7 +8867,7 @@
               <a:t>• </a:t>
             </a:r>
             <a:r>
-              <a:rPr lang="sr-Cyrl-RS" dirty="0" smtClean="0"/>
+              <a:rPr lang="sr-Cyrl-RS" dirty="0"/>
               <a:t>Пробабилистички приступ</a:t>
             </a:r>
             <a:endParaRPr dirty="0"/>
@@ -9041,7 +8888,7 @@
               <a:t>• TF-IDF </a:t>
             </a:r>
             <a:r>
-              <a:rPr lang="sr-Cyrl-RS" dirty="0" smtClean="0"/>
+              <a:rPr lang="sr-Cyrl-RS" dirty="0"/>
               <a:t>векторизација</a:t>
             </a:r>
             <a:endParaRPr dirty="0"/>
@@ -9062,22 +8909,21 @@
               <a:t>• </a:t>
             </a:r>
             <a:r>
-              <a:rPr lang="sr-Cyrl-RS" dirty="0" smtClean="0"/>
+              <a:rPr lang="sr-Cyrl-RS" dirty="0"/>
               <a:t>Брзо тренирање </a:t>
             </a:r>
             <a:r>
-              <a:rPr dirty="0" smtClean="0"/>
+              <a:rPr dirty="0"/>
               <a:t>(~10</a:t>
             </a:r>
             <a:r>
-              <a:rPr lang="sr-Cyrl-RS" dirty="0" smtClean="0"/>
+              <a:rPr lang="sr-Cyrl-RS" dirty="0"/>
               <a:t>с</a:t>
             </a:r>
             <a:r>
-              <a:rPr dirty="0" smtClean="0"/>
+              <a:rPr dirty="0"/>
               <a:t>)</a:t>
             </a:r>
-            <a:endParaRPr dirty="0"/>
           </a:p>
           <a:p>
             <a:pPr>
@@ -9095,12 +8941,16 @@
               <a:t>• </a:t>
             </a:r>
             <a:r>
-              <a:rPr lang="sr-Cyrl-RS" dirty="0" smtClean="0"/>
+              <a:rPr lang="sr-Cyrl-RS" dirty="0"/>
               <a:t>Добро за </a:t>
             </a:r>
             <a:r>
-              <a:rPr dirty="0" smtClean="0"/>
+              <a:rPr dirty="0"/>
               <a:t>baseline</a:t>
+            </a:r>
+            <a:r>
+              <a:rPr lang="sr-Cyrl-RS" dirty="0"/>
+              <a:t> перформансе</a:t>
             </a:r>
             <a:endParaRPr dirty="0"/>
           </a:p>
@@ -9196,7 +9046,7 @@
         <p:spPr>
           <a:xfrm>
             <a:off x="3566160" y="2743200"/>
-            <a:ext cx="2194560" cy="1123384"/>
+            <a:ext cx="2194560" cy="1323439"/>
           </a:xfrm>
           <a:prstGeom prst="rect">
             <a:avLst/>
@@ -9221,8 +9071,13 @@
             </a:pPr>
             <a:r>
               <a:rPr dirty="0"/>
-              <a:t>• Support Vector Machine</a:t>
-            </a:r>
+              <a:t>• </a:t>
+            </a:r>
+            <a:r>
+              <a:rPr lang="sr-Cyrl-RS" dirty="0"/>
+              <a:t>Метод потпорних вектора</a:t>
+            </a:r>
+            <a:endParaRPr dirty="0"/>
           </a:p>
           <a:p>
             <a:pPr>
@@ -9237,10 +9092,18 @@
             </a:pPr>
             <a:r>
               <a:rPr dirty="0"/>
-              <a:t>• RBF kernel </a:t>
-            </a:r>
-            <a:r>
-              <a:rPr lang="sr-Cyrl-RS" dirty="0" smtClean="0"/>
+              <a:t>• RBF </a:t>
+            </a:r>
+            <a:r>
+              <a:rPr lang="sr-Cyrl-RS" dirty="0"/>
+              <a:t>кернел</a:t>
+            </a:r>
+            <a:r>
+              <a:rPr dirty="0"/>
+              <a:t> </a:t>
+            </a:r>
+            <a:r>
+              <a:rPr lang="sr-Cyrl-RS" dirty="0"/>
               <a:t>функција</a:t>
             </a:r>
             <a:endParaRPr dirty="0"/>
@@ -9261,13 +9124,10 @@
               <a:t>• </a:t>
             </a:r>
             <a:r>
-              <a:rPr dirty="0" err="1"/>
-              <a:t>Hyperparameter</a:t>
-            </a:r>
-            <a:r>
-              <a:rPr dirty="0"/>
-              <a:t> tuning</a:t>
-            </a:r>
+              <a:rPr lang="sr-Cyrl-RS" dirty="0"/>
+              <a:t>Подешавање хиперпараметара</a:t>
+            </a:r>
+            <a:endParaRPr dirty="0"/>
           </a:p>
           <a:p>
             <a:pPr>
@@ -9285,7 +9145,7 @@
               <a:t>• </a:t>
             </a:r>
             <a:r>
-              <a:rPr lang="sr-Cyrl-RS" dirty="0" smtClean="0"/>
+              <a:rPr lang="sr-Cyrl-RS" dirty="0"/>
               <a:t>Висока прецизност</a:t>
             </a:r>
             <a:endParaRPr dirty="0"/>
@@ -9407,10 +9267,18 @@
             </a:pPr>
             <a:r>
               <a:rPr dirty="0"/>
-              <a:t>• Transformer </a:t>
-            </a:r>
-            <a:r>
-              <a:rPr lang="sr-Cyrl-RS" dirty="0" smtClean="0"/>
+              <a:t>• </a:t>
+            </a:r>
+            <a:r>
+              <a:rPr lang="sr-Cyrl-RS" dirty="0"/>
+              <a:t>Трансформер</a:t>
+            </a:r>
+            <a:r>
+              <a:rPr dirty="0"/>
+              <a:t> </a:t>
+            </a:r>
+            <a:r>
+              <a:rPr lang="sr-Cyrl-RS" dirty="0"/>
               <a:t>архитектура</a:t>
             </a:r>
             <a:endParaRPr dirty="0"/>
@@ -9428,10 +9296,18 @@
             </a:pPr>
             <a:r>
               <a:rPr dirty="0"/>
-              <a:t>• Pre-trained </a:t>
-            </a:r>
-            <a:r>
-              <a:rPr lang="sr-Cyrl-RS" dirty="0" smtClean="0"/>
+              <a:t>• </a:t>
+            </a:r>
+            <a:r>
+              <a:rPr lang="sr-Cyrl-RS" dirty="0"/>
+              <a:t>Предобучен</a:t>
+            </a:r>
+            <a:r>
+              <a:rPr dirty="0"/>
+              <a:t> </a:t>
+            </a:r>
+            <a:r>
+              <a:rPr lang="sr-Cyrl-RS" dirty="0"/>
               <a:t>модел</a:t>
             </a:r>
             <a:endParaRPr dirty="0"/>
@@ -9449,10 +9325,18 @@
             </a:pPr>
             <a:r>
               <a:rPr dirty="0"/>
-              <a:t>• Fine-tuning </a:t>
-            </a:r>
-            <a:r>
-              <a:rPr lang="sr-Cyrl-RS" dirty="0" smtClean="0"/>
+              <a:t>• </a:t>
+            </a:r>
+            <a:r>
+              <a:rPr lang="sr-Cyrl-RS" dirty="0"/>
+              <a:t>Фино подешен</a:t>
+            </a:r>
+            <a:r>
+              <a:rPr dirty="0"/>
+              <a:t> </a:t>
+            </a:r>
+            <a:r>
+              <a:rPr lang="sr-Cyrl-RS" dirty="0"/>
               <a:t>приступ</a:t>
             </a:r>
             <a:endParaRPr dirty="0"/>
@@ -9470,10 +9354,18 @@
             </a:pPr>
             <a:r>
               <a:rPr dirty="0"/>
-              <a:t>• State-of-the-art </a:t>
-            </a:r>
-            <a:r>
-              <a:rPr lang="sr-Cyrl-RS" dirty="0" smtClean="0"/>
+              <a:t>• </a:t>
+            </a:r>
+            <a:r>
+              <a:rPr lang="sr-Cyrl-RS" dirty="0"/>
+              <a:t>Изванредни</a:t>
+            </a:r>
+            <a:r>
+              <a:rPr dirty="0"/>
+              <a:t> </a:t>
+            </a:r>
+            <a:r>
+              <a:rPr lang="sr-Cyrl-RS" dirty="0"/>
               <a:t>резултати</a:t>
             </a:r>
             <a:endParaRPr dirty="0"/>
@@ -9485,13 +9377,6 @@
   <p:clrMapOvr>
     <a:masterClrMapping/>
   </p:clrMapOvr>
-  <p:timing>
-    <p:tnLst>
-      <p:par>
-        <p:cTn id="1" dur="indefinite" restart="never" nodeType="tmRoot"/>
-      </p:par>
-    </p:tnLst>
-  </p:timing>
 </p:sld>
 </file>
 
@@ -9565,7 +9450,7 @@
         <p:spPr>
           <a:xfrm>
             <a:off x="457200" y="457200"/>
-            <a:ext cx="4789773" cy="646331"/>
+            <a:ext cx="7189917" cy="646331"/>
           </a:xfrm>
           <a:prstGeom prst="rect">
             <a:avLst/>
@@ -9588,21 +9473,26 @@
               </a:defRPr>
             </a:pPr>
             <a:r>
-              <a:rPr dirty="0"/>
-              <a:t>Dataset </a:t>
-            </a:r>
-            <a:r>
-              <a:rPr lang="sr-Cyrl-RS" dirty="0" smtClean="0"/>
+              <a:rPr lang="sr-Cyrl-RS" dirty="0"/>
+              <a:t>Скуп података</a:t>
+            </a:r>
+            <a:r>
+              <a:rPr dirty="0"/>
+              <a:t> </a:t>
+            </a:r>
+            <a:r>
+              <a:rPr lang="sr-Cyrl-RS" dirty="0"/>
               <a:t>и</a:t>
             </a:r>
             <a:r>
-              <a:rPr dirty="0" smtClean="0"/>
+              <a:rPr dirty="0"/>
               <a:t> </a:t>
             </a:r>
             <a:r>
-              <a:rPr dirty="0"/>
-              <a:t>Preprocessing</a:t>
-            </a:r>
+              <a:rPr lang="sr-Cyrl-RS" dirty="0"/>
+              <a:t>претпроцесирање</a:t>
+            </a:r>
+            <a:endParaRPr dirty="0"/>
           </a:p>
         </p:txBody>
       </p:sp>
@@ -9640,8 +9530,13 @@
             </a:pPr>
             <a:r>
               <a:rPr dirty="0"/>
-              <a:t>Bitcoin Twitter Dataset</a:t>
-            </a:r>
+              <a:t>Bitcoin Twitter </a:t>
+            </a:r>
+            <a:r>
+              <a:rPr lang="sr-Cyrl-RS" dirty="0"/>
+              <a:t>скуп података</a:t>
+            </a:r>
+            <a:endParaRPr dirty="0"/>
           </a:p>
           <a:p>
             <a:pPr>
@@ -9659,15 +9554,15 @@
               <a:t>5,000 </a:t>
             </a:r>
             <a:r>
-              <a:rPr lang="sr-Cyrl-RS" dirty="0" smtClean="0"/>
+              <a:rPr lang="sr-Cyrl-RS" dirty="0"/>
               <a:t>твитова о </a:t>
             </a:r>
             <a:r>
-              <a:rPr dirty="0" smtClean="0"/>
+              <a:rPr dirty="0"/>
               <a:t>Bitcoin-</a:t>
             </a:r>
             <a:r>
-              <a:rPr lang="sr-Cyrl-RS" dirty="0" smtClean="0"/>
+              <a:rPr lang="sr-Cyrl-RS" dirty="0"/>
               <a:t>у</a:t>
             </a:r>
             <a:endParaRPr dirty="0"/>
@@ -9684,16 +9579,20 @@
               </a:defRPr>
             </a:pPr>
             <a:r>
-              <a:rPr lang="sr-Cyrl-RS" dirty="0" smtClean="0"/>
-              <a:t>Ручно анотиран </a:t>
-            </a:r>
-            <a:r>
-              <a:rPr dirty="0" smtClean="0"/>
-              <a:t>dataset </a:t>
-            </a:r>
-            <a:r>
-              <a:rPr dirty="0"/>
-              <a:t>(positive/negative/neutral)</a:t>
+              <a:rPr lang="sr-Cyrl-RS" dirty="0"/>
+              <a:t>Ручно анотиран скуп података</a:t>
+            </a:r>
+            <a:r>
+              <a:rPr dirty="0"/>
+              <a:t> (</a:t>
+            </a:r>
+            <a:r>
+              <a:rPr lang="sr-Cyrl-RS" dirty="0"/>
+              <a:t>позитиван/негативан/неутралан</a:t>
+            </a:r>
+            <a:r>
+              <a:rPr dirty="0"/>
+              <a:t>)</a:t>
             </a:r>
           </a:p>
           <a:p>
@@ -9708,36 +9607,28 @@
               </a:defRPr>
             </a:pPr>
             <a:r>
-              <a:rPr lang="sr-Cyrl-RS" dirty="0" smtClean="0"/>
+              <a:rPr lang="sr-Cyrl-RS" dirty="0"/>
               <a:t>Временски период</a:t>
             </a:r>
             <a:r>
-              <a:rPr dirty="0" smtClean="0"/>
+              <a:rPr dirty="0"/>
               <a:t>: </a:t>
             </a:r>
             <a:r>
-              <a:rPr lang="sr-Cyrl-RS" dirty="0" smtClean="0"/>
+              <a:rPr lang="sr-Cyrl-RS" dirty="0"/>
               <a:t>Јануар</a:t>
             </a:r>
             <a:r>
-              <a:rPr dirty="0" smtClean="0"/>
-              <a:t> </a:t>
-            </a:r>
-            <a:r>
-              <a:rPr dirty="0"/>
-              <a:t>- </a:t>
-            </a:r>
-            <a:r>
-              <a:rPr lang="sr-Cyrl-RS" dirty="0" smtClean="0"/>
+              <a:rPr dirty="0"/>
+              <a:t> - </a:t>
+            </a:r>
+            <a:r>
+              <a:rPr lang="sr-Cyrl-RS" dirty="0"/>
               <a:t>Мај</a:t>
             </a:r>
             <a:r>
-              <a:rPr dirty="0" smtClean="0"/>
-              <a:t> </a:t>
-            </a:r>
-            <a:r>
-              <a:rPr dirty="0"/>
-              <a:t>2024</a:t>
+              <a:rPr dirty="0"/>
+              <a:t> 2024</a:t>
             </a:r>
           </a:p>
           <a:p>
@@ -9752,19 +9643,23 @@
               </a:defRPr>
             </a:pPr>
             <a:r>
-              <a:rPr lang="sr-Cyrl-RS" dirty="0" smtClean="0"/>
+              <a:rPr lang="sr-Cyrl-RS" dirty="0"/>
               <a:t>Балансиран</a:t>
             </a:r>
             <a:r>
-              <a:rPr dirty="0" smtClean="0"/>
+              <a:rPr dirty="0"/>
               <a:t> </a:t>
             </a:r>
             <a:r>
-              <a:rPr dirty="0"/>
-              <a:t>dataset </a:t>
-            </a:r>
-            <a:r>
-              <a:rPr lang="sr-Cyrl-RS" dirty="0" smtClean="0"/>
+              <a:rPr lang="sr-Cyrl-RS" dirty="0"/>
+              <a:t>скуп података</a:t>
+            </a:r>
+            <a:r>
+              <a:rPr dirty="0"/>
+              <a:t> </a:t>
+            </a:r>
+            <a:r>
+              <a:rPr lang="sr-Cyrl-RS" dirty="0"/>
               <a:t>по класама</a:t>
             </a:r>
             <a:endParaRPr dirty="0"/>
@@ -9781,9 +9676,18 @@
               </a:defRPr>
             </a:pPr>
             <a:r>
-              <a:rPr dirty="0"/>
-              <a:t>Text Preprocessing Pipeline</a:t>
-            </a:r>
+              <a:rPr lang="sr-Cyrl-RS" dirty="0"/>
+              <a:t>Проточни систем (енгл. </a:t>
+            </a:r>
+            <a:r>
+              <a:rPr lang="en-US" dirty="0"/>
+              <a:t>pipeline) </a:t>
+            </a:r>
+            <a:r>
+              <a:rPr lang="sr-Cyrl-RS" dirty="0"/>
+              <a:t>претпроцесирања текста</a:t>
+            </a:r>
+            <a:endParaRPr dirty="0"/>
           </a:p>
           <a:p>
             <a:pPr>
@@ -9797,35 +9701,31 @@
               </a:defRPr>
             </a:pPr>
             <a:r>
-              <a:rPr lang="sr-Cyrl-RS" dirty="0" smtClean="0"/>
+              <a:rPr lang="sr-Cyrl-RS" dirty="0"/>
               <a:t>Уклањање</a:t>
             </a:r>
             <a:r>
-              <a:rPr dirty="0" smtClean="0"/>
+              <a:rPr dirty="0"/>
               <a:t> URL-</a:t>
             </a:r>
             <a:r>
-              <a:rPr lang="sr-Cyrl-RS" dirty="0" smtClean="0"/>
+              <a:rPr lang="sr-Cyrl-RS" dirty="0"/>
               <a:t>ова</a:t>
             </a:r>
             <a:r>
-              <a:rPr dirty="0" smtClean="0"/>
-              <a:t>, </a:t>
-            </a:r>
-            <a:r>
-              <a:rPr dirty="0"/>
-              <a:t>mentions (@user) </a:t>
-            </a:r>
-            <a:r>
-              <a:rPr lang="sr-Cyrl-RS" dirty="0" smtClean="0"/>
+              <a:rPr dirty="0"/>
+              <a:t>, mentions (@user) </a:t>
+            </a:r>
+            <a:r>
+              <a:rPr lang="sr-Cyrl-RS" dirty="0"/>
               <a:t>и</a:t>
             </a:r>
             <a:r>
-              <a:rPr dirty="0" smtClean="0"/>
+              <a:rPr dirty="0"/>
               <a:t> hashtag-</a:t>
             </a:r>
             <a:r>
-              <a:rPr lang="sr-Cyrl-RS" dirty="0" smtClean="0"/>
+              <a:rPr lang="sr-Cyrl-RS" dirty="0"/>
               <a:t>ова</a:t>
             </a:r>
             <a:endParaRPr dirty="0"/>
@@ -9846,7 +9746,7 @@
               <a:t>Lowercase </a:t>
             </a:r>
             <a:r>
-              <a:rPr lang="sr-Cyrl-RS" dirty="0" smtClean="0"/>
+              <a:rPr lang="sr-Cyrl-RS" dirty="0"/>
               <a:t>трансформација</a:t>
             </a:r>
             <a:endParaRPr dirty="0"/>
@@ -9863,16 +9763,12 @@
               </a:defRPr>
             </a:pPr>
             <a:r>
-              <a:rPr lang="sr-Cyrl-RS" dirty="0" smtClean="0"/>
+              <a:rPr lang="sr-Cyrl-RS" dirty="0"/>
               <a:t>Токенизација</a:t>
             </a:r>
             <a:r>
-              <a:rPr dirty="0" smtClean="0"/>
-              <a:t> </a:t>
-            </a:r>
-            <a:r>
-              <a:rPr dirty="0"/>
-              <a:t>(NLTK)</a:t>
+              <a:rPr dirty="0"/>
+              <a:t> (NLTK)</a:t>
             </a:r>
           </a:p>
           <a:p>
@@ -9887,9 +9783,22 @@
               </a:defRPr>
             </a:pPr>
             <a:r>
-              <a:rPr dirty="0"/>
-              <a:t>Stop words removal</a:t>
-            </a:r>
+              <a:rPr lang="sr-Cyrl-RS" dirty="0"/>
+              <a:t>Уклањање </a:t>
+            </a:r>
+            <a:r>
+              <a:rPr lang="en-US" dirty="0" err="1"/>
+              <a:t>stop_w</a:t>
+            </a:r>
+            <a:r>
+              <a:rPr dirty="0" err="1"/>
+              <a:t>ords</a:t>
+            </a:r>
+            <a:r>
+              <a:rPr dirty="0"/>
+              <a:t> </a:t>
+            </a:r>
+            <a:endParaRPr lang="en-US" dirty="0"/>
           </a:p>
           <a:p>
             <a:pPr>
@@ -9922,13 +9831,6 @@
   <p:clrMapOvr>
     <a:masterClrMapping/>
   </p:clrMapOvr>
-  <p:timing>
-    <p:tnLst>
-      <p:par>
-        <p:cTn id="1" dur="indefinite" restart="never" nodeType="tmRoot"/>
-      </p:par>
-    </p:tnLst>
-  </p:timing>
 </p:sld>
 </file>
 
@@ -10023,7 +9925,7 @@
               </a:defRPr>
             </a:pPr>
             <a:r>
-              <a:rPr lang="sr-Cyrl-RS" dirty="0" smtClean="0"/>
+              <a:rPr lang="sr-Cyrl-RS" dirty="0"/>
               <a:t>Коришћене технологије</a:t>
             </a:r>
             <a:endParaRPr dirty="0"/>
@@ -10096,7 +9998,7 @@
               </a:defRPr>
             </a:pPr>
             <a:r>
-              <a:rPr lang="sr-Cyrl-RS" dirty="0" smtClean="0"/>
+              <a:rPr lang="sr-Cyrl-RS" dirty="0"/>
               <a:t>Програмски језик</a:t>
             </a:r>
             <a:endParaRPr dirty="0"/>
@@ -10147,7 +10049,7 @@
         <p:spPr>
           <a:xfrm>
             <a:off x="1097280" y="2926079"/>
-            <a:ext cx="3474720" cy="274320"/>
+            <a:ext cx="3227422" cy="307777"/>
           </a:xfrm>
           <a:prstGeom prst="rect">
             <a:avLst/>
@@ -10168,9 +10070,26 @@
               </a:defRPr>
             </a:pPr>
             <a:r>
-              <a:rPr dirty="0"/>
-              <a:t>Deep learning framework</a:t>
-            </a:r>
+              <a:rPr lang="sr-Cyrl-RS" dirty="0"/>
+              <a:t>Оквир </a:t>
+            </a:r>
+            <a:r>
+              <a:rPr lang="de-DE" dirty="0"/>
+              <a:t>(</a:t>
+            </a:r>
+            <a:r>
+              <a:rPr lang="sr-Cyrl-RS" dirty="0"/>
+              <a:t>енгл. </a:t>
+            </a:r>
+            <a:r>
+              <a:rPr lang="en-US" dirty="0"/>
+              <a:t>framework) </a:t>
+            </a:r>
+            <a:r>
+              <a:rPr lang="sr-Cyrl-RS" dirty="0"/>
+              <a:t>дубоког учења</a:t>
+            </a:r>
+            <a:endParaRPr dirty="0"/>
           </a:p>
         </p:txBody>
       </p:sp>
@@ -10243,7 +10162,7 @@
               <a:t>Hugging Face BERT </a:t>
             </a:r>
             <a:r>
-              <a:rPr lang="sr-Cyrl-RS" dirty="0" smtClean="0"/>
+              <a:rPr lang="sr-Cyrl-RS" dirty="0"/>
               <a:t>модели</a:t>
             </a:r>
             <a:endParaRPr dirty="0"/>
@@ -10319,7 +10238,7 @@
               <a:t>Baseline ML </a:t>
             </a:r>
             <a:r>
-              <a:rPr lang="sr-Cyrl-RS" dirty="0" smtClean="0"/>
+              <a:rPr lang="sr-Cyrl-RS" dirty="0"/>
               <a:t>модели</a:t>
             </a:r>
             <a:endParaRPr dirty="0"/>
@@ -10370,7 +10289,7 @@
         <p:spPr>
           <a:xfrm>
             <a:off x="5212080" y="2103120"/>
-            <a:ext cx="3474720" cy="274320"/>
+            <a:ext cx="2145524" cy="307777"/>
           </a:xfrm>
           <a:prstGeom prst="rect">
             <a:avLst/>
@@ -10391,8 +10310,10 @@
               </a:defRPr>
             </a:pPr>
             <a:r>
-              <a:t>Natural Language Processing</a:t>
-            </a:r>
+              <a:rPr lang="sr-Cyrl-RS" dirty="0"/>
+              <a:t>Обрада природног језика</a:t>
+            </a:r>
+            <a:endParaRPr dirty="0"/>
           </a:p>
         </p:txBody>
       </p:sp>
@@ -10440,7 +10361,7 @@
         <p:spPr>
           <a:xfrm>
             <a:off x="5212080" y="2926079"/>
-            <a:ext cx="3474720" cy="274320"/>
+            <a:ext cx="2105513" cy="307777"/>
           </a:xfrm>
           <a:prstGeom prst="rect">
             <a:avLst/>
@@ -10461,8 +10382,10 @@
               </a:defRPr>
             </a:pPr>
             <a:r>
-              <a:t>Data manipulation</a:t>
-            </a:r>
+              <a:rPr lang="sr-Cyrl-RS" dirty="0"/>
+              <a:t>Манипулација подацима</a:t>
+            </a:r>
+            <a:endParaRPr dirty="0"/>
           </a:p>
         </p:txBody>
       </p:sp>
@@ -10531,7 +10454,7 @@
               </a:defRPr>
             </a:pPr>
             <a:r>
-              <a:rPr lang="sr-Cyrl-RS" dirty="0" smtClean="0"/>
+              <a:rPr lang="sr-Cyrl-RS" dirty="0"/>
               <a:t>Визуализације</a:t>
             </a:r>
             <a:endParaRPr dirty="0"/>
@@ -10582,7 +10505,7 @@
         <p:spPr>
           <a:xfrm>
             <a:off x="5212080" y="4572000"/>
-            <a:ext cx="3474720" cy="274320"/>
+            <a:ext cx="2008178" cy="307777"/>
           </a:xfrm>
           <a:prstGeom prst="rect">
             <a:avLst/>
@@ -10603,9 +10526,18 @@
               </a:defRPr>
             </a:pPr>
             <a:r>
-              <a:rPr dirty="0"/>
-              <a:t>Bitcoin price data</a:t>
-            </a:r>
+              <a:rPr lang="sr-Cyrl-RS" dirty="0"/>
+              <a:t>Подаци о цени </a:t>
+            </a:r>
+            <a:r>
+              <a:rPr lang="en-US" dirty="0"/>
+              <a:t>Bitcoin</a:t>
+            </a:r>
+            <a:r>
+              <a:rPr lang="sr-Cyrl-RS" dirty="0"/>
+              <a:t>-а</a:t>
+            </a:r>
+            <a:endParaRPr dirty="0"/>
           </a:p>
         </p:txBody>
       </p:sp>
@@ -10614,13 +10546,6 @@
   <p:clrMapOvr>
     <a:masterClrMapping/>
   </p:clrMapOvr>
-  <p:timing>
-    <p:tnLst>
-      <p:par>
-        <p:cTn id="1" dur="indefinite" restart="never" nodeType="tmRoot"/>
-      </p:par>
-    </p:tnLst>
-  </p:timing>
 </p:sld>
 </file>
 
@@ -10715,7 +10640,7 @@
               </a:defRPr>
             </a:pPr>
             <a:r>
-              <a:rPr lang="sr-Cyrl-RS" dirty="0" smtClean="0"/>
+              <a:rPr lang="sr-Cyrl-RS" dirty="0"/>
               <a:t>Архитектура система</a:t>
             </a:r>
             <a:endParaRPr dirty="0"/>
@@ -10755,9 +10680,10 @@
               </a:defRPr>
             </a:pPr>
             <a:r>
-              <a:rPr dirty="0"/>
-              <a:t>Data Pipeline</a:t>
-            </a:r>
+              <a:rPr lang="sr-Cyrl-RS" dirty="0"/>
+              <a:t>Проточни систем података</a:t>
+            </a:r>
+            <a:endParaRPr dirty="0"/>
           </a:p>
           <a:p>
             <a:pPr>
@@ -10771,18 +10697,29 @@
               </a:defRPr>
             </a:pPr>
             <a:r>
-              <a:rPr dirty="0"/>
-              <a:t>Data Collection → Twitter dataset (5,000 </a:t>
-            </a:r>
-            <a:r>
-              <a:rPr lang="sr-Cyrl-RS" dirty="0" smtClean="0"/>
+              <a:rPr lang="sr-Cyrl-RS" dirty="0"/>
+              <a:t>Прикупљање података </a:t>
+            </a:r>
+            <a:r>
+              <a:rPr dirty="0"/>
+              <a:t>→ Twitter </a:t>
+            </a:r>
+            <a:r>
+              <a:rPr lang="sr-Cyrl-RS" dirty="0"/>
+              <a:t>скуп података</a:t>
+            </a:r>
+            <a:r>
+              <a:rPr dirty="0"/>
+              <a:t> (5,000 </a:t>
+            </a:r>
+            <a:r>
+              <a:rPr lang="sr-Cyrl-RS" dirty="0"/>
               <a:t>твитова</a:t>
             </a:r>
             <a:r>
-              <a:rPr dirty="0" smtClean="0"/>
+              <a:rPr dirty="0"/>
               <a:t>)</a:t>
             </a:r>
-            <a:endParaRPr dirty="0"/>
           </a:p>
           <a:p>
             <a:pPr>
@@ -10796,12 +10733,16 @@
               </a:defRPr>
             </a:pPr>
             <a:r>
-              <a:rPr dirty="0"/>
-              <a:t>Preprocessing → Text cleaning </a:t>
-            </a:r>
-            <a:r>
-              <a:rPr lang="sr-Cyrl-RS" dirty="0" smtClean="0"/>
-              <a:t>и токенизација</a:t>
+              <a:rPr lang="sr-Cyrl-RS" dirty="0"/>
+              <a:t>Претпроцесирање</a:t>
+            </a:r>
+            <a:r>
+              <a:rPr dirty="0"/>
+              <a:t> → </a:t>
+            </a:r>
+            <a:r>
+              <a:rPr lang="sr-Cyrl-RS" dirty="0"/>
+              <a:t>Чишћење текста и токенизација</a:t>
             </a:r>
             <a:endParaRPr dirty="0"/>
           </a:p>
@@ -10817,12 +10758,24 @@
               </a:defRPr>
             </a:pPr>
             <a:r>
-              <a:rPr dirty="0"/>
-              <a:t>Feature Extraction → TF-IDF / BERT </a:t>
-            </a:r>
-            <a:r>
-              <a:rPr dirty="0" err="1"/>
+              <a:rPr lang="sr-Cyrl-RS" dirty="0"/>
+              <a:t>Издвајање карактеристика </a:t>
+            </a:r>
+            <a:r>
+              <a:rPr dirty="0"/>
+              <a:t>→ TF-IDF / BERT </a:t>
+            </a:r>
+            <a:r>
+              <a:rPr lang="sr-Cyrl-RS" dirty="0"/>
+              <a:t>уграђивања (енгл. </a:t>
+            </a:r>
+            <a:r>
+              <a:rPr lang="en-US" dirty="0"/>
               <a:t>embeddings</a:t>
+            </a:r>
+            <a:r>
+              <a:rPr lang="sr-Cyrl-RS" dirty="0"/>
+              <a:t>)</a:t>
             </a:r>
             <a:endParaRPr dirty="0"/>
           </a:p>
@@ -10838,9 +10791,10 @@
               </a:defRPr>
             </a:pPr>
             <a:r>
-              <a:rPr dirty="0"/>
-              <a:t>Model Pipeline</a:t>
-            </a:r>
+              <a:rPr lang="sr-Cyrl-RS" dirty="0"/>
+              <a:t>Проточни систем модела</a:t>
+            </a:r>
+            <a:endParaRPr dirty="0"/>
           </a:p>
           <a:p>
             <a:pPr>
@@ -10855,7 +10809,15 @@
             </a:pPr>
             <a:r>
               <a:rPr dirty="0"/>
-              <a:t>Train/Test Split → 80% / 20%</a:t>
+              <a:t>Train/Test </a:t>
+            </a:r>
+            <a:r>
+              <a:rPr lang="sr-Cyrl-RS" dirty="0"/>
+              <a:t>подела</a:t>
+            </a:r>
+            <a:r>
+              <a:rPr dirty="0"/>
+              <a:t> → 80% / 20%</a:t>
             </a:r>
           </a:p>
           <a:p>
@@ -10870,8 +10832,12 @@
               </a:defRPr>
             </a:pPr>
             <a:r>
-              <a:rPr dirty="0"/>
-              <a:t>Model Training → Naive Bayes, SVM, BERT</a:t>
+              <a:rPr lang="sr-Cyrl-RS" dirty="0"/>
+              <a:t>Обучавање модела</a:t>
+            </a:r>
+            <a:r>
+              <a:rPr dirty="0"/>
+              <a:t> → Naive Bayes, SVM, BERT</a:t>
             </a:r>
           </a:p>
           <a:p>
@@ -10886,12 +10852,12 @@
               </a:defRPr>
             </a:pPr>
             <a:r>
-              <a:rPr dirty="0" err="1"/>
-              <a:t>Hyperparameter</a:t>
-            </a:r>
-            <a:r>
-              <a:rPr dirty="0"/>
-              <a:t> Tuning → </a:t>
+              <a:rPr lang="sr-Cyrl-RS" dirty="0"/>
+              <a:t>Штеловање хиперпараметара </a:t>
+            </a:r>
+            <a:r>
+              <a:rPr dirty="0"/>
+              <a:t>→ </a:t>
             </a:r>
             <a:r>
               <a:rPr dirty="0" err="1"/>
@@ -10899,8 +10865,13 @@
             </a:r>
             <a:r>
               <a:rPr dirty="0"/>
-              <a:t> / Manual tuning</a:t>
-            </a:r>
+              <a:t> / </a:t>
+            </a:r>
+            <a:r>
+              <a:rPr lang="sr-Cyrl-RS" dirty="0"/>
+              <a:t>Ручно штеловање</a:t>
+            </a:r>
+            <a:endParaRPr dirty="0"/>
           </a:p>
           <a:p>
             <a:pPr>
@@ -10914,8 +10885,12 @@
               </a:defRPr>
             </a:pPr>
             <a:r>
-              <a:rPr dirty="0"/>
-              <a:t>Evaluation → Accuracy, Precision, Recall, F1-Score</a:t>
+              <a:rPr lang="sr-Cyrl-RS" dirty="0"/>
+              <a:t>Евалуација</a:t>
+            </a:r>
+            <a:r>
+              <a:rPr dirty="0"/>
+              <a:t> → Accuracy, Precision, Recall, F1-Score</a:t>
             </a:r>
           </a:p>
           <a:p>
@@ -10930,9 +10905,10 @@
               </a:defRPr>
             </a:pPr>
             <a:r>
-              <a:rPr dirty="0"/>
-              <a:t>Analysis Pipeline</a:t>
-            </a:r>
+              <a:rPr lang="sr-Cyrl-RS" dirty="0"/>
+              <a:t>Проточни систем анализе</a:t>
+            </a:r>
+            <a:endParaRPr dirty="0"/>
           </a:p>
           <a:p>
             <a:pPr>
@@ -10946,8 +10922,20 @@
               </a:defRPr>
             </a:pPr>
             <a:r>
-              <a:rPr dirty="0"/>
-              <a:t>Bitcoin Price Data → </a:t>
+              <a:rPr lang="sr-Cyrl-RS" dirty="0"/>
+              <a:t>Подаци о цени </a:t>
+            </a:r>
+            <a:r>
+              <a:rPr lang="en-US" dirty="0"/>
+              <a:t>Bitcoin</a:t>
+            </a:r>
+            <a:r>
+              <a:rPr lang="sr-Cyrl-RS" dirty="0"/>
+              <a:t>-а</a:t>
+            </a:r>
+            <a:r>
+              <a:rPr dirty="0"/>
+              <a:t>→ </a:t>
             </a:r>
             <a:r>
               <a:rPr dirty="0" err="1"/>
@@ -10970,20 +10958,36 @@
               </a:defRPr>
             </a:pPr>
             <a:r>
-              <a:rPr dirty="0"/>
-              <a:t>Sentiment Scoring → -1 (negative) </a:t>
-            </a:r>
-            <a:r>
-              <a:rPr lang="sr-Cyrl-RS" dirty="0" smtClean="0"/>
+              <a:rPr lang="sr-Cyrl-RS" dirty="0"/>
+              <a:t>Бодовање сентимента </a:t>
+            </a:r>
+            <a:r>
+              <a:rPr dirty="0"/>
+              <a:t>→ -1 (</a:t>
+            </a:r>
+            <a:r>
+              <a:rPr lang="sr-Cyrl-RS" dirty="0"/>
+              <a:t>негативан</a:t>
+            </a:r>
+            <a:r>
+              <a:rPr dirty="0"/>
+              <a:t>) </a:t>
+            </a:r>
+            <a:r>
+              <a:rPr lang="sr-Cyrl-RS" dirty="0"/>
               <a:t>до</a:t>
             </a:r>
             <a:r>
-              <a:rPr dirty="0" smtClean="0"/>
-              <a:t> </a:t>
-            </a:r>
-            <a:r>
-              <a:rPr dirty="0"/>
-              <a:t>+1 (positive)</a:t>
+              <a:rPr dirty="0"/>
+              <a:t> +1 (</a:t>
+            </a:r>
+            <a:r>
+              <a:rPr lang="sr-Cyrl-RS" dirty="0"/>
+              <a:t>позитиван</a:t>
+            </a:r>
+            <a:r>
+              <a:rPr dirty="0"/>
+              <a:t>)</a:t>
             </a:r>
           </a:p>
           <a:p>
@@ -10998,9 +11002,18 @@
               </a:defRPr>
             </a:pPr>
             <a:r>
-              <a:rPr dirty="0"/>
-              <a:t>Statistical Analysis → Pearson &amp; Spearman correlation</a:t>
-            </a:r>
+              <a:rPr lang="sr-Cyrl-RS" dirty="0"/>
+              <a:t>Статистичка анализа </a:t>
+            </a:r>
+            <a:r>
+              <a:rPr dirty="0"/>
+              <a:t>→ Pearson &amp; Spearman </a:t>
+            </a:r>
+            <a:r>
+              <a:rPr lang="sr-Cyrl-RS" dirty="0"/>
+              <a:t>корелација</a:t>
+            </a:r>
+            <a:endParaRPr dirty="0"/>
           </a:p>
         </p:txBody>
       </p:sp>
@@ -11009,13 +11022,6 @@
   <p:clrMapOvr>
     <a:masterClrMapping/>
   </p:clrMapOvr>
-  <p:timing>
-    <p:tnLst>
-      <p:par>
-        <p:cTn id="1" dur="indefinite" restart="never" nodeType="tmRoot"/>
-      </p:par>
-    </p:tnLst>
-  </p:timing>
 </p:sld>
 </file>
 
@@ -11110,7 +11116,7 @@
               </a:defRPr>
             </a:pPr>
             <a:r>
-              <a:rPr lang="sr-Cyrl-RS" dirty="0" smtClean="0"/>
+              <a:rPr lang="sr-Cyrl-RS" dirty="0"/>
               <a:t>Процес тренирања модела</a:t>
             </a:r>
             <a:endParaRPr dirty="0"/>
@@ -11150,9 +11156,10 @@
               </a:defRPr>
             </a:pPr>
             <a:r>
-              <a:rPr dirty="0"/>
-              <a:t>Training Setup</a:t>
-            </a:r>
+              <a:rPr lang="sr-Cyrl-RS" dirty="0"/>
+              <a:t>Подешавање обуке</a:t>
+            </a:r>
+            <a:endParaRPr dirty="0"/>
           </a:p>
           <a:p>
             <a:pPr>
@@ -11167,17 +11174,24 @@
             </a:pPr>
             <a:r>
               <a:rPr dirty="0"/>
-              <a:t>80/20 Train-Test Split (4,000 / 1,000 </a:t>
-            </a:r>
-            <a:r>
-              <a:rPr lang="sr-Cyrl-RS" dirty="0" smtClean="0"/>
+              <a:t>80/20 Train-Test </a:t>
+            </a:r>
+            <a:r>
+              <a:rPr lang="sr-Cyrl-RS" dirty="0"/>
+              <a:t>подела</a:t>
+            </a:r>
+            <a:r>
+              <a:rPr dirty="0"/>
+              <a:t> (4,000 / 1,000 </a:t>
+            </a:r>
+            <a:r>
+              <a:rPr lang="sr-Cyrl-RS" dirty="0"/>
               <a:t>твитова</a:t>
             </a:r>
             <a:r>
-              <a:rPr dirty="0" smtClean="0"/>
+              <a:rPr dirty="0"/>
               <a:t>)</a:t>
             </a:r>
-            <a:endParaRPr dirty="0"/>
           </a:p>
           <a:p>
             <a:pPr>
@@ -11191,11 +11205,23 @@
               </a:defRPr>
             </a:pPr>
             <a:r>
-              <a:rPr dirty="0"/>
-              <a:t>5-Fold Cross Validation </a:t>
-            </a:r>
-            <a:r>
-              <a:rPr lang="sr-Cyrl-RS" dirty="0" smtClean="0"/>
+              <a:rPr lang="sr-Cyrl-RS" dirty="0"/>
+              <a:t>Петострука унакрсна валидација (енгл. </a:t>
+            </a:r>
+            <a:r>
+              <a:rPr lang="en-US" dirty="0"/>
+              <a:t>5-fold Cross-Validation</a:t>
+            </a:r>
+            <a:r>
+              <a:rPr lang="sr-Cyrl-RS" dirty="0"/>
+              <a:t>)</a:t>
+            </a:r>
+            <a:r>
+              <a:rPr lang="en-US" dirty="0"/>
+              <a:t> </a:t>
+            </a:r>
+            <a:r>
+              <a:rPr lang="sr-Cyrl-RS" dirty="0"/>
               <a:t>за све моделе</a:t>
             </a:r>
             <a:endParaRPr dirty="0"/>
@@ -11212,8 +11238,12 @@
               </a:defRPr>
             </a:pPr>
             <a:r>
-              <a:rPr dirty="0"/>
-              <a:t>GPU Acceleration: NVIDIA RTX 4060 (8GB VRAM)</a:t>
+              <a:rPr lang="sr-Cyrl-RS" dirty="0"/>
+              <a:t>Убрзање графичке картице</a:t>
+            </a:r>
+            <a:r>
+              <a:rPr dirty="0"/>
+              <a:t>: NVIDIA RTX 4060 (8GB VRAM)</a:t>
             </a:r>
           </a:p>
           <a:p>
@@ -11244,12 +11274,16 @@
               </a:defRPr>
             </a:pPr>
             <a:r>
-              <a:rPr dirty="0"/>
-              <a:t>BERT Fine-Tuning </a:t>
-            </a:r>
-            <a:r>
-              <a:rPr lang="sr-Cyrl-RS" dirty="0" smtClean="0"/>
-              <a:t>специфичности</a:t>
+              <a:rPr lang="sr-Cyrl-RS" dirty="0"/>
+              <a:t>Специфичности финог подешавања </a:t>
+            </a:r>
+            <a:r>
+              <a:rPr lang="en-US" dirty="0"/>
+              <a:t>BERT</a:t>
+            </a:r>
+            <a:r>
+              <a:rPr lang="sr-Cyrl-RS" dirty="0"/>
+              <a:t> модела</a:t>
             </a:r>
             <a:endParaRPr dirty="0"/>
           </a:p>
@@ -11265,8 +11299,12 @@
               </a:defRPr>
             </a:pPr>
             <a:r>
-              <a:rPr dirty="0"/>
-              <a:t>Pre-trained model: </a:t>
+              <a:rPr lang="sr-Cyrl-RS" dirty="0"/>
+              <a:t>Предобучен модел</a:t>
+            </a:r>
+            <a:r>
+              <a:rPr dirty="0"/>
+              <a:t>: </a:t>
             </a:r>
             <a:r>
               <a:rPr dirty="0" err="1"/>
@@ -11353,13 +11391,6 @@
   <p:clrMapOvr>
     <a:masterClrMapping/>
   </p:clrMapOvr>
-  <p:timing>
-    <p:tnLst>
-      <p:par>
-        <p:cTn id="1" dur="indefinite" restart="never" nodeType="tmRoot"/>
-      </p:par>
-    </p:tnLst>
-  </p:timing>
 </p:sld>
 </file>
 

--- a/Prezentacija_Diplomski_Boris_Letic_RA_207_2021.pptx
+++ b/Prezentacija_Diplomski_Boris_Letic_RA_207_2021.pptx
@@ -317,7 +317,7 @@
           <a:p>
             <a:fld id="{5BCAD085-E8A6-8845-BD4E-CB4CCA059FC4}" type="datetimeFigureOut">
               <a:rPr lang="en-US" smtClean="0"/>
-              <a:t>11/23/2025</a:t>
+              <a:t>11/24/2025</a:t>
             </a:fld>
             <a:endParaRPr lang="en-US"/>
           </a:p>
@@ -485,7 +485,7 @@
           <a:p>
             <a:fld id="{5BCAD085-E8A6-8845-BD4E-CB4CCA059FC4}" type="datetimeFigureOut">
               <a:rPr lang="en-US" smtClean="0"/>
-              <a:t>11/23/2025</a:t>
+              <a:t>11/24/2025</a:t>
             </a:fld>
             <a:endParaRPr lang="en-US"/>
           </a:p>
@@ -663,7 +663,7 @@
           <a:p>
             <a:fld id="{5BCAD085-E8A6-8845-BD4E-CB4CCA059FC4}" type="datetimeFigureOut">
               <a:rPr lang="en-US" smtClean="0"/>
-              <a:t>11/23/2025</a:t>
+              <a:t>11/24/2025</a:t>
             </a:fld>
             <a:endParaRPr lang="en-US"/>
           </a:p>
@@ -831,7 +831,7 @@
           <a:p>
             <a:fld id="{5BCAD085-E8A6-8845-BD4E-CB4CCA059FC4}" type="datetimeFigureOut">
               <a:rPr lang="en-US" smtClean="0"/>
-              <a:t>11/23/2025</a:t>
+              <a:t>11/24/2025</a:t>
             </a:fld>
             <a:endParaRPr lang="en-US"/>
           </a:p>
@@ -1076,7 +1076,7 @@
           <a:p>
             <a:fld id="{5BCAD085-E8A6-8845-BD4E-CB4CCA059FC4}" type="datetimeFigureOut">
               <a:rPr lang="en-US" smtClean="0"/>
-              <a:t>11/23/2025</a:t>
+              <a:t>11/24/2025</a:t>
             </a:fld>
             <a:endParaRPr lang="en-US"/>
           </a:p>
@@ -1361,7 +1361,7 @@
           <a:p>
             <a:fld id="{5BCAD085-E8A6-8845-BD4E-CB4CCA059FC4}" type="datetimeFigureOut">
               <a:rPr lang="en-US" smtClean="0"/>
-              <a:t>11/23/2025</a:t>
+              <a:t>11/24/2025</a:t>
             </a:fld>
             <a:endParaRPr lang="en-US"/>
           </a:p>
@@ -1780,7 +1780,7 @@
           <a:p>
             <a:fld id="{5BCAD085-E8A6-8845-BD4E-CB4CCA059FC4}" type="datetimeFigureOut">
               <a:rPr lang="en-US" smtClean="0"/>
-              <a:t>11/23/2025</a:t>
+              <a:t>11/24/2025</a:t>
             </a:fld>
             <a:endParaRPr lang="en-US"/>
           </a:p>
@@ -1897,7 +1897,7 @@
           <a:p>
             <a:fld id="{5BCAD085-E8A6-8845-BD4E-CB4CCA059FC4}" type="datetimeFigureOut">
               <a:rPr lang="en-US" smtClean="0"/>
-              <a:t>11/23/2025</a:t>
+              <a:t>11/24/2025</a:t>
             </a:fld>
             <a:endParaRPr lang="en-US"/>
           </a:p>
@@ -1992,7 +1992,7 @@
           <a:p>
             <a:fld id="{5BCAD085-E8A6-8845-BD4E-CB4CCA059FC4}" type="datetimeFigureOut">
               <a:rPr lang="en-US" smtClean="0"/>
-              <a:t>11/23/2025</a:t>
+              <a:t>11/24/2025</a:t>
             </a:fld>
             <a:endParaRPr lang="en-US"/>
           </a:p>
@@ -2267,7 +2267,7 @@
           <a:p>
             <a:fld id="{5BCAD085-E8A6-8845-BD4E-CB4CCA059FC4}" type="datetimeFigureOut">
               <a:rPr lang="en-US" smtClean="0"/>
-              <a:t>11/23/2025</a:t>
+              <a:t>11/24/2025</a:t>
             </a:fld>
             <a:endParaRPr lang="en-US"/>
           </a:p>
@@ -2519,7 +2519,7 @@
           <a:p>
             <a:fld id="{5BCAD085-E8A6-8845-BD4E-CB4CCA059FC4}" type="datetimeFigureOut">
               <a:rPr lang="en-US" smtClean="0"/>
-              <a:t>11/23/2025</a:t>
+              <a:t>11/24/2025</a:t>
             </a:fld>
             <a:endParaRPr lang="en-US"/>
           </a:p>
@@ -2730,7 +2730,7 @@
           <a:p>
             <a:fld id="{5BCAD085-E8A6-8845-BD4E-CB4CCA059FC4}" type="datetimeFigureOut">
               <a:rPr lang="en-US" smtClean="0"/>
-              <a:t>11/23/2025</a:t>
+              <a:t>11/24/2025</a:t>
             </a:fld>
             <a:endParaRPr lang="en-US"/>
           </a:p>
@@ -8539,7 +8539,7 @@
             </a:r>
             <a:r>
               <a:rPr lang="en-US" dirty="0"/>
-              <a:t>Natural Language Processing</a:t>
+              <a:t>natural language processing</a:t>
             </a:r>
             <a:r>
               <a:rPr lang="sr-Cyrl-RS" dirty="0"/>
@@ -8628,18 +8628,9 @@
               <a:t>П</a:t>
             </a:r>
             <a:r>
-              <a:rPr lang="ru-RU"/>
-              <a:t>раћење </a:t>
-            </a:r>
-            <a:r>
               <a:rPr lang="ru-RU" dirty="0"/>
-              <a:t>перцепције бренда </a:t>
-            </a:r>
-            <a:r>
-              <a:rPr lang="ru-RU"/>
-              <a:t>и производа у реалном времену</a:t>
-            </a:r>
-            <a:endParaRPr lang="ru-RU" dirty="0"/>
+              <a:t>раћење перцепције бренда и производа у реалном времену</a:t>
+            </a:r>
           </a:p>
         </p:txBody>
       </p:sp>
@@ -11210,7 +11201,7 @@
             </a:r>
             <a:r>
               <a:rPr lang="en-US" dirty="0"/>
-              <a:t>5-fold Cross-Validation</a:t>
+              <a:t>5-fold cross-validation</a:t>
             </a:r>
             <a:r>
               <a:rPr lang="sr-Cyrl-RS" dirty="0"/>
